--- a/exports/pptx/lessons/middle-module-11-multiplication-near-base/day-05-mixed-cases.pptx
+++ b/exports/pptx/lessons/middle-module-11-multiplication-near-base/day-05-mixed-cases.pptx
@@ -16,9 +16,17 @@
     <p:sldId id="264" r:id="rId10"/>
     <p:sldId id="265" r:id="rId11"/>
     <p:sldId id="266" r:id="rId12"/>
+    <p:sldId id="267" r:id="rId13"/>
+    <p:sldId id="268" r:id="rId14"/>
+    <p:sldId id="269" r:id="rId15"/>
+    <p:sldId id="270" r:id="rId16"/>
+    <p:sldId id="271" r:id="rId17"/>
+    <p:sldId id="272" r:id="rId18"/>
+    <p:sldId id="273" r:id="rId19"/>
+    <p:sldId id="274" r:id="rId20"/>
   </p:sldIdLst>
   <p:notesMasterIdLst>
-    <p:notesMasterId r:id="rId13"/>
+    <p:notesMasterId r:id="rId21"/>
   </p:notesMasterIdLst>
   <p:sldSz cx="9144000" cy="5143500"/>
   <p:notesSz cx="5143500" cy="9144000"/>
@@ -712,6 +720,710 @@
             <a:fld id="{F7021451-1387-4CA6-816F-3879F97B5CBC}" type="slidenum">
               <a:rPr lang="en-US"/>
               <a:t>11</a:t>
+            </a:fld>
+            <a:endParaRPr lang="en-US"/>
+          </a:p>
+        </p:txBody>
+      </p:sp>
+    </p:spTree>
+    <p:extLst>
+      <p:ext uri="{BB962C8B-B14F-4D97-AF65-F5344CB8AC3E}">
+        <p14:creationId xmlns:p14="http://schemas.microsoft.com/office/powerpoint/2010/main" val="1024086991"/>
+      </p:ext>
+    </p:extLst>
+  </p:cSld>
+  <p:clrMapOvr>
+    <a:masterClrMapping/>
+  </p:clrMapOvr>
+</p:notes>
+</file>
+
+<file path=ppt/notesSlides/notesSlide12.xml><?xml version="1.0" encoding="utf-8"?>
+<p:notes xmlns:a="http://schemas.openxmlformats.org/drawingml/2006/main" xmlns:r="http://schemas.openxmlformats.org/officeDocument/2006/relationships" xmlns:p="http://schemas.openxmlformats.org/presentationml/2006/main">
+  <p:cSld>
+    <p:spTree>
+      <p:nvGrpSpPr>
+        <p:cNvPr id="1" name=""/>
+        <p:cNvGrpSpPr/>
+        <p:nvPr/>
+      </p:nvGrpSpPr>
+      <p:grpSpPr>
+        <a:xfrm>
+          <a:off x="0" y="0"/>
+          <a:ext cx="0" cy="0"/>
+          <a:chOff x="0" y="0"/>
+          <a:chExt cx="0" cy="0"/>
+        </a:xfrm>
+      </p:grpSpPr>
+      <p:sp>
+        <p:nvSpPr>
+          <p:cNvPr id="2" name="Slide Image Placeholder 1"/>
+          <p:cNvSpPr>
+            <a:spLocks noGrp="1" noRot="1" noChangeAspect="1"/>
+          </p:cNvSpPr>
+          <p:nvPr>
+            <p:ph type="sldImg"/>
+          </p:nvPr>
+        </p:nvSpPr>
+        <p:spPr/>
+      </p:sp>
+      <p:sp>
+        <p:nvSpPr>
+          <p:cNvPr id="3" name="Notes Placeholder 2"/>
+          <p:cNvSpPr>
+            <a:spLocks noGrp="1"/>
+          </p:cNvSpPr>
+          <p:nvPr>
+            <p:ph type="body" idx="1"/>
+          </p:nvPr>
+        </p:nvSpPr>
+        <p:spPr/>
+        <p:txBody>
+          <a:bodyPr/>
+          <a:lstStyle/>
+          <a:p>
+            <a:r>
+              <a:rPr lang="en-US" dirty="0"/>
+              <a:t/>
+            </a:r>
+            <a:endParaRPr lang="en-US" dirty="0"/>
+          </a:p>
+        </p:txBody>
+      </p:sp>
+      <p:sp>
+        <p:nvSpPr>
+          <p:cNvPr id="4" name="Slide Number Placeholder 3"/>
+          <p:cNvSpPr>
+            <a:spLocks noGrp="1"/>
+          </p:cNvSpPr>
+          <p:nvPr>
+            <p:ph type="sldNum" sz="quarter" idx="10"/>
+          </p:nvPr>
+        </p:nvSpPr>
+        <p:spPr/>
+        <p:txBody>
+          <a:bodyPr/>
+          <a:lstStyle/>
+          <a:p>
+            <a:fld id="{F7021451-1387-4CA6-816F-3879F97B5CBC}" type="slidenum">
+              <a:rPr lang="en-US"/>
+              <a:t>12</a:t>
+            </a:fld>
+            <a:endParaRPr lang="en-US"/>
+          </a:p>
+        </p:txBody>
+      </p:sp>
+    </p:spTree>
+    <p:extLst>
+      <p:ext uri="{BB962C8B-B14F-4D97-AF65-F5344CB8AC3E}">
+        <p14:creationId xmlns:p14="http://schemas.microsoft.com/office/powerpoint/2010/main" val="1024086991"/>
+      </p:ext>
+    </p:extLst>
+  </p:cSld>
+  <p:clrMapOvr>
+    <a:masterClrMapping/>
+  </p:clrMapOvr>
+</p:notes>
+</file>
+
+<file path=ppt/notesSlides/notesSlide13.xml><?xml version="1.0" encoding="utf-8"?>
+<p:notes xmlns:a="http://schemas.openxmlformats.org/drawingml/2006/main" xmlns:r="http://schemas.openxmlformats.org/officeDocument/2006/relationships" xmlns:p="http://schemas.openxmlformats.org/presentationml/2006/main">
+  <p:cSld>
+    <p:spTree>
+      <p:nvGrpSpPr>
+        <p:cNvPr id="1" name=""/>
+        <p:cNvGrpSpPr/>
+        <p:nvPr/>
+      </p:nvGrpSpPr>
+      <p:grpSpPr>
+        <a:xfrm>
+          <a:off x="0" y="0"/>
+          <a:ext cx="0" cy="0"/>
+          <a:chOff x="0" y="0"/>
+          <a:chExt cx="0" cy="0"/>
+        </a:xfrm>
+      </p:grpSpPr>
+      <p:sp>
+        <p:nvSpPr>
+          <p:cNvPr id="2" name="Slide Image Placeholder 1"/>
+          <p:cNvSpPr>
+            <a:spLocks noGrp="1" noRot="1" noChangeAspect="1"/>
+          </p:cNvSpPr>
+          <p:nvPr>
+            <p:ph type="sldImg"/>
+          </p:nvPr>
+        </p:nvSpPr>
+        <p:spPr/>
+      </p:sp>
+      <p:sp>
+        <p:nvSpPr>
+          <p:cNvPr id="3" name="Notes Placeholder 2"/>
+          <p:cNvSpPr>
+            <a:spLocks noGrp="1"/>
+          </p:cNvSpPr>
+          <p:nvPr>
+            <p:ph type="body" idx="1"/>
+          </p:nvPr>
+        </p:nvSpPr>
+        <p:spPr/>
+        <p:txBody>
+          <a:bodyPr/>
+          <a:lstStyle/>
+          <a:p>
+            <a:r>
+              <a:rPr lang="en-US" dirty="0"/>
+              <a:t/>
+            </a:r>
+            <a:endParaRPr lang="en-US" dirty="0"/>
+          </a:p>
+        </p:txBody>
+      </p:sp>
+      <p:sp>
+        <p:nvSpPr>
+          <p:cNvPr id="4" name="Slide Number Placeholder 3"/>
+          <p:cNvSpPr>
+            <a:spLocks noGrp="1"/>
+          </p:cNvSpPr>
+          <p:nvPr>
+            <p:ph type="sldNum" sz="quarter" idx="10"/>
+          </p:nvPr>
+        </p:nvSpPr>
+        <p:spPr/>
+        <p:txBody>
+          <a:bodyPr/>
+          <a:lstStyle/>
+          <a:p>
+            <a:fld id="{F7021451-1387-4CA6-816F-3879F97B5CBC}" type="slidenum">
+              <a:rPr lang="en-US"/>
+              <a:t>13</a:t>
+            </a:fld>
+            <a:endParaRPr lang="en-US"/>
+          </a:p>
+        </p:txBody>
+      </p:sp>
+    </p:spTree>
+    <p:extLst>
+      <p:ext uri="{BB962C8B-B14F-4D97-AF65-F5344CB8AC3E}">
+        <p14:creationId xmlns:p14="http://schemas.microsoft.com/office/powerpoint/2010/main" val="1024086991"/>
+      </p:ext>
+    </p:extLst>
+  </p:cSld>
+  <p:clrMapOvr>
+    <a:masterClrMapping/>
+  </p:clrMapOvr>
+</p:notes>
+</file>
+
+<file path=ppt/notesSlides/notesSlide14.xml><?xml version="1.0" encoding="utf-8"?>
+<p:notes xmlns:a="http://schemas.openxmlformats.org/drawingml/2006/main" xmlns:r="http://schemas.openxmlformats.org/officeDocument/2006/relationships" xmlns:p="http://schemas.openxmlformats.org/presentationml/2006/main">
+  <p:cSld>
+    <p:spTree>
+      <p:nvGrpSpPr>
+        <p:cNvPr id="1" name=""/>
+        <p:cNvGrpSpPr/>
+        <p:nvPr/>
+      </p:nvGrpSpPr>
+      <p:grpSpPr>
+        <a:xfrm>
+          <a:off x="0" y="0"/>
+          <a:ext cx="0" cy="0"/>
+          <a:chOff x="0" y="0"/>
+          <a:chExt cx="0" cy="0"/>
+        </a:xfrm>
+      </p:grpSpPr>
+      <p:sp>
+        <p:nvSpPr>
+          <p:cNvPr id="2" name="Slide Image Placeholder 1"/>
+          <p:cNvSpPr>
+            <a:spLocks noGrp="1" noRot="1" noChangeAspect="1"/>
+          </p:cNvSpPr>
+          <p:nvPr>
+            <p:ph type="sldImg"/>
+          </p:nvPr>
+        </p:nvSpPr>
+        <p:spPr/>
+      </p:sp>
+      <p:sp>
+        <p:nvSpPr>
+          <p:cNvPr id="3" name="Notes Placeholder 2"/>
+          <p:cNvSpPr>
+            <a:spLocks noGrp="1"/>
+          </p:cNvSpPr>
+          <p:nvPr>
+            <p:ph type="body" idx="1"/>
+          </p:nvPr>
+        </p:nvSpPr>
+        <p:spPr/>
+        <p:txBody>
+          <a:bodyPr/>
+          <a:lstStyle/>
+          <a:p>
+            <a:r>
+              <a:rPr lang="en-US" dirty="0"/>
+              <a:t/>
+            </a:r>
+            <a:endParaRPr lang="en-US" dirty="0"/>
+          </a:p>
+        </p:txBody>
+      </p:sp>
+      <p:sp>
+        <p:nvSpPr>
+          <p:cNvPr id="4" name="Slide Number Placeholder 3"/>
+          <p:cNvSpPr>
+            <a:spLocks noGrp="1"/>
+          </p:cNvSpPr>
+          <p:nvPr>
+            <p:ph type="sldNum" sz="quarter" idx="10"/>
+          </p:nvPr>
+        </p:nvSpPr>
+        <p:spPr/>
+        <p:txBody>
+          <a:bodyPr/>
+          <a:lstStyle/>
+          <a:p>
+            <a:fld id="{F7021451-1387-4CA6-816F-3879F97B5CBC}" type="slidenum">
+              <a:rPr lang="en-US"/>
+              <a:t>14</a:t>
+            </a:fld>
+            <a:endParaRPr lang="en-US"/>
+          </a:p>
+        </p:txBody>
+      </p:sp>
+    </p:spTree>
+    <p:extLst>
+      <p:ext uri="{BB962C8B-B14F-4D97-AF65-F5344CB8AC3E}">
+        <p14:creationId xmlns:p14="http://schemas.microsoft.com/office/powerpoint/2010/main" val="1024086991"/>
+      </p:ext>
+    </p:extLst>
+  </p:cSld>
+  <p:clrMapOvr>
+    <a:masterClrMapping/>
+  </p:clrMapOvr>
+</p:notes>
+</file>
+
+<file path=ppt/notesSlides/notesSlide15.xml><?xml version="1.0" encoding="utf-8"?>
+<p:notes xmlns:a="http://schemas.openxmlformats.org/drawingml/2006/main" xmlns:r="http://schemas.openxmlformats.org/officeDocument/2006/relationships" xmlns:p="http://schemas.openxmlformats.org/presentationml/2006/main">
+  <p:cSld>
+    <p:spTree>
+      <p:nvGrpSpPr>
+        <p:cNvPr id="1" name=""/>
+        <p:cNvGrpSpPr/>
+        <p:nvPr/>
+      </p:nvGrpSpPr>
+      <p:grpSpPr>
+        <a:xfrm>
+          <a:off x="0" y="0"/>
+          <a:ext cx="0" cy="0"/>
+          <a:chOff x="0" y="0"/>
+          <a:chExt cx="0" cy="0"/>
+        </a:xfrm>
+      </p:grpSpPr>
+      <p:sp>
+        <p:nvSpPr>
+          <p:cNvPr id="2" name="Slide Image Placeholder 1"/>
+          <p:cNvSpPr>
+            <a:spLocks noGrp="1" noRot="1" noChangeAspect="1"/>
+          </p:cNvSpPr>
+          <p:nvPr>
+            <p:ph type="sldImg"/>
+          </p:nvPr>
+        </p:nvSpPr>
+        <p:spPr/>
+      </p:sp>
+      <p:sp>
+        <p:nvSpPr>
+          <p:cNvPr id="3" name="Notes Placeholder 2"/>
+          <p:cNvSpPr>
+            <a:spLocks noGrp="1"/>
+          </p:cNvSpPr>
+          <p:nvPr>
+            <p:ph type="body" idx="1"/>
+          </p:nvPr>
+        </p:nvSpPr>
+        <p:spPr/>
+        <p:txBody>
+          <a:bodyPr/>
+          <a:lstStyle/>
+          <a:p>
+            <a:r>
+              <a:rPr lang="en-US" dirty="0"/>
+              <a:t/>
+            </a:r>
+            <a:endParaRPr lang="en-US" dirty="0"/>
+          </a:p>
+        </p:txBody>
+      </p:sp>
+      <p:sp>
+        <p:nvSpPr>
+          <p:cNvPr id="4" name="Slide Number Placeholder 3"/>
+          <p:cNvSpPr>
+            <a:spLocks noGrp="1"/>
+          </p:cNvSpPr>
+          <p:nvPr>
+            <p:ph type="sldNum" sz="quarter" idx="10"/>
+          </p:nvPr>
+        </p:nvSpPr>
+        <p:spPr/>
+        <p:txBody>
+          <a:bodyPr/>
+          <a:lstStyle/>
+          <a:p>
+            <a:fld id="{F7021451-1387-4CA6-816F-3879F97B5CBC}" type="slidenum">
+              <a:rPr lang="en-US"/>
+              <a:t>15</a:t>
+            </a:fld>
+            <a:endParaRPr lang="en-US"/>
+          </a:p>
+        </p:txBody>
+      </p:sp>
+    </p:spTree>
+    <p:extLst>
+      <p:ext uri="{BB962C8B-B14F-4D97-AF65-F5344CB8AC3E}">
+        <p14:creationId xmlns:p14="http://schemas.microsoft.com/office/powerpoint/2010/main" val="1024086991"/>
+      </p:ext>
+    </p:extLst>
+  </p:cSld>
+  <p:clrMapOvr>
+    <a:masterClrMapping/>
+  </p:clrMapOvr>
+</p:notes>
+</file>
+
+<file path=ppt/notesSlides/notesSlide16.xml><?xml version="1.0" encoding="utf-8"?>
+<p:notes xmlns:a="http://schemas.openxmlformats.org/drawingml/2006/main" xmlns:r="http://schemas.openxmlformats.org/officeDocument/2006/relationships" xmlns:p="http://schemas.openxmlformats.org/presentationml/2006/main">
+  <p:cSld>
+    <p:spTree>
+      <p:nvGrpSpPr>
+        <p:cNvPr id="1" name=""/>
+        <p:cNvGrpSpPr/>
+        <p:nvPr/>
+      </p:nvGrpSpPr>
+      <p:grpSpPr>
+        <a:xfrm>
+          <a:off x="0" y="0"/>
+          <a:ext cx="0" cy="0"/>
+          <a:chOff x="0" y="0"/>
+          <a:chExt cx="0" cy="0"/>
+        </a:xfrm>
+      </p:grpSpPr>
+      <p:sp>
+        <p:nvSpPr>
+          <p:cNvPr id="2" name="Slide Image Placeholder 1"/>
+          <p:cNvSpPr>
+            <a:spLocks noGrp="1" noRot="1" noChangeAspect="1"/>
+          </p:cNvSpPr>
+          <p:nvPr>
+            <p:ph type="sldImg"/>
+          </p:nvPr>
+        </p:nvSpPr>
+        <p:spPr/>
+      </p:sp>
+      <p:sp>
+        <p:nvSpPr>
+          <p:cNvPr id="3" name="Notes Placeholder 2"/>
+          <p:cNvSpPr>
+            <a:spLocks noGrp="1"/>
+          </p:cNvSpPr>
+          <p:nvPr>
+            <p:ph type="body" idx="1"/>
+          </p:nvPr>
+        </p:nvSpPr>
+        <p:spPr/>
+        <p:txBody>
+          <a:bodyPr/>
+          <a:lstStyle/>
+          <a:p>
+            <a:r>
+              <a:rPr lang="en-US" dirty="0"/>
+              <a:t/>
+            </a:r>
+            <a:endParaRPr lang="en-US" dirty="0"/>
+          </a:p>
+        </p:txBody>
+      </p:sp>
+      <p:sp>
+        <p:nvSpPr>
+          <p:cNvPr id="4" name="Slide Number Placeholder 3"/>
+          <p:cNvSpPr>
+            <a:spLocks noGrp="1"/>
+          </p:cNvSpPr>
+          <p:nvPr>
+            <p:ph type="sldNum" sz="quarter" idx="10"/>
+          </p:nvPr>
+        </p:nvSpPr>
+        <p:spPr/>
+        <p:txBody>
+          <a:bodyPr/>
+          <a:lstStyle/>
+          <a:p>
+            <a:fld id="{F7021451-1387-4CA6-816F-3879F97B5CBC}" type="slidenum">
+              <a:rPr lang="en-US"/>
+              <a:t>16</a:t>
+            </a:fld>
+            <a:endParaRPr lang="en-US"/>
+          </a:p>
+        </p:txBody>
+      </p:sp>
+    </p:spTree>
+    <p:extLst>
+      <p:ext uri="{BB962C8B-B14F-4D97-AF65-F5344CB8AC3E}">
+        <p14:creationId xmlns:p14="http://schemas.microsoft.com/office/powerpoint/2010/main" val="1024086991"/>
+      </p:ext>
+    </p:extLst>
+  </p:cSld>
+  <p:clrMapOvr>
+    <a:masterClrMapping/>
+  </p:clrMapOvr>
+</p:notes>
+</file>
+
+<file path=ppt/notesSlides/notesSlide17.xml><?xml version="1.0" encoding="utf-8"?>
+<p:notes xmlns:a="http://schemas.openxmlformats.org/drawingml/2006/main" xmlns:r="http://schemas.openxmlformats.org/officeDocument/2006/relationships" xmlns:p="http://schemas.openxmlformats.org/presentationml/2006/main">
+  <p:cSld>
+    <p:spTree>
+      <p:nvGrpSpPr>
+        <p:cNvPr id="1" name=""/>
+        <p:cNvGrpSpPr/>
+        <p:nvPr/>
+      </p:nvGrpSpPr>
+      <p:grpSpPr>
+        <a:xfrm>
+          <a:off x="0" y="0"/>
+          <a:ext cx="0" cy="0"/>
+          <a:chOff x="0" y="0"/>
+          <a:chExt cx="0" cy="0"/>
+        </a:xfrm>
+      </p:grpSpPr>
+      <p:sp>
+        <p:nvSpPr>
+          <p:cNvPr id="2" name="Slide Image Placeholder 1"/>
+          <p:cNvSpPr>
+            <a:spLocks noGrp="1" noRot="1" noChangeAspect="1"/>
+          </p:cNvSpPr>
+          <p:nvPr>
+            <p:ph type="sldImg"/>
+          </p:nvPr>
+        </p:nvSpPr>
+        <p:spPr/>
+      </p:sp>
+      <p:sp>
+        <p:nvSpPr>
+          <p:cNvPr id="3" name="Notes Placeholder 2"/>
+          <p:cNvSpPr>
+            <a:spLocks noGrp="1"/>
+          </p:cNvSpPr>
+          <p:nvPr>
+            <p:ph type="body" idx="1"/>
+          </p:nvPr>
+        </p:nvSpPr>
+        <p:spPr/>
+        <p:txBody>
+          <a:bodyPr/>
+          <a:lstStyle/>
+          <a:p>
+            <a:r>
+              <a:rPr lang="en-US" dirty="0"/>
+              <a:t/>
+            </a:r>
+            <a:endParaRPr lang="en-US" dirty="0"/>
+          </a:p>
+        </p:txBody>
+      </p:sp>
+      <p:sp>
+        <p:nvSpPr>
+          <p:cNvPr id="4" name="Slide Number Placeholder 3"/>
+          <p:cNvSpPr>
+            <a:spLocks noGrp="1"/>
+          </p:cNvSpPr>
+          <p:nvPr>
+            <p:ph type="sldNum" sz="quarter" idx="10"/>
+          </p:nvPr>
+        </p:nvSpPr>
+        <p:spPr/>
+        <p:txBody>
+          <a:bodyPr/>
+          <a:lstStyle/>
+          <a:p>
+            <a:fld id="{F7021451-1387-4CA6-816F-3879F97B5CBC}" type="slidenum">
+              <a:rPr lang="en-US"/>
+              <a:t>17</a:t>
+            </a:fld>
+            <a:endParaRPr lang="en-US"/>
+          </a:p>
+        </p:txBody>
+      </p:sp>
+    </p:spTree>
+    <p:extLst>
+      <p:ext uri="{BB962C8B-B14F-4D97-AF65-F5344CB8AC3E}">
+        <p14:creationId xmlns:p14="http://schemas.microsoft.com/office/powerpoint/2010/main" val="1024086991"/>
+      </p:ext>
+    </p:extLst>
+  </p:cSld>
+  <p:clrMapOvr>
+    <a:masterClrMapping/>
+  </p:clrMapOvr>
+</p:notes>
+</file>
+
+<file path=ppt/notesSlides/notesSlide18.xml><?xml version="1.0" encoding="utf-8"?>
+<p:notes xmlns:a="http://schemas.openxmlformats.org/drawingml/2006/main" xmlns:r="http://schemas.openxmlformats.org/officeDocument/2006/relationships" xmlns:p="http://schemas.openxmlformats.org/presentationml/2006/main">
+  <p:cSld>
+    <p:spTree>
+      <p:nvGrpSpPr>
+        <p:cNvPr id="1" name=""/>
+        <p:cNvGrpSpPr/>
+        <p:nvPr/>
+      </p:nvGrpSpPr>
+      <p:grpSpPr>
+        <a:xfrm>
+          <a:off x="0" y="0"/>
+          <a:ext cx="0" cy="0"/>
+          <a:chOff x="0" y="0"/>
+          <a:chExt cx="0" cy="0"/>
+        </a:xfrm>
+      </p:grpSpPr>
+      <p:sp>
+        <p:nvSpPr>
+          <p:cNvPr id="2" name="Slide Image Placeholder 1"/>
+          <p:cNvSpPr>
+            <a:spLocks noGrp="1" noRot="1" noChangeAspect="1"/>
+          </p:cNvSpPr>
+          <p:nvPr>
+            <p:ph type="sldImg"/>
+          </p:nvPr>
+        </p:nvSpPr>
+        <p:spPr/>
+      </p:sp>
+      <p:sp>
+        <p:nvSpPr>
+          <p:cNvPr id="3" name="Notes Placeholder 2"/>
+          <p:cNvSpPr>
+            <a:spLocks noGrp="1"/>
+          </p:cNvSpPr>
+          <p:nvPr>
+            <p:ph type="body" idx="1"/>
+          </p:nvPr>
+        </p:nvSpPr>
+        <p:spPr/>
+        <p:txBody>
+          <a:bodyPr/>
+          <a:lstStyle/>
+          <a:p>
+            <a:r>
+              <a:rPr lang="en-US" dirty="0"/>
+              <a:t/>
+            </a:r>
+            <a:endParaRPr lang="en-US" dirty="0"/>
+          </a:p>
+        </p:txBody>
+      </p:sp>
+      <p:sp>
+        <p:nvSpPr>
+          <p:cNvPr id="4" name="Slide Number Placeholder 3"/>
+          <p:cNvSpPr>
+            <a:spLocks noGrp="1"/>
+          </p:cNvSpPr>
+          <p:nvPr>
+            <p:ph type="sldNum" sz="quarter" idx="10"/>
+          </p:nvPr>
+        </p:nvSpPr>
+        <p:spPr/>
+        <p:txBody>
+          <a:bodyPr/>
+          <a:lstStyle/>
+          <a:p>
+            <a:fld id="{F7021451-1387-4CA6-816F-3879F97B5CBC}" type="slidenum">
+              <a:rPr lang="en-US"/>
+              <a:t>18</a:t>
+            </a:fld>
+            <a:endParaRPr lang="en-US"/>
+          </a:p>
+        </p:txBody>
+      </p:sp>
+    </p:spTree>
+    <p:extLst>
+      <p:ext uri="{BB962C8B-B14F-4D97-AF65-F5344CB8AC3E}">
+        <p14:creationId xmlns:p14="http://schemas.microsoft.com/office/powerpoint/2010/main" val="1024086991"/>
+      </p:ext>
+    </p:extLst>
+  </p:cSld>
+  <p:clrMapOvr>
+    <a:masterClrMapping/>
+  </p:clrMapOvr>
+</p:notes>
+</file>
+
+<file path=ppt/notesSlides/notesSlide19.xml><?xml version="1.0" encoding="utf-8"?>
+<p:notes xmlns:a="http://schemas.openxmlformats.org/drawingml/2006/main" xmlns:r="http://schemas.openxmlformats.org/officeDocument/2006/relationships" xmlns:p="http://schemas.openxmlformats.org/presentationml/2006/main">
+  <p:cSld>
+    <p:spTree>
+      <p:nvGrpSpPr>
+        <p:cNvPr id="1" name=""/>
+        <p:cNvGrpSpPr/>
+        <p:nvPr/>
+      </p:nvGrpSpPr>
+      <p:grpSpPr>
+        <a:xfrm>
+          <a:off x="0" y="0"/>
+          <a:ext cx="0" cy="0"/>
+          <a:chOff x="0" y="0"/>
+          <a:chExt cx="0" cy="0"/>
+        </a:xfrm>
+      </p:grpSpPr>
+      <p:sp>
+        <p:nvSpPr>
+          <p:cNvPr id="2" name="Slide Image Placeholder 1"/>
+          <p:cNvSpPr>
+            <a:spLocks noGrp="1" noRot="1" noChangeAspect="1"/>
+          </p:cNvSpPr>
+          <p:nvPr>
+            <p:ph type="sldImg"/>
+          </p:nvPr>
+        </p:nvSpPr>
+        <p:spPr/>
+      </p:sp>
+      <p:sp>
+        <p:nvSpPr>
+          <p:cNvPr id="3" name="Notes Placeholder 2"/>
+          <p:cNvSpPr>
+            <a:spLocks noGrp="1"/>
+          </p:cNvSpPr>
+          <p:nvPr>
+            <p:ph type="body" idx="1"/>
+          </p:nvPr>
+        </p:nvSpPr>
+        <p:spPr/>
+        <p:txBody>
+          <a:bodyPr/>
+          <a:lstStyle/>
+          <a:p>
+            <a:r>
+              <a:rPr lang="en-US" dirty="0"/>
+              <a:t/>
+            </a:r>
+            <a:endParaRPr lang="en-US" dirty="0"/>
+          </a:p>
+        </p:txBody>
+      </p:sp>
+      <p:sp>
+        <p:nvSpPr>
+          <p:cNvPr id="4" name="Slide Number Placeholder 3"/>
+          <p:cNvSpPr>
+            <a:spLocks noGrp="1"/>
+          </p:cNvSpPr>
+          <p:nvPr>
+            <p:ph type="sldNum" sz="quarter" idx="10"/>
+          </p:nvPr>
+        </p:nvSpPr>
+        <p:spPr/>
+        <p:txBody>
+          <a:bodyPr/>
+          <a:lstStyle/>
+          <a:p>
+            <a:fld id="{F7021451-1387-4CA6-816F-3879F97B5CBC}" type="slidenum">
+              <a:rPr lang="en-US"/>
+              <a:t>19</a:t>
             </a:fld>
             <a:endParaRPr lang="en-US"/>
           </a:p>
@@ -2011,194 +2723,6 @@
         </p:nvSpPr>
         <p:spPr>
           <a:xfrm>
-            <a:off x="406301" y="1223963"/>
-            <a:ext cx="8498026" cy="274290"/>
-          </a:xfrm>
-          <a:prstGeom prst="rect">
-            <a:avLst/>
-          </a:prstGeom>
-          <a:noFill/>
-          <a:ln/>
-        </p:spPr>
-        <p:txBody>
-          <a:bodyPr wrap="square" lIns="0" tIns="0" rIns="0" bIns="0" rtlCol="0" anchor="t"/>
-          <a:lstStyle/>
-          <a:p>
-            <a:pPr algn="l" indent="0" marL="0">
-              <a:lnSpc>
-                <a:spcPts val="2160"/>
-              </a:lnSpc>
-              <a:spcBef>
-                <a:spcPts val="600"/>
-              </a:spcBef>
-              <a:spcAft>
-                <a:spcPts val="800"/>
-              </a:spcAft>
-              <a:buNone/>
-            </a:pPr>
-            <a:r>
-              <a:rPr lang="en-US" sz="1800" b="1" dirty="0">
-                <a:solidFill>
-                  <a:srgbClr val="FE4447"/>
-                </a:solidFill>
-                <a:latin typeface="Georgia" pitchFamily="34" charset="0"/>
-                <a:ea typeface="Georgia" pitchFamily="34" charset="-122"/>
-                <a:cs typeface="Georgia" pitchFamily="34" charset="-120"/>
-              </a:rPr>
-              <a:t>Learning objective</a:t>
-            </a:r>
-            <a:endParaRPr lang="en-US" sz="1800" dirty="0"/>
-          </a:p>
-        </p:txBody>
-      </p:sp>
-      <p:sp>
-        <p:nvSpPr>
-          <p:cNvPr id="6" name="Text 4"/>
-          <p:cNvSpPr/>
-          <p:nvPr/>
-        </p:nvSpPr>
-        <p:spPr>
-          <a:xfrm>
-            <a:off x="406301" y="1637854"/>
-            <a:ext cx="8498026" cy="426541"/>
-          </a:xfrm>
-          <a:prstGeom prst="rect">
-            <a:avLst/>
-          </a:prstGeom>
-          <a:noFill/>
-          <a:ln/>
-        </p:spPr>
-        <p:txBody>
-          <a:bodyPr wrap="square" lIns="0" tIns="0" rIns="0" bIns="0" rtlCol="0" anchor="t"/>
-          <a:lstStyle/>
-          <a:p>
-            <a:pPr algn="l" indent="0" marL="0">
-              <a:lnSpc>
-                <a:spcPts val="1680"/>
-              </a:lnSpc>
-              <a:spcBef>
-                <a:spcPts val="300"/>
-              </a:spcBef>
-              <a:spcAft>
-                <a:spcPts val="300"/>
-              </a:spcAft>
-              <a:buNone/>
-            </a:pPr>
-            <a:r>
-              <a:rPr lang="en-US" sz="1200" dirty="0">
-                <a:solidFill>
-                  <a:srgbClr val="1C2833"/>
-                </a:solidFill>
-                <a:latin typeface="Arial" pitchFamily="34" charset="0"/>
-                <a:ea typeface="Arial" pitchFamily="34" charset="-122"/>
-                <a:cs typeface="Arial" pitchFamily="34" charset="-120"/>
-              </a:rPr>
-              <a:t>By the end of this lesson, students will solve any 2-digit × 2-digit multiplication where one factor is </a:t>
-            </a:r>
-            <a:pPr algn="l" indent="0" marL="0">
-              <a:lnSpc>
-                <a:spcPts val="1680"/>
-              </a:lnSpc>
-              <a:spcBef>
-                <a:spcPts val="300"/>
-              </a:spcBef>
-              <a:spcAft>
-                <a:spcPts val="300"/>
-              </a:spcAft>
-              <a:buNone/>
-            </a:pPr>
-            <a:r>
-              <a:rPr lang="en-US" sz="1200" i="1" dirty="0">
-                <a:solidFill>
-                  <a:srgbClr val="1C2833"/>
-                </a:solidFill>
-                <a:latin typeface="Arial" pitchFamily="34" charset="0"/>
-                <a:ea typeface="Arial" pitchFamily="34" charset="-122"/>
-                <a:cs typeface="Arial" pitchFamily="34" charset="-120"/>
-              </a:rPr>
-              <a:t>above</a:t>
-            </a:r>
-            <a:pPr algn="l" indent="0" marL="0">
-              <a:lnSpc>
-                <a:spcPts val="1680"/>
-              </a:lnSpc>
-              <a:spcBef>
-                <a:spcPts val="300"/>
-              </a:spcBef>
-              <a:spcAft>
-                <a:spcPts val="300"/>
-              </a:spcAft>
-              <a:buNone/>
-            </a:pPr>
-            <a:r>
-              <a:rPr lang="en-US" sz="1200" dirty="0">
-                <a:solidFill>
-                  <a:srgbClr val="1C2833"/>
-                </a:solidFill>
-                <a:latin typeface="Arial" pitchFamily="34" charset="0"/>
-                <a:ea typeface="Arial" pitchFamily="34" charset="-122"/>
-                <a:cs typeface="Arial" pitchFamily="34" charset="-120"/>
-              </a:rPr>
-              <a:t> 100 and one is </a:t>
-            </a:r>
-            <a:pPr algn="l" indent="0" marL="0">
-              <a:lnSpc>
-                <a:spcPts val="1680"/>
-              </a:lnSpc>
-              <a:spcBef>
-                <a:spcPts val="300"/>
-              </a:spcBef>
-              <a:spcAft>
-                <a:spcPts val="300"/>
-              </a:spcAft>
-              <a:buNone/>
-            </a:pPr>
-            <a:r>
-              <a:rPr lang="en-US" sz="1200" i="1" dirty="0">
-                <a:solidFill>
-                  <a:srgbClr val="1C2833"/>
-                </a:solidFill>
-                <a:latin typeface="Arial" pitchFamily="34" charset="0"/>
-                <a:ea typeface="Arial" pitchFamily="34" charset="-122"/>
-                <a:cs typeface="Arial" pitchFamily="34" charset="-120"/>
-              </a:rPr>
-              <a:t>below</a:t>
-            </a:r>
-            <a:pPr algn="l" indent="0" marL="0">
-              <a:lnSpc>
-                <a:spcPts val="1680"/>
-              </a:lnSpc>
-              <a:spcBef>
-                <a:spcPts val="300"/>
-              </a:spcBef>
-              <a:spcAft>
-                <a:spcPts val="300"/>
-              </a:spcAft>
-              <a:buNone/>
-            </a:pPr>
-            <a:r>
-              <a:rPr lang="en-US" sz="1200" dirty="0">
-                <a:solidFill>
-                  <a:srgbClr val="1C2833"/>
-                </a:solidFill>
-                <a:latin typeface="Arial" pitchFamily="34" charset="0"/>
-                <a:ea typeface="Arial" pitchFamily="34" charset="-122"/>
-                <a:cs typeface="Arial" pitchFamily="34" charset="-120"/>
-              </a:rPr>
-              <a:t>, handling the negative right-part correctly.</a:t>
-            </a:r>
-            <a:endParaRPr lang="en-US" sz="1200" dirty="0"/>
-          </a:p>
-        </p:txBody>
-      </p:sp>
-      <p:sp>
-        <p:nvSpPr>
-          <p:cNvPr id="7" name="Text 5"/>
-          <p:cNvSpPr/>
-          <p:nvPr/>
-        </p:nvSpPr>
-        <p:spPr>
-          <a:xfrm>
             <a:off x="406301" y="4434929"/>
             <a:ext cx="8498026" cy="213271"/>
           </a:xfrm>
@@ -2343,7 +2867,7 @@
                 <a:ea typeface="Georgia" pitchFamily="34" charset="-122"/>
                 <a:cs typeface="Georgia" pitchFamily="34" charset="-120"/>
               </a:rPr>
-              <a:t>Teacher notes</a:t>
+              <a:t>Core (15 min) — One above, one below (cont.)</a:t>
             </a:r>
             <a:endParaRPr lang="en-US" sz="1800" dirty="0"/>
           </a:p>
@@ -2357,8 +2881,8 @@
         </p:nvSpPr>
         <p:spPr>
           <a:xfrm>
-            <a:off x="406301" y="870942"/>
-            <a:ext cx="8498026" cy="853083"/>
+            <a:off x="634901" y="883593"/>
+            <a:ext cx="8102798" cy="281880"/>
           </a:xfrm>
           <a:prstGeom prst="rect">
             <a:avLst/>
@@ -2370,13 +2894,31 @@
           <a:bodyPr wrap="square" lIns="0" tIns="0" rIns="0" bIns="0" rtlCol="0" anchor="t"/>
           <a:lstStyle/>
           <a:p>
-            <a:pPr algn="l" indent="0" marL="0">
-              <a:lnSpc>
-                <a:spcPts val="1680"/>
-              </a:lnSpc>
-              <a:spcBef>
-                <a:spcPts val="300"/>
-              </a:spcBef>
+            <a:pPr algn="l" marL="342900" indent="-342900">
+              <a:lnSpc>
+                <a:spcPts val="1620"/>
+              </a:lnSpc>
+              <a:spcAft>
+                <a:spcPts val="300"/>
+              </a:spcAft>
+              <a:buSzPct val="100000"/>
+              <a:buChar char="•"/>
+            </a:pPr>
+            <a:r>
+              <a:rPr lang="en-US" sz="1200" b="1" dirty="0">
+                <a:solidFill>
+                  <a:srgbClr val="1C2833"/>
+                </a:solidFill>
+                <a:latin typeface="Arial" pitchFamily="34" charset="0"/>
+                <a:ea typeface="Arial" pitchFamily="34" charset="-122"/>
+                <a:cs typeface="Arial" pitchFamily="34" charset="-120"/>
+              </a:rPr>
+              <a:t>Or — the "borrow from left" form:</a:t>
+            </a:r>
+            <a:pPr algn="l" indent="0" marL="0">
+              <a:lnSpc>
+                <a:spcPts val="1620"/>
+              </a:lnSpc>
               <a:spcAft>
                 <a:spcPts val="300"/>
               </a:spcAft>
@@ -2391,15 +2933,106 @@
                 <a:ea typeface="Arial" pitchFamily="34" charset="-122"/>
                 <a:cs typeface="Arial" pitchFamily="34" charset="-120"/>
               </a:rPr>
-              <a:t>– The mixed case is where most students give up and revert to long multiplication. </a:t>
-            </a:r>
-            <a:pPr algn="l" indent="0" marL="0">
-              <a:lnSpc>
-                <a:spcPts val="1680"/>
-              </a:lnSpc>
-              <a:spcBef>
-                <a:spcPts val="300"/>
-              </a:spcBef>
+              <a:t> if students prefer always-positive right parts:</a:t>
+            </a:r>
+            <a:endParaRPr lang="en-US" sz="1200" dirty="0"/>
+          </a:p>
+        </p:txBody>
+      </p:sp>
+      <p:sp>
+        <p:nvSpPr>
+          <p:cNvPr id="5" name="Text 3"/>
+          <p:cNvSpPr/>
+          <p:nvPr/>
+        </p:nvSpPr>
+        <p:spPr>
+          <a:xfrm>
+            <a:off x="634901" y="1266974"/>
+            <a:ext cx="8102798" cy="769441"/>
+          </a:xfrm>
+          <a:prstGeom prst="rect">
+            <a:avLst/>
+          </a:prstGeom>
+          <a:noFill/>
+          <a:ln/>
+        </p:spPr>
+        <p:txBody>
+          <a:bodyPr wrap="square" lIns="0" tIns="0" rIns="0" bIns="0" rtlCol="0" anchor="t"/>
+          <a:lstStyle/>
+          <a:p>
+            <a:pPr algn="l" marL="342900" indent="-342900">
+              <a:lnSpc>
+                <a:spcPts val="1620"/>
+              </a:lnSpc>
+              <a:spcAft>
+                <a:spcPts val="300"/>
+              </a:spcAft>
+              <a:buSzPct val="100000"/>
+              <a:buChar char="•"/>
+            </a:pPr>
+            <a:r>
+              <a:rPr lang="en-US" sz="1200" dirty="0">
+                <a:solidFill>
+                  <a:srgbClr val="1C2833"/>
+                </a:solidFill>
+                <a:latin typeface="Arial" pitchFamily="34" charset="0"/>
+                <a:ea typeface="Arial" pitchFamily="34" charset="-122"/>
+                <a:cs typeface="Arial" pitchFamily="34" charset="-120"/>
+              </a:rPr>
+              <a:t>Left = 100. Right = −4. Borrow 1 from left (which is worth 100 in the right):</a:t>
+            </a:r>
+            <a:endParaRPr lang="en-US" sz="1200" dirty="0"/>
+          </a:p>
+          <a:p>
+            <a:pPr algn="l" marL="342900" indent="-342900">
+              <a:lnSpc>
+                <a:spcPts val="1620"/>
+              </a:lnSpc>
+              <a:spcAft>
+                <a:spcPts val="300"/>
+              </a:spcAft>
+              <a:buSzPct val="100000"/>
+              <a:buChar char="•"/>
+            </a:pPr>
+            <a:r>
+              <a:rPr lang="en-US" sz="1200" dirty="0">
+                <a:solidFill>
+                  <a:srgbClr val="1C2833"/>
+                </a:solidFill>
+                <a:latin typeface="Arial" pitchFamily="34" charset="0"/>
+                <a:ea typeface="Arial" pitchFamily="34" charset="-122"/>
+                <a:cs typeface="Arial" pitchFamily="34" charset="-120"/>
+              </a:rPr>
+              <a:t>New left = 100 − 1 = 99. New right = 100 − 4 = 96 (now positive).</a:t>
+            </a:r>
+            <a:endParaRPr lang="en-US" sz="1200" dirty="0"/>
+          </a:p>
+          <a:p>
+            <a:pPr algn="l" marL="342900" indent="-342900">
+              <a:lnSpc>
+                <a:spcPts val="1620"/>
+              </a:lnSpc>
+              <a:spcAft>
+                <a:spcPts val="300"/>
+              </a:spcAft>
+              <a:buSzPct val="100000"/>
+              <a:buChar char="•"/>
+            </a:pPr>
+            <a:r>
+              <a:rPr lang="en-US" sz="1200" dirty="0">
+                <a:solidFill>
+                  <a:srgbClr val="1C2833"/>
+                </a:solidFill>
+                <a:latin typeface="Arial" pitchFamily="34" charset="0"/>
+                <a:ea typeface="Arial" pitchFamily="34" charset="-122"/>
+                <a:cs typeface="Arial" pitchFamily="34" charset="-120"/>
+              </a:rPr>
+              <a:t>Answer: </a:t>
+            </a:r>
+            <a:pPr algn="l" indent="0" marL="0">
+              <a:lnSpc>
+                <a:spcPts val="1620"/>
+              </a:lnSpc>
               <a:spcAft>
                 <a:spcPts val="300"/>
               </a:spcAft>
@@ -2414,15 +3047,12 @@
                 <a:ea typeface="Arial" pitchFamily="34" charset="-122"/>
                 <a:cs typeface="Arial" pitchFamily="34" charset="-120"/>
               </a:rPr>
-              <a:t>Don't let them.</a:t>
-            </a:r>
-            <a:pPr algn="l" indent="0" marL="0">
-              <a:lnSpc>
-                <a:spcPts val="1680"/>
-              </a:lnSpc>
-              <a:spcBef>
-                <a:spcPts val="300"/>
-              </a:spcBef>
+              <a:t>9996</a:t>
+            </a:r>
+            <a:pPr algn="l" indent="0" marL="0">
+              <a:lnSpc>
+                <a:spcPts val="1620"/>
+              </a:lnSpc>
               <a:spcAft>
                 <a:spcPts val="300"/>
               </a:spcAft>
@@ -2437,7 +3067,7 @@
                 <a:ea typeface="Arial" pitchFamily="34" charset="-122"/>
                 <a:cs typeface="Arial" pitchFamily="34" charset="-120"/>
               </a:rPr>
-              <a:t> The sign care is genuinely tricky for one day; by Day 6 it'll be a non-issue. – The "tier up" connection to difference-of-squares (a²−b² identity) is a real bridge to algebra. If a student spots it, celebrate. – Some students will resist the negative right part. Show them the "borrow from left" form (above) as an alternative — both forms give the same answer.</a:t>
+              <a:t>.</a:t>
             </a:r>
             <a:endParaRPr lang="en-US" sz="1200" dirty="0"/>
           </a:p>
@@ -2445,7 +3075,7 @@
       </p:sp>
       <p:sp>
         <p:nvSpPr>
-          <p:cNvPr id="5" name="Text 3"/>
+          <p:cNvPr id="6" name="Text 4"/>
           <p:cNvSpPr/>
           <p:nvPr/>
         </p:nvSpPr>
@@ -2595,6 +3225,3807 @@
                 <a:ea typeface="Georgia" pitchFamily="34" charset="-122"/>
                 <a:cs typeface="Georgia" pitchFamily="34" charset="-120"/>
               </a:rPr>
+              <a:t>Core (15 min) — One above, one below (cont.)</a:t>
+            </a:r>
+            <a:endParaRPr lang="en-US" sz="1800" dirty="0"/>
+          </a:p>
+        </p:txBody>
+      </p:sp>
+      <p:sp>
+        <p:nvSpPr>
+          <p:cNvPr id="4" name="Text 2"/>
+          <p:cNvSpPr/>
+          <p:nvPr/>
+        </p:nvSpPr>
+        <p:spPr>
+          <a:xfrm>
+            <a:off x="634901" y="883593"/>
+            <a:ext cx="8102798" cy="281880"/>
+          </a:xfrm>
+          <a:prstGeom prst="rect">
+            <a:avLst/>
+          </a:prstGeom>
+          <a:noFill/>
+          <a:ln/>
+        </p:spPr>
+        <p:txBody>
+          <a:bodyPr wrap="square" lIns="0" tIns="0" rIns="0" bIns="0" rtlCol="0" anchor="t"/>
+          <a:lstStyle/>
+          <a:p>
+            <a:pPr algn="l" marL="342900" indent="-342900">
+              <a:lnSpc>
+                <a:spcPts val="1620"/>
+              </a:lnSpc>
+              <a:spcAft>
+                <a:spcPts val="300"/>
+              </a:spcAft>
+              <a:buSzPct val="100000"/>
+              <a:buChar char="•"/>
+            </a:pPr>
+            <a:r>
+              <a:rPr lang="en-US" sz="1200" b="1" dirty="0">
+                <a:solidFill>
+                  <a:srgbClr val="1C2833"/>
+                </a:solidFill>
+                <a:latin typeface="Arial" pitchFamily="34" charset="0"/>
+                <a:ea typeface="Arial" pitchFamily="34" charset="-122"/>
+                <a:cs typeface="Arial" pitchFamily="34" charset="-120"/>
+              </a:rPr>
+              <a:t>Worked examples in chorus:</a:t>
+            </a:r>
+            <a:endParaRPr lang="en-US" sz="1200" dirty="0"/>
+          </a:p>
+        </p:txBody>
+      </p:sp>
+      <p:sp>
+        <p:nvSpPr>
+          <p:cNvPr id="5" name="Text 3"/>
+          <p:cNvSpPr/>
+          <p:nvPr/>
+        </p:nvSpPr>
+        <p:spPr>
+          <a:xfrm>
+            <a:off x="634901" y="1266974"/>
+            <a:ext cx="8102798" cy="1032272"/>
+          </a:xfrm>
+          <a:prstGeom prst="rect">
+            <a:avLst/>
+          </a:prstGeom>
+          <a:noFill/>
+          <a:ln/>
+        </p:spPr>
+        <p:txBody>
+          <a:bodyPr wrap="square" lIns="0" tIns="0" rIns="0" bIns="0" rtlCol="0" anchor="t"/>
+          <a:lstStyle/>
+          <a:p>
+            <a:pPr algn="l" marL="342900" indent="-342900">
+              <a:lnSpc>
+                <a:spcPts val="1620"/>
+              </a:lnSpc>
+              <a:spcAft>
+                <a:spcPts val="300"/>
+              </a:spcAft>
+              <a:buSzPct val="100000"/>
+              <a:buChar char="•"/>
+            </a:pPr>
+            <a:r>
+              <a:rPr lang="en-US" sz="1200" dirty="0">
+                <a:solidFill>
+                  <a:srgbClr val="1C2833"/>
+                </a:solidFill>
+                <a:latin typeface="Arial" pitchFamily="34" charset="0"/>
+                <a:ea typeface="Arial" pitchFamily="34" charset="-122"/>
+                <a:cs typeface="Arial" pitchFamily="34" charset="-120"/>
+              </a:rPr>
+              <a:t>104 × 96</a:t>
+            </a:r>
+            <a:pPr algn="l" indent="0" marL="0">
+              <a:lnSpc>
+                <a:spcPts val="1620"/>
+              </a:lnSpc>
+              <a:spcAft>
+                <a:spcPts val="300"/>
+              </a:spcAft>
+              <a:buNone/>
+            </a:pPr>
+            <a:r>
+              <a:rPr lang="en-US" sz="1200" dirty="0">
+                <a:solidFill>
+                  <a:srgbClr val="1C2833"/>
+                </a:solidFill>
+                <a:latin typeface="Arial" pitchFamily="34" charset="0"/>
+                <a:ea typeface="Arial" pitchFamily="34" charset="-122"/>
+                <a:cs typeface="Arial" pitchFamily="34" charset="-120"/>
+              </a:rPr>
+              <a:t>: excess +4, deficit −4. Left = 100 (either cross). Right = +4 × −4 = −16. Answer: 100 × 100 − 16 = </a:t>
+            </a:r>
+            <a:pPr algn="l" indent="0" marL="0">
+              <a:lnSpc>
+                <a:spcPts val="1620"/>
+              </a:lnSpc>
+              <a:spcAft>
+                <a:spcPts val="300"/>
+              </a:spcAft>
+              <a:buNone/>
+            </a:pPr>
+            <a:r>
+              <a:rPr lang="en-US" sz="1200" b="1" dirty="0">
+                <a:solidFill>
+                  <a:srgbClr val="1C2833"/>
+                </a:solidFill>
+                <a:latin typeface="Arial" pitchFamily="34" charset="0"/>
+                <a:ea typeface="Arial" pitchFamily="34" charset="-122"/>
+                <a:cs typeface="Arial" pitchFamily="34" charset="-120"/>
+              </a:rPr>
+              <a:t>9984</a:t>
+            </a:r>
+            <a:pPr algn="l" indent="0" marL="0">
+              <a:lnSpc>
+                <a:spcPts val="1620"/>
+              </a:lnSpc>
+              <a:spcAft>
+                <a:spcPts val="300"/>
+              </a:spcAft>
+              <a:buNone/>
+            </a:pPr>
+            <a:r>
+              <a:rPr lang="en-US" sz="1200" dirty="0">
+                <a:solidFill>
+                  <a:srgbClr val="1C2833"/>
+                </a:solidFill>
+                <a:latin typeface="Arial" pitchFamily="34" charset="0"/>
+                <a:ea typeface="Arial" pitchFamily="34" charset="-122"/>
+                <a:cs typeface="Arial" pitchFamily="34" charset="-120"/>
+              </a:rPr>
+              <a:t>. ✓</a:t>
+            </a:r>
+            <a:endParaRPr lang="en-US" sz="1200" dirty="0"/>
+          </a:p>
+          <a:p>
+            <a:pPr algn="l" marL="342900" indent="-342900">
+              <a:lnSpc>
+                <a:spcPts val="1620"/>
+              </a:lnSpc>
+              <a:spcAft>
+                <a:spcPts val="300"/>
+              </a:spcAft>
+              <a:buSzPct val="100000"/>
+              <a:buChar char="•"/>
+            </a:pPr>
+            <a:r>
+              <a:rPr lang="en-US" sz="1200" dirty="0">
+                <a:solidFill>
+                  <a:srgbClr val="1C2833"/>
+                </a:solidFill>
+                <a:latin typeface="Arial" pitchFamily="34" charset="0"/>
+                <a:ea typeface="Arial" pitchFamily="34" charset="-122"/>
+                <a:cs typeface="Arial" pitchFamily="34" charset="-120"/>
+              </a:rPr>
+              <a:t>97 × 103</a:t>
+            </a:r>
+            <a:pPr algn="l" indent="0" marL="0">
+              <a:lnSpc>
+                <a:spcPts val="1620"/>
+              </a:lnSpc>
+              <a:spcAft>
+                <a:spcPts val="300"/>
+              </a:spcAft>
+              <a:buNone/>
+            </a:pPr>
+            <a:r>
+              <a:rPr lang="en-US" sz="1200" dirty="0">
+                <a:solidFill>
+                  <a:srgbClr val="1C2833"/>
+                </a:solidFill>
+                <a:latin typeface="Arial" pitchFamily="34" charset="0"/>
+                <a:ea typeface="Arial" pitchFamily="34" charset="-122"/>
+                <a:cs typeface="Arial" pitchFamily="34" charset="-120"/>
+              </a:rPr>
+              <a:t>: deficit −3, excess +3. Left = 100. Right = −3 × +3 = −9. Answer: </a:t>
+            </a:r>
+            <a:pPr algn="l" indent="0" marL="0">
+              <a:lnSpc>
+                <a:spcPts val="1620"/>
+              </a:lnSpc>
+              <a:spcAft>
+                <a:spcPts val="300"/>
+              </a:spcAft>
+              <a:buNone/>
+            </a:pPr>
+            <a:r>
+              <a:rPr lang="en-US" sz="1200" b="1" dirty="0">
+                <a:solidFill>
+                  <a:srgbClr val="1C2833"/>
+                </a:solidFill>
+                <a:latin typeface="Arial" pitchFamily="34" charset="0"/>
+                <a:ea typeface="Arial" pitchFamily="34" charset="-122"/>
+                <a:cs typeface="Arial" pitchFamily="34" charset="-120"/>
+              </a:rPr>
+              <a:t>9991</a:t>
+            </a:r>
+            <a:pPr algn="l" indent="0" marL="0">
+              <a:lnSpc>
+                <a:spcPts val="1620"/>
+              </a:lnSpc>
+              <a:spcAft>
+                <a:spcPts val="300"/>
+              </a:spcAft>
+              <a:buNone/>
+            </a:pPr>
+            <a:r>
+              <a:rPr lang="en-US" sz="1200" dirty="0">
+                <a:solidFill>
+                  <a:srgbClr val="1C2833"/>
+                </a:solidFill>
+                <a:latin typeface="Arial" pitchFamily="34" charset="0"/>
+                <a:ea typeface="Arial" pitchFamily="34" charset="-122"/>
+                <a:cs typeface="Arial" pitchFamily="34" charset="-120"/>
+              </a:rPr>
+              <a:t>. ✓</a:t>
+            </a:r>
+            <a:endParaRPr lang="en-US" sz="1200" dirty="0"/>
+          </a:p>
+          <a:p>
+            <a:pPr algn="l" marL="342900" indent="-342900">
+              <a:lnSpc>
+                <a:spcPts val="1620"/>
+              </a:lnSpc>
+              <a:spcAft>
+                <a:spcPts val="300"/>
+              </a:spcAft>
+              <a:buSzPct val="100000"/>
+              <a:buChar char="•"/>
+            </a:pPr>
+            <a:r>
+              <a:rPr lang="en-US" sz="1200" dirty="0">
+                <a:solidFill>
+                  <a:srgbClr val="1C2833"/>
+                </a:solidFill>
+                <a:latin typeface="Arial" pitchFamily="34" charset="0"/>
+                <a:ea typeface="Arial" pitchFamily="34" charset="-122"/>
+                <a:cs typeface="Arial" pitchFamily="34" charset="-120"/>
+              </a:rPr>
+              <a:t>108 × 95</a:t>
+            </a:r>
+            <a:pPr algn="l" indent="0" marL="0">
+              <a:lnSpc>
+                <a:spcPts val="1620"/>
+              </a:lnSpc>
+              <a:spcAft>
+                <a:spcPts val="300"/>
+              </a:spcAft>
+              <a:buNone/>
+            </a:pPr>
+            <a:r>
+              <a:rPr lang="en-US" sz="1200" dirty="0">
+                <a:solidFill>
+                  <a:srgbClr val="1C2833"/>
+                </a:solidFill>
+                <a:latin typeface="Arial" pitchFamily="34" charset="0"/>
+                <a:ea typeface="Arial" pitchFamily="34" charset="-122"/>
+                <a:cs typeface="Arial" pitchFamily="34" charset="-120"/>
+              </a:rPr>
+              <a:t>: excess +8, deficit −5. Left = 108 − 5 = 103 (or 95 + 8 = 103 ✓). Right = +8 × −5 = −40. Answer: 103 × 100 − 40 = 10300 − 40 = </a:t>
+            </a:r>
+            <a:pPr algn="l" indent="0" marL="0">
+              <a:lnSpc>
+                <a:spcPts val="1620"/>
+              </a:lnSpc>
+              <a:spcAft>
+                <a:spcPts val="300"/>
+              </a:spcAft>
+              <a:buNone/>
+            </a:pPr>
+            <a:r>
+              <a:rPr lang="en-US" sz="1200" b="1" dirty="0">
+                <a:solidFill>
+                  <a:srgbClr val="1C2833"/>
+                </a:solidFill>
+                <a:latin typeface="Arial" pitchFamily="34" charset="0"/>
+                <a:ea typeface="Arial" pitchFamily="34" charset="-122"/>
+                <a:cs typeface="Arial" pitchFamily="34" charset="-120"/>
+              </a:rPr>
+              <a:t>10260</a:t>
+            </a:r>
+            <a:pPr algn="l" indent="0" marL="0">
+              <a:lnSpc>
+                <a:spcPts val="1620"/>
+              </a:lnSpc>
+              <a:spcAft>
+                <a:spcPts val="300"/>
+              </a:spcAft>
+              <a:buNone/>
+            </a:pPr>
+            <a:r>
+              <a:rPr lang="en-US" sz="1200" dirty="0">
+                <a:solidFill>
+                  <a:srgbClr val="1C2833"/>
+                </a:solidFill>
+                <a:latin typeface="Arial" pitchFamily="34" charset="0"/>
+                <a:ea typeface="Arial" pitchFamily="34" charset="-122"/>
+                <a:cs typeface="Arial" pitchFamily="34" charset="-120"/>
+              </a:rPr>
+              <a:t>. ✓</a:t>
+            </a:r>
+            <a:endParaRPr lang="en-US" sz="1200" dirty="0"/>
+          </a:p>
+        </p:txBody>
+      </p:sp>
+      <p:sp>
+        <p:nvSpPr>
+          <p:cNvPr id="6" name="Text 4"/>
+          <p:cNvSpPr/>
+          <p:nvPr/>
+        </p:nvSpPr>
+        <p:spPr>
+          <a:xfrm>
+            <a:off x="406301" y="4434929"/>
+            <a:ext cx="8498026" cy="213271"/>
+          </a:xfrm>
+          <a:prstGeom prst="rect">
+            <a:avLst/>
+          </a:prstGeom>
+          <a:noFill/>
+          <a:ln/>
+        </p:spPr>
+        <p:txBody>
+          <a:bodyPr wrap="square" lIns="0" tIns="0" rIns="0" bIns="0" rtlCol="0" anchor="t"/>
+          <a:lstStyle/>
+          <a:p>
+            <a:pPr algn="l" indent="0" marL="0">
+              <a:lnSpc>
+                <a:spcPts val="1680"/>
+              </a:lnSpc>
+              <a:spcBef>
+                <a:spcPts val="300"/>
+              </a:spcBef>
+              <a:spcAft>
+                <a:spcPts val="300"/>
+              </a:spcAft>
+              <a:buNone/>
+            </a:pPr>
+            <a:r>
+              <a:rPr lang="en-US" sz="1200" dirty="0">
+                <a:solidFill>
+                  <a:srgbClr val="1C2833"/>
+                </a:solidFill>
+                <a:latin typeface="Arial" pitchFamily="34" charset="0"/>
+                <a:ea typeface="Arial" pitchFamily="34" charset="-122"/>
+                <a:cs typeface="Arial" pitchFamily="34" charset="-120"/>
+              </a:rPr>
+              <a:t>Middle ·  · IKS Curriculum</a:t>
+            </a:r>
+            <a:endParaRPr lang="en-US" sz="1200" dirty="0"/>
+          </a:p>
+        </p:txBody>
+      </p:sp>
+    </p:spTree>
+  </p:cSld>
+  <p:clrMapOvr>
+    <a:masterClrMapping/>
+  </p:clrMapOvr>
+</p:sld>
+</file>
+
+<file path=ppt/slides/slide12.xml><?xml version="1.0" encoding="utf-8"?>
+<p:sld xmlns:a="http://schemas.openxmlformats.org/drawingml/2006/main" xmlns:r="http://schemas.openxmlformats.org/officeDocument/2006/relationships" xmlns:p="http://schemas.openxmlformats.org/presentationml/2006/main">
+  <p:cSld name="Slide 12">
+    <p:bg>
+      <p:bgPr>
+        <a:solidFill>
+          <a:srgbClr val="FFFFFF"/>
+        </a:solidFill>
+      </p:bgPr>
+    </p:bg>
+    <p:spTree>
+      <p:nvGrpSpPr>
+        <p:cNvPr id="1" name=""/>
+        <p:cNvGrpSpPr/>
+        <p:nvPr/>
+      </p:nvGrpSpPr>
+      <p:grpSpPr>
+        <a:xfrm>
+          <a:off x="0" y="0"/>
+          <a:ext cx="0" cy="0"/>
+          <a:chOff x="0" y="0"/>
+          <a:chExt cx="0" cy="0"/>
+        </a:xfrm>
+      </p:grpSpPr>
+      <p:sp>
+        <p:nvSpPr>
+          <p:cNvPr id="2" name="Text 0"/>
+          <p:cNvSpPr/>
+          <p:nvPr/>
+        </p:nvSpPr>
+        <p:spPr>
+          <a:xfrm>
+            <a:off x="0" y="0"/>
+            <a:ext cx="9144000" cy="101501"/>
+          </a:xfrm>
+          <a:prstGeom prst="rect">
+            <a:avLst/>
+          </a:prstGeom>
+          <a:solidFill>
+            <a:srgbClr val="277884"/>
+          </a:solidFill>
+          <a:ln/>
+        </p:spPr>
+        <p:txBody>
+          <a:bodyPr wrap="square" rtlCol="0" anchor="ctr"/>
+          <a:lstStyle/>
+          <a:p>
+            <a:pPr indent="0" marL="0">
+              <a:buNone/>
+            </a:pPr>
+            <a:endParaRPr lang="en-US" dirty="0"/>
+          </a:p>
+        </p:txBody>
+      </p:sp>
+      <p:sp>
+        <p:nvSpPr>
+          <p:cNvPr id="3" name="Text 1"/>
+          <p:cNvSpPr/>
+          <p:nvPr/>
+        </p:nvSpPr>
+        <p:spPr>
+          <a:xfrm>
+            <a:off x="406301" y="457051"/>
+            <a:ext cx="8498026" cy="274290"/>
+          </a:xfrm>
+          <a:prstGeom prst="rect">
+            <a:avLst/>
+          </a:prstGeom>
+          <a:noFill/>
+          <a:ln/>
+        </p:spPr>
+        <p:txBody>
+          <a:bodyPr wrap="square" lIns="0" tIns="0" rIns="0" bIns="0" rtlCol="0" anchor="t"/>
+          <a:lstStyle/>
+          <a:p>
+            <a:pPr algn="l" indent="0" marL="0">
+              <a:lnSpc>
+                <a:spcPts val="2160"/>
+              </a:lnSpc>
+              <a:spcBef>
+                <a:spcPts val="600"/>
+              </a:spcBef>
+              <a:spcAft>
+                <a:spcPts val="800"/>
+              </a:spcAft>
+              <a:buNone/>
+            </a:pPr>
+            <a:r>
+              <a:rPr lang="en-US" sz="1800" b="1" dirty="0">
+                <a:solidFill>
+                  <a:srgbClr val="FE4447"/>
+                </a:solidFill>
+                <a:latin typeface="Georgia" pitchFamily="34" charset="0"/>
+                <a:ea typeface="Georgia" pitchFamily="34" charset="-122"/>
+                <a:cs typeface="Georgia" pitchFamily="34" charset="-120"/>
+              </a:rPr>
+              <a:t>Core (15 min) — One above, one below (cont.)</a:t>
+            </a:r>
+            <a:endParaRPr lang="en-US" sz="1800" dirty="0"/>
+          </a:p>
+        </p:txBody>
+      </p:sp>
+      <p:sp>
+        <p:nvSpPr>
+          <p:cNvPr id="4" name="Text 2"/>
+          <p:cNvSpPr/>
+          <p:nvPr/>
+        </p:nvSpPr>
+        <p:spPr>
+          <a:xfrm>
+            <a:off x="634901" y="883593"/>
+            <a:ext cx="8102798" cy="281880"/>
+          </a:xfrm>
+          <a:prstGeom prst="rect">
+            <a:avLst/>
+          </a:prstGeom>
+          <a:noFill/>
+          <a:ln/>
+        </p:spPr>
+        <p:txBody>
+          <a:bodyPr wrap="square" lIns="0" tIns="0" rIns="0" bIns="0" rtlCol="0" anchor="t"/>
+          <a:lstStyle/>
+          <a:p>
+            <a:pPr algn="l" marL="342900" indent="-342900">
+              <a:lnSpc>
+                <a:spcPts val="1620"/>
+              </a:lnSpc>
+              <a:spcAft>
+                <a:spcPts val="300"/>
+              </a:spcAft>
+              <a:buSzPct val="100000"/>
+              <a:buChar char="•"/>
+            </a:pPr>
+            <a:r>
+              <a:rPr lang="en-US" sz="1200" b="1" dirty="0">
+                <a:solidFill>
+                  <a:srgbClr val="1C2833"/>
+                </a:solidFill>
+                <a:latin typeface="Arial" pitchFamily="34" charset="0"/>
+                <a:ea typeface="Arial" pitchFamily="34" charset="-122"/>
+                <a:cs typeface="Arial" pitchFamily="34" charset="-120"/>
+              </a:rPr>
+              <a:t>The pattern (write on board):</a:t>
+            </a:r>
+            <a:endParaRPr lang="en-US" sz="1200" dirty="0"/>
+          </a:p>
+        </p:txBody>
+      </p:sp>
+      <p:sp>
+        <p:nvSpPr>
+          <p:cNvPr id="5" name="Text 3"/>
+          <p:cNvSpPr/>
+          <p:nvPr/>
+        </p:nvSpPr>
+        <p:spPr>
+          <a:xfrm>
+            <a:off x="406301" y="1254323"/>
+            <a:ext cx="8498026" cy="213271"/>
+          </a:xfrm>
+          <a:prstGeom prst="rect">
+            <a:avLst/>
+          </a:prstGeom>
+          <a:noFill/>
+          <a:ln/>
+        </p:spPr>
+        <p:txBody>
+          <a:bodyPr wrap="square" lIns="0" tIns="0" rIns="0" bIns="0" rtlCol="0" anchor="t"/>
+          <a:lstStyle/>
+          <a:p>
+            <a:pPr algn="l" indent="0" marL="0">
+              <a:lnSpc>
+                <a:spcPts val="1680"/>
+              </a:lnSpc>
+              <a:spcBef>
+                <a:spcPts val="300"/>
+              </a:spcBef>
+              <a:spcAft>
+                <a:spcPts val="300"/>
+              </a:spcAft>
+              <a:buNone/>
+            </a:pPr>
+            <a:r>
+              <a:rPr lang="en-US" sz="1200" i="1" dirty="0">
+                <a:solidFill>
+                  <a:srgbClr val="1C2833"/>
+                </a:solidFill>
+                <a:latin typeface="Arial" pitchFamily="34" charset="0"/>
+                <a:ea typeface="Arial" pitchFamily="34" charset="-122"/>
+                <a:cs typeface="Arial" pitchFamily="34" charset="-120"/>
+              </a:rPr>
+              <a:t>Each row: Case · Cross · Right part sign.</a:t>
+            </a:r>
+            <a:endParaRPr lang="en-US" sz="1200" dirty="0"/>
+          </a:p>
+        </p:txBody>
+      </p:sp>
+      <p:sp>
+        <p:nvSpPr>
+          <p:cNvPr id="6" name="Text 4"/>
+          <p:cNvSpPr/>
+          <p:nvPr/>
+        </p:nvSpPr>
+        <p:spPr>
+          <a:xfrm>
+            <a:off x="634901" y="1556445"/>
+            <a:ext cx="8102798" cy="769441"/>
+          </a:xfrm>
+          <a:prstGeom prst="rect">
+            <a:avLst/>
+          </a:prstGeom>
+          <a:noFill/>
+          <a:ln/>
+        </p:spPr>
+        <p:txBody>
+          <a:bodyPr wrap="square" lIns="0" tIns="0" rIns="0" bIns="0" rtlCol="0" anchor="t"/>
+          <a:lstStyle/>
+          <a:p>
+            <a:pPr algn="l" marL="342900" indent="-342900">
+              <a:lnSpc>
+                <a:spcPts val="1620"/>
+              </a:lnSpc>
+              <a:spcAft>
+                <a:spcPts val="300"/>
+              </a:spcAft>
+              <a:buSzPct val="100000"/>
+              <a:buChar char="•"/>
+            </a:pPr>
+            <a:r>
+              <a:rPr lang="en-US" sz="1200" b="1" dirty="0">
+                <a:solidFill>
+                  <a:srgbClr val="1C2833"/>
+                </a:solidFill>
+                <a:latin typeface="Arial" pitchFamily="34" charset="0"/>
+                <a:ea typeface="Arial" pitchFamily="34" charset="-122"/>
+                <a:cs typeface="Arial" pitchFamily="34" charset="-120"/>
+              </a:rPr>
+              <a:t>Both below</a:t>
+            </a:r>
+            <a:pPr algn="l" indent="0" marL="0">
+              <a:lnSpc>
+                <a:spcPts val="1620"/>
+              </a:lnSpc>
+              <a:spcAft>
+                <a:spcPts val="300"/>
+              </a:spcAft>
+              <a:buNone/>
+            </a:pPr>
+            <a:r>
+              <a:rPr lang="en-US" sz="1200" dirty="0">
+                <a:solidFill>
+                  <a:srgbClr val="1C2833"/>
+                </a:solidFill>
+                <a:latin typeface="Arial" pitchFamily="34" charset="0"/>
+                <a:ea typeface="Arial" pitchFamily="34" charset="-122"/>
+                <a:cs typeface="Arial" pitchFamily="34" charset="-120"/>
+              </a:rPr>
+              <a:t> — Subtract · + (deficit × deficit)</a:t>
+            </a:r>
+            <a:endParaRPr lang="en-US" sz="1200" dirty="0"/>
+          </a:p>
+          <a:p>
+            <a:pPr algn="l" marL="342900" indent="-342900">
+              <a:lnSpc>
+                <a:spcPts val="1620"/>
+              </a:lnSpc>
+              <a:spcAft>
+                <a:spcPts val="300"/>
+              </a:spcAft>
+              <a:buSzPct val="100000"/>
+              <a:buChar char="•"/>
+            </a:pPr>
+            <a:r>
+              <a:rPr lang="en-US" sz="1200" b="1" dirty="0">
+                <a:solidFill>
+                  <a:srgbClr val="1C2833"/>
+                </a:solidFill>
+                <a:latin typeface="Arial" pitchFamily="34" charset="0"/>
+                <a:ea typeface="Arial" pitchFamily="34" charset="-122"/>
+                <a:cs typeface="Arial" pitchFamily="34" charset="-120"/>
+              </a:rPr>
+              <a:t>Both above</a:t>
+            </a:r>
+            <a:pPr algn="l" indent="0" marL="0">
+              <a:lnSpc>
+                <a:spcPts val="1620"/>
+              </a:lnSpc>
+              <a:spcAft>
+                <a:spcPts val="300"/>
+              </a:spcAft>
+              <a:buNone/>
+            </a:pPr>
+            <a:r>
+              <a:rPr lang="en-US" sz="1200" dirty="0">
+                <a:solidFill>
+                  <a:srgbClr val="1C2833"/>
+                </a:solidFill>
+                <a:latin typeface="Arial" pitchFamily="34" charset="0"/>
+                <a:ea typeface="Arial" pitchFamily="34" charset="-122"/>
+                <a:cs typeface="Arial" pitchFamily="34" charset="-120"/>
+              </a:rPr>
+              <a:t> — Add · + (excess × excess)</a:t>
+            </a:r>
+            <a:endParaRPr lang="en-US" sz="1200" dirty="0"/>
+          </a:p>
+          <a:p>
+            <a:pPr algn="l" marL="342900" indent="-342900">
+              <a:lnSpc>
+                <a:spcPts val="1620"/>
+              </a:lnSpc>
+              <a:spcAft>
+                <a:spcPts val="300"/>
+              </a:spcAft>
+              <a:buSzPct val="100000"/>
+              <a:buChar char="•"/>
+            </a:pPr>
+            <a:r>
+              <a:rPr lang="en-US" sz="1200" b="1" dirty="0">
+                <a:solidFill>
+                  <a:srgbClr val="1C2833"/>
+                </a:solidFill>
+                <a:latin typeface="Arial" pitchFamily="34" charset="0"/>
+                <a:ea typeface="Arial" pitchFamily="34" charset="-122"/>
+                <a:cs typeface="Arial" pitchFamily="34" charset="-120"/>
+              </a:rPr>
+              <a:t>Mixed</a:t>
+            </a:r>
+            <a:pPr algn="l" indent="0" marL="0">
+              <a:lnSpc>
+                <a:spcPts val="1620"/>
+              </a:lnSpc>
+              <a:spcAft>
+                <a:spcPts val="300"/>
+              </a:spcAft>
+              <a:buNone/>
+            </a:pPr>
+            <a:r>
+              <a:rPr lang="en-US" sz="1200" dirty="0">
+                <a:solidFill>
+                  <a:srgbClr val="1C2833"/>
+                </a:solidFill>
+                <a:latin typeface="Arial" pitchFamily="34" charset="0"/>
+                <a:ea typeface="Arial" pitchFamily="34" charset="-122"/>
+                <a:cs typeface="Arial" pitchFamily="34" charset="-120"/>
+              </a:rPr>
+              <a:t> — Either form — still cancels · </a:t>
+            </a:r>
+            <a:pPr algn="l" indent="0" marL="0">
+              <a:lnSpc>
+                <a:spcPts val="1620"/>
+              </a:lnSpc>
+              <a:spcAft>
+                <a:spcPts val="300"/>
+              </a:spcAft>
+              <a:buNone/>
+            </a:pPr>
+            <a:r>
+              <a:rPr lang="en-US" sz="1200" b="1" dirty="0">
+                <a:solidFill>
+                  <a:srgbClr val="1C2833"/>
+                </a:solidFill>
+                <a:latin typeface="Arial" pitchFamily="34" charset="0"/>
+                <a:ea typeface="Arial" pitchFamily="34" charset="-122"/>
+                <a:cs typeface="Arial" pitchFamily="34" charset="-120"/>
+              </a:rPr>
+              <a:t>−</a:t>
+            </a:r>
+            <a:pPr algn="l" indent="0" marL="0">
+              <a:lnSpc>
+                <a:spcPts val="1620"/>
+              </a:lnSpc>
+              <a:spcAft>
+                <a:spcPts val="300"/>
+              </a:spcAft>
+              <a:buNone/>
+            </a:pPr>
+            <a:r>
+              <a:rPr lang="en-US" sz="1200" dirty="0">
+                <a:solidFill>
+                  <a:srgbClr val="1C2833"/>
+                </a:solidFill>
+                <a:latin typeface="Arial" pitchFamily="34" charset="0"/>
+                <a:ea typeface="Arial" pitchFamily="34" charset="-122"/>
+                <a:cs typeface="Arial" pitchFamily="34" charset="-120"/>
+              </a:rPr>
+              <a:t> (excess × deficit)</a:t>
+            </a:r>
+            <a:endParaRPr lang="en-US" sz="1200" dirty="0"/>
+          </a:p>
+        </p:txBody>
+      </p:sp>
+      <p:sp>
+        <p:nvSpPr>
+          <p:cNvPr id="7" name="Text 5"/>
+          <p:cNvSpPr/>
+          <p:nvPr/>
+        </p:nvSpPr>
+        <p:spPr>
+          <a:xfrm>
+            <a:off x="406301" y="4434929"/>
+            <a:ext cx="8498026" cy="213271"/>
+          </a:xfrm>
+          <a:prstGeom prst="rect">
+            <a:avLst/>
+          </a:prstGeom>
+          <a:noFill/>
+          <a:ln/>
+        </p:spPr>
+        <p:txBody>
+          <a:bodyPr wrap="square" lIns="0" tIns="0" rIns="0" bIns="0" rtlCol="0" anchor="t"/>
+          <a:lstStyle/>
+          <a:p>
+            <a:pPr algn="l" indent="0" marL="0">
+              <a:lnSpc>
+                <a:spcPts val="1680"/>
+              </a:lnSpc>
+              <a:spcBef>
+                <a:spcPts val="300"/>
+              </a:spcBef>
+              <a:spcAft>
+                <a:spcPts val="300"/>
+              </a:spcAft>
+              <a:buNone/>
+            </a:pPr>
+            <a:r>
+              <a:rPr lang="en-US" sz="1200" dirty="0">
+                <a:solidFill>
+                  <a:srgbClr val="1C2833"/>
+                </a:solidFill>
+                <a:latin typeface="Arial" pitchFamily="34" charset="0"/>
+                <a:ea typeface="Arial" pitchFamily="34" charset="-122"/>
+                <a:cs typeface="Arial" pitchFamily="34" charset="-120"/>
+              </a:rPr>
+              <a:t>Middle ·  · IKS Curriculum</a:t>
+            </a:r>
+            <a:endParaRPr lang="en-US" sz="1200" dirty="0"/>
+          </a:p>
+        </p:txBody>
+      </p:sp>
+    </p:spTree>
+  </p:cSld>
+  <p:clrMapOvr>
+    <a:masterClrMapping/>
+  </p:clrMapOvr>
+</p:sld>
+</file>
+
+<file path=ppt/slides/slide13.xml><?xml version="1.0" encoding="utf-8"?>
+<p:sld xmlns:a="http://schemas.openxmlformats.org/drawingml/2006/main" xmlns:r="http://schemas.openxmlformats.org/officeDocument/2006/relationships" xmlns:p="http://schemas.openxmlformats.org/presentationml/2006/main">
+  <p:cSld name="Slide 13">
+    <p:bg>
+      <p:bgPr>
+        <a:solidFill>
+          <a:srgbClr val="FFFFFF"/>
+        </a:solidFill>
+      </p:bgPr>
+    </p:bg>
+    <p:spTree>
+      <p:nvGrpSpPr>
+        <p:cNvPr id="1" name=""/>
+        <p:cNvGrpSpPr/>
+        <p:nvPr/>
+      </p:nvGrpSpPr>
+      <p:grpSpPr>
+        <a:xfrm>
+          <a:off x="0" y="0"/>
+          <a:ext cx="0" cy="0"/>
+          <a:chOff x="0" y="0"/>
+          <a:chExt cx="0" cy="0"/>
+        </a:xfrm>
+      </p:grpSpPr>
+      <p:sp>
+        <p:nvSpPr>
+          <p:cNvPr id="2" name="Text 0"/>
+          <p:cNvSpPr/>
+          <p:nvPr/>
+        </p:nvSpPr>
+        <p:spPr>
+          <a:xfrm>
+            <a:off x="0" y="0"/>
+            <a:ext cx="9144000" cy="101501"/>
+          </a:xfrm>
+          <a:prstGeom prst="rect">
+            <a:avLst/>
+          </a:prstGeom>
+          <a:solidFill>
+            <a:srgbClr val="277884"/>
+          </a:solidFill>
+          <a:ln/>
+        </p:spPr>
+        <p:txBody>
+          <a:bodyPr wrap="square" rtlCol="0" anchor="ctr"/>
+          <a:lstStyle/>
+          <a:p>
+            <a:pPr indent="0" marL="0">
+              <a:buNone/>
+            </a:pPr>
+            <a:endParaRPr lang="en-US" dirty="0"/>
+          </a:p>
+        </p:txBody>
+      </p:sp>
+      <p:sp>
+        <p:nvSpPr>
+          <p:cNvPr id="3" name="Text 1"/>
+          <p:cNvSpPr/>
+          <p:nvPr/>
+        </p:nvSpPr>
+        <p:spPr>
+          <a:xfrm>
+            <a:off x="406301" y="457051"/>
+            <a:ext cx="8498026" cy="293340"/>
+          </a:xfrm>
+          <a:prstGeom prst="rect">
+            <a:avLst/>
+          </a:prstGeom>
+          <a:noFill/>
+          <a:ln/>
+        </p:spPr>
+        <p:txBody>
+          <a:bodyPr wrap="square" lIns="0" tIns="0" rIns="0" bIns="0" rtlCol="0" anchor="t"/>
+          <a:lstStyle/>
+          <a:p>
+            <a:pPr algn="l" indent="0" marL="0">
+              <a:lnSpc>
+                <a:spcPts val="2160"/>
+              </a:lnSpc>
+              <a:spcBef>
+                <a:spcPts val="600"/>
+              </a:spcBef>
+              <a:spcAft>
+                <a:spcPts val="800"/>
+              </a:spcAft>
+              <a:buNone/>
+            </a:pPr>
+            <a:r>
+              <a:rPr lang="en-US" sz="1800" dirty="0">
+                <a:solidFill>
+                  <a:srgbClr val="FE4447"/>
+                </a:solidFill>
+                <a:latin typeface="Georgia" pitchFamily="34" charset="0"/>
+                <a:ea typeface="Georgia" pitchFamily="34" charset="-122"/>
+                <a:cs typeface="Georgia" pitchFamily="34" charset="-120"/>
+              </a:rPr>
+              <a:t>Activity (20 min) — </a:t>
+            </a:r>
+            <a:pPr algn="l" indent="0" marL="0">
+              <a:lnSpc>
+                <a:spcPts val="2160"/>
+              </a:lnSpc>
+              <a:spcBef>
+                <a:spcPts val="600"/>
+              </a:spcBef>
+              <a:spcAft>
+                <a:spcPts val="800"/>
+              </a:spcAft>
+              <a:buNone/>
+            </a:pPr>
+            <a:r>
+              <a:rPr lang="en-US" sz="1800" b="1" dirty="0">
+                <a:solidFill>
+                  <a:srgbClr val="FE4447"/>
+                </a:solidFill>
+                <a:latin typeface="Georgia" pitchFamily="34" charset="0"/>
+                <a:ea typeface="Georgia" pitchFamily="34" charset="-122"/>
+                <a:cs typeface="Georgia" pitchFamily="34" charset="-120"/>
+              </a:rPr>
+              <a:t>activities/activity-01-mixed-signs.md</a:t>
+            </a:r>
+            <a:endParaRPr lang="en-US" sz="1800" dirty="0"/>
+          </a:p>
+        </p:txBody>
+      </p:sp>
+      <p:sp>
+        <p:nvSpPr>
+          <p:cNvPr id="4" name="Text 2"/>
+          <p:cNvSpPr/>
+          <p:nvPr/>
+        </p:nvSpPr>
+        <p:spPr>
+          <a:xfrm>
+            <a:off x="406301" y="889992"/>
+            <a:ext cx="8498026" cy="213271"/>
+          </a:xfrm>
+          <a:prstGeom prst="rect">
+            <a:avLst/>
+          </a:prstGeom>
+          <a:noFill/>
+          <a:ln/>
+        </p:spPr>
+        <p:txBody>
+          <a:bodyPr wrap="square" lIns="0" tIns="0" rIns="0" bIns="0" rtlCol="0" anchor="t"/>
+          <a:lstStyle/>
+          <a:p>
+            <a:pPr algn="l" indent="0" marL="0">
+              <a:lnSpc>
+                <a:spcPts val="1680"/>
+              </a:lnSpc>
+              <a:spcBef>
+                <a:spcPts val="300"/>
+              </a:spcBef>
+              <a:spcAft>
+                <a:spcPts val="300"/>
+              </a:spcAft>
+              <a:buNone/>
+            </a:pPr>
+            <a:r>
+              <a:rPr lang="en-US" sz="1200" dirty="0">
+                <a:solidFill>
+                  <a:srgbClr val="1C2833"/>
+                </a:solidFill>
+                <a:latin typeface="Arial" pitchFamily="34" charset="0"/>
+                <a:ea typeface="Arial" pitchFamily="34" charset="-122"/>
+                <a:cs typeface="Arial" pitchFamily="34" charset="-120"/>
+              </a:rPr>
+              <a:t>Brief:</a:t>
+            </a:r>
+            <a:endParaRPr lang="en-US" sz="1200" dirty="0"/>
+          </a:p>
+        </p:txBody>
+      </p:sp>
+      <p:sp>
+        <p:nvSpPr>
+          <p:cNvPr id="5" name="Text 3"/>
+          <p:cNvSpPr/>
+          <p:nvPr/>
+        </p:nvSpPr>
+        <p:spPr>
+          <a:xfrm>
+            <a:off x="634901" y="1192113"/>
+            <a:ext cx="8102798" cy="1013222"/>
+          </a:xfrm>
+          <a:prstGeom prst="rect">
+            <a:avLst/>
+          </a:prstGeom>
+          <a:noFill/>
+          <a:ln/>
+        </p:spPr>
+        <p:txBody>
+          <a:bodyPr wrap="square" lIns="0" tIns="0" rIns="0" bIns="0" rtlCol="0" anchor="t"/>
+          <a:lstStyle/>
+          <a:p>
+            <a:pPr algn="l" marL="342900" indent="-342900">
+              <a:lnSpc>
+                <a:spcPts val="1620"/>
+              </a:lnSpc>
+              <a:spcAft>
+                <a:spcPts val="300"/>
+              </a:spcAft>
+              <a:buSzPct val="100000"/>
+              <a:buChar char="•"/>
+            </a:pPr>
+            <a:r>
+              <a:rPr lang="en-US" sz="1200" dirty="0">
+                <a:solidFill>
+                  <a:srgbClr val="1C2833"/>
+                </a:solidFill>
+                <a:latin typeface="Arial" pitchFamily="34" charset="0"/>
+                <a:ea typeface="Arial" pitchFamily="34" charset="-122"/>
+                <a:cs typeface="Arial" pitchFamily="34" charset="-120"/>
+              </a:rPr>
+              <a:t>8 problems on the activity sheet, all mixed-sign.</a:t>
+            </a:r>
+            <a:endParaRPr lang="en-US" sz="1200" dirty="0"/>
+          </a:p>
+          <a:p>
+            <a:pPr algn="l" marL="342900" indent="-342900">
+              <a:lnSpc>
+                <a:spcPts val="1620"/>
+              </a:lnSpc>
+              <a:spcAft>
+                <a:spcPts val="300"/>
+              </a:spcAft>
+              <a:buSzPct val="100000"/>
+              <a:buChar char="•"/>
+            </a:pPr>
+            <a:r>
+              <a:rPr lang="en-US" sz="1200" dirty="0">
+                <a:solidFill>
+                  <a:srgbClr val="1C2833"/>
+                </a:solidFill>
+                <a:latin typeface="Arial" pitchFamily="34" charset="0"/>
+                <a:ea typeface="Arial" pitchFamily="34" charset="-122"/>
+                <a:cs typeface="Arial" pitchFamily="34" charset="-120"/>
+              </a:rPr>
+              <a:t>8 min individual silent.</a:t>
+            </a:r>
+            <a:endParaRPr lang="en-US" sz="1200" dirty="0"/>
+          </a:p>
+          <a:p>
+            <a:pPr algn="l" marL="342900" indent="-342900">
+              <a:lnSpc>
+                <a:spcPts val="1620"/>
+              </a:lnSpc>
+              <a:spcAft>
+                <a:spcPts val="300"/>
+              </a:spcAft>
+              <a:buSzPct val="100000"/>
+              <a:buChar char="•"/>
+            </a:pPr>
+            <a:r>
+              <a:rPr lang="en-US" sz="1200" dirty="0">
+                <a:solidFill>
+                  <a:srgbClr val="1C2833"/>
+                </a:solidFill>
+                <a:latin typeface="Arial" pitchFamily="34" charset="0"/>
+                <a:ea typeface="Arial" pitchFamily="34" charset="-122"/>
+                <a:cs typeface="Arial" pitchFamily="34" charset="-120"/>
+              </a:rPr>
+              <a:t>7 min paired check.</a:t>
+            </a:r>
+            <a:endParaRPr lang="en-US" sz="1200" dirty="0"/>
+          </a:p>
+          <a:p>
+            <a:pPr algn="l" marL="342900" indent="-342900">
+              <a:lnSpc>
+                <a:spcPts val="1620"/>
+              </a:lnSpc>
+              <a:spcAft>
+                <a:spcPts val="300"/>
+              </a:spcAft>
+              <a:buSzPct val="100000"/>
+              <a:buChar char="•"/>
+            </a:pPr>
+            <a:r>
+              <a:rPr lang="en-US" sz="1200" dirty="0">
+                <a:solidFill>
+                  <a:srgbClr val="1C2833"/>
+                </a:solidFill>
+                <a:latin typeface="Arial" pitchFamily="34" charset="0"/>
+                <a:ea typeface="Arial" pitchFamily="34" charset="-122"/>
+                <a:cs typeface="Arial" pitchFamily="34" charset="-120"/>
+              </a:rPr>
+              <a:t>5 min: students re-do any they got wrong, OR move to challenge problems if all correct.</a:t>
+            </a:r>
+            <a:endParaRPr lang="en-US" sz="1200" dirty="0"/>
+          </a:p>
+        </p:txBody>
+      </p:sp>
+      <p:sp>
+        <p:nvSpPr>
+          <p:cNvPr id="6" name="Text 4"/>
+          <p:cNvSpPr/>
+          <p:nvPr/>
+        </p:nvSpPr>
+        <p:spPr>
+          <a:xfrm>
+            <a:off x="406301" y="4434929"/>
+            <a:ext cx="8498026" cy="213271"/>
+          </a:xfrm>
+          <a:prstGeom prst="rect">
+            <a:avLst/>
+          </a:prstGeom>
+          <a:noFill/>
+          <a:ln/>
+        </p:spPr>
+        <p:txBody>
+          <a:bodyPr wrap="square" lIns="0" tIns="0" rIns="0" bIns="0" rtlCol="0" anchor="t"/>
+          <a:lstStyle/>
+          <a:p>
+            <a:pPr algn="l" indent="0" marL="0">
+              <a:lnSpc>
+                <a:spcPts val="1680"/>
+              </a:lnSpc>
+              <a:spcBef>
+                <a:spcPts val="300"/>
+              </a:spcBef>
+              <a:spcAft>
+                <a:spcPts val="300"/>
+              </a:spcAft>
+              <a:buNone/>
+            </a:pPr>
+            <a:r>
+              <a:rPr lang="en-US" sz="1200" dirty="0">
+                <a:solidFill>
+                  <a:srgbClr val="1C2833"/>
+                </a:solidFill>
+                <a:latin typeface="Arial" pitchFamily="34" charset="0"/>
+                <a:ea typeface="Arial" pitchFamily="34" charset="-122"/>
+                <a:cs typeface="Arial" pitchFamily="34" charset="-120"/>
+              </a:rPr>
+              <a:t>Middle ·  · IKS Curriculum</a:t>
+            </a:r>
+            <a:endParaRPr lang="en-US" sz="1200" dirty="0"/>
+          </a:p>
+        </p:txBody>
+      </p:sp>
+    </p:spTree>
+  </p:cSld>
+  <p:clrMapOvr>
+    <a:masterClrMapping/>
+  </p:clrMapOvr>
+</p:sld>
+</file>
+
+<file path=ppt/slides/slide14.xml><?xml version="1.0" encoding="utf-8"?>
+<p:sld xmlns:a="http://schemas.openxmlformats.org/drawingml/2006/main" xmlns:r="http://schemas.openxmlformats.org/officeDocument/2006/relationships" xmlns:p="http://schemas.openxmlformats.org/presentationml/2006/main">
+  <p:cSld name="Slide 14">
+    <p:bg>
+      <p:bgPr>
+        <a:solidFill>
+          <a:srgbClr val="FFFFFF"/>
+        </a:solidFill>
+      </p:bgPr>
+    </p:bg>
+    <p:spTree>
+      <p:nvGrpSpPr>
+        <p:cNvPr id="1" name=""/>
+        <p:cNvGrpSpPr/>
+        <p:nvPr/>
+      </p:nvGrpSpPr>
+      <p:grpSpPr>
+        <a:xfrm>
+          <a:off x="0" y="0"/>
+          <a:ext cx="0" cy="0"/>
+          <a:chOff x="0" y="0"/>
+          <a:chExt cx="0" cy="0"/>
+        </a:xfrm>
+      </p:grpSpPr>
+      <p:sp>
+        <p:nvSpPr>
+          <p:cNvPr id="2" name="Text 0"/>
+          <p:cNvSpPr/>
+          <p:nvPr/>
+        </p:nvSpPr>
+        <p:spPr>
+          <a:xfrm>
+            <a:off x="0" y="0"/>
+            <a:ext cx="9144000" cy="101501"/>
+          </a:xfrm>
+          <a:prstGeom prst="rect">
+            <a:avLst/>
+          </a:prstGeom>
+          <a:solidFill>
+            <a:srgbClr val="277884"/>
+          </a:solidFill>
+          <a:ln/>
+        </p:spPr>
+        <p:txBody>
+          <a:bodyPr wrap="square" rtlCol="0" anchor="ctr"/>
+          <a:lstStyle/>
+          <a:p>
+            <a:pPr indent="0" marL="0">
+              <a:buNone/>
+            </a:pPr>
+            <a:endParaRPr lang="en-US" dirty="0"/>
+          </a:p>
+        </p:txBody>
+      </p:sp>
+      <p:sp>
+        <p:nvSpPr>
+          <p:cNvPr id="3" name="Text 1"/>
+          <p:cNvSpPr/>
+          <p:nvPr/>
+        </p:nvSpPr>
+        <p:spPr>
+          <a:xfrm>
+            <a:off x="406301" y="457051"/>
+            <a:ext cx="8498026" cy="274290"/>
+          </a:xfrm>
+          <a:prstGeom prst="rect">
+            <a:avLst/>
+          </a:prstGeom>
+          <a:noFill/>
+          <a:ln/>
+        </p:spPr>
+        <p:txBody>
+          <a:bodyPr wrap="square" lIns="0" tIns="0" rIns="0" bIns="0" rtlCol="0" anchor="t"/>
+          <a:lstStyle/>
+          <a:p>
+            <a:pPr algn="l" indent="0" marL="0">
+              <a:lnSpc>
+                <a:spcPts val="2160"/>
+              </a:lnSpc>
+              <a:spcBef>
+                <a:spcPts val="600"/>
+              </a:spcBef>
+              <a:spcAft>
+                <a:spcPts val="800"/>
+              </a:spcAft>
+              <a:buNone/>
+            </a:pPr>
+            <a:r>
+              <a:rPr lang="en-US" sz="1800" b="1" dirty="0">
+                <a:solidFill>
+                  <a:srgbClr val="FE4447"/>
+                </a:solidFill>
+                <a:latin typeface="Georgia" pitchFamily="34" charset="0"/>
+                <a:ea typeface="Georgia" pitchFamily="34" charset="-122"/>
+                <a:cs typeface="Georgia" pitchFamily="34" charset="-120"/>
+              </a:rPr>
+              <a:t>Wrap-up (5 min)</a:t>
+            </a:r>
+            <a:endParaRPr lang="en-US" sz="1800" dirty="0"/>
+          </a:p>
+        </p:txBody>
+      </p:sp>
+      <p:sp>
+        <p:nvSpPr>
+          <p:cNvPr id="4" name="Text 2"/>
+          <p:cNvSpPr/>
+          <p:nvPr/>
+        </p:nvSpPr>
+        <p:spPr>
+          <a:xfrm>
+            <a:off x="634901" y="883593"/>
+            <a:ext cx="8102798" cy="544711"/>
+          </a:xfrm>
+          <a:prstGeom prst="rect">
+            <a:avLst/>
+          </a:prstGeom>
+          <a:noFill/>
+          <a:ln/>
+        </p:spPr>
+        <p:txBody>
+          <a:bodyPr wrap="square" lIns="0" tIns="0" rIns="0" bIns="0" rtlCol="0" anchor="t"/>
+          <a:lstStyle/>
+          <a:p>
+            <a:pPr algn="l" marL="342900" indent="-342900">
+              <a:lnSpc>
+                <a:spcPts val="1620"/>
+              </a:lnSpc>
+              <a:spcAft>
+                <a:spcPts val="300"/>
+              </a:spcAft>
+              <a:buSzPct val="100000"/>
+              <a:buChar char="•"/>
+            </a:pPr>
+            <a:r>
+              <a:rPr lang="en-US" sz="1200" dirty="0">
+                <a:solidFill>
+                  <a:srgbClr val="1C2833"/>
+                </a:solidFill>
+                <a:latin typeface="Arial" pitchFamily="34" charset="0"/>
+                <a:ea typeface="Arial" pitchFamily="34" charset="-122"/>
+                <a:cs typeface="Arial" pitchFamily="34" charset="-120"/>
+              </a:rPr>
+              <a:t>Quick chorus check: </a:t>
+            </a:r>
+            <a:pPr algn="l" indent="0" marL="0">
+              <a:lnSpc>
+                <a:spcPts val="1620"/>
+              </a:lnSpc>
+              <a:spcAft>
+                <a:spcPts val="300"/>
+              </a:spcAft>
+              <a:buNone/>
+            </a:pPr>
+            <a:r>
+              <a:rPr lang="en-US" sz="1200" dirty="0">
+                <a:solidFill>
+                  <a:srgbClr val="1C2833"/>
+                </a:solidFill>
+                <a:latin typeface="Arial" pitchFamily="34" charset="0"/>
+                <a:ea typeface="Arial" pitchFamily="34" charset="-122"/>
+                <a:cs typeface="Arial" pitchFamily="34" charset="-120"/>
+              </a:rPr>
+              <a:t>102 × 98</a:t>
+            </a:r>
+            <a:pPr algn="l" indent="0" marL="0">
+              <a:lnSpc>
+                <a:spcPts val="1620"/>
+              </a:lnSpc>
+              <a:spcAft>
+                <a:spcPts val="300"/>
+              </a:spcAft>
+              <a:buNone/>
+            </a:pPr>
+            <a:r>
+              <a:rPr lang="en-US" sz="1200" dirty="0">
+                <a:solidFill>
+                  <a:srgbClr val="1C2833"/>
+                </a:solidFill>
+                <a:latin typeface="Arial" pitchFamily="34" charset="0"/>
+                <a:ea typeface="Arial" pitchFamily="34" charset="-122"/>
+                <a:cs typeface="Arial" pitchFamily="34" charset="-120"/>
+              </a:rPr>
+              <a:t>? (9996.) </a:t>
+            </a:r>
+            <a:pPr algn="l" indent="0" marL="0">
+              <a:lnSpc>
+                <a:spcPts val="1620"/>
+              </a:lnSpc>
+              <a:spcAft>
+                <a:spcPts val="300"/>
+              </a:spcAft>
+              <a:buNone/>
+            </a:pPr>
+            <a:r>
+              <a:rPr lang="en-US" sz="1200" dirty="0">
+                <a:solidFill>
+                  <a:srgbClr val="1C2833"/>
+                </a:solidFill>
+                <a:latin typeface="Arial" pitchFamily="34" charset="0"/>
+                <a:ea typeface="Arial" pitchFamily="34" charset="-122"/>
+                <a:cs typeface="Arial" pitchFamily="34" charset="-120"/>
+              </a:rPr>
+              <a:t>104 × 96</a:t>
+            </a:r>
+            <a:pPr algn="l" indent="0" marL="0">
+              <a:lnSpc>
+                <a:spcPts val="1620"/>
+              </a:lnSpc>
+              <a:spcAft>
+                <a:spcPts val="300"/>
+              </a:spcAft>
+              <a:buNone/>
+            </a:pPr>
+            <a:r>
+              <a:rPr lang="en-US" sz="1200" dirty="0">
+                <a:solidFill>
+                  <a:srgbClr val="1C2833"/>
+                </a:solidFill>
+                <a:latin typeface="Arial" pitchFamily="34" charset="0"/>
+                <a:ea typeface="Arial" pitchFamily="34" charset="-122"/>
+                <a:cs typeface="Arial" pitchFamily="34" charset="-120"/>
+              </a:rPr>
+              <a:t>? (9984.) </a:t>
+            </a:r>
+            <a:pPr algn="l" indent="0" marL="0">
+              <a:lnSpc>
+                <a:spcPts val="1620"/>
+              </a:lnSpc>
+              <a:spcAft>
+                <a:spcPts val="300"/>
+              </a:spcAft>
+              <a:buNone/>
+            </a:pPr>
+            <a:r>
+              <a:rPr lang="en-US" sz="1200" dirty="0">
+                <a:solidFill>
+                  <a:srgbClr val="1C2833"/>
+                </a:solidFill>
+                <a:latin typeface="Arial" pitchFamily="34" charset="0"/>
+                <a:ea typeface="Arial" pitchFamily="34" charset="-122"/>
+                <a:cs typeface="Arial" pitchFamily="34" charset="-120"/>
+              </a:rPr>
+              <a:t>108 × 95</a:t>
+            </a:r>
+            <a:pPr algn="l" indent="0" marL="0">
+              <a:lnSpc>
+                <a:spcPts val="1620"/>
+              </a:lnSpc>
+              <a:spcAft>
+                <a:spcPts val="300"/>
+              </a:spcAft>
+              <a:buNone/>
+            </a:pPr>
+            <a:r>
+              <a:rPr lang="en-US" sz="1200" dirty="0">
+                <a:solidFill>
+                  <a:srgbClr val="1C2833"/>
+                </a:solidFill>
+                <a:latin typeface="Arial" pitchFamily="34" charset="0"/>
+                <a:ea typeface="Arial" pitchFamily="34" charset="-122"/>
+                <a:cs typeface="Arial" pitchFamily="34" charset="-120"/>
+              </a:rPr>
+              <a:t>? (10260.)</a:t>
+            </a:r>
+            <a:endParaRPr lang="en-US" sz="1200" dirty="0"/>
+          </a:p>
+          <a:p>
+            <a:pPr algn="l" marL="342900" indent="-342900">
+              <a:lnSpc>
+                <a:spcPts val="1620"/>
+              </a:lnSpc>
+              <a:spcAft>
+                <a:spcPts val="300"/>
+              </a:spcAft>
+              <a:buSzPct val="100000"/>
+              <a:buChar char="•"/>
+            </a:pPr>
+            <a:r>
+              <a:rPr lang="en-US" sz="1200" dirty="0">
+                <a:solidFill>
+                  <a:srgbClr val="1C2833"/>
+                </a:solidFill>
+                <a:latin typeface="Arial" pitchFamily="34" charset="0"/>
+                <a:ea typeface="Arial" pitchFamily="34" charset="-122"/>
+                <a:cs typeface="Arial" pitchFamily="34" charset="-120"/>
+              </a:rPr>
+              <a:t>Preview Day 6: </a:t>
+            </a:r>
+            <a:pPr algn="l" indent="0" marL="0">
+              <a:lnSpc>
+                <a:spcPts val="1620"/>
+              </a:lnSpc>
+              <a:spcAft>
+                <a:spcPts val="300"/>
+              </a:spcAft>
+              <a:buNone/>
+            </a:pPr>
+            <a:r>
+              <a:rPr lang="en-US" sz="1200" i="1" dirty="0">
+                <a:solidFill>
+                  <a:srgbClr val="1C2833"/>
+                </a:solidFill>
+                <a:latin typeface="Arial" pitchFamily="34" charset="0"/>
+                <a:ea typeface="Arial" pitchFamily="34" charset="-122"/>
+                <a:cs typeface="Arial" pitchFamily="34" charset="-120"/>
+              </a:rPr>
+              <a:t>"Tomorrow — base 1000. The pad becomes 3 digits."</a:t>
+            </a:r>
+            <a:endParaRPr lang="en-US" sz="1200" dirty="0"/>
+          </a:p>
+        </p:txBody>
+      </p:sp>
+      <p:sp>
+        <p:nvSpPr>
+          <p:cNvPr id="5" name="Text 3"/>
+          <p:cNvSpPr/>
+          <p:nvPr/>
+        </p:nvSpPr>
+        <p:spPr>
+          <a:xfrm>
+            <a:off x="406301" y="4434929"/>
+            <a:ext cx="8498026" cy="213271"/>
+          </a:xfrm>
+          <a:prstGeom prst="rect">
+            <a:avLst/>
+          </a:prstGeom>
+          <a:noFill/>
+          <a:ln/>
+        </p:spPr>
+        <p:txBody>
+          <a:bodyPr wrap="square" lIns="0" tIns="0" rIns="0" bIns="0" rtlCol="0" anchor="t"/>
+          <a:lstStyle/>
+          <a:p>
+            <a:pPr algn="l" indent="0" marL="0">
+              <a:lnSpc>
+                <a:spcPts val="1680"/>
+              </a:lnSpc>
+              <a:spcBef>
+                <a:spcPts val="300"/>
+              </a:spcBef>
+              <a:spcAft>
+                <a:spcPts val="300"/>
+              </a:spcAft>
+              <a:buNone/>
+            </a:pPr>
+            <a:r>
+              <a:rPr lang="en-US" sz="1200" dirty="0">
+                <a:solidFill>
+                  <a:srgbClr val="1C2833"/>
+                </a:solidFill>
+                <a:latin typeface="Arial" pitchFamily="34" charset="0"/>
+                <a:ea typeface="Arial" pitchFamily="34" charset="-122"/>
+                <a:cs typeface="Arial" pitchFamily="34" charset="-120"/>
+              </a:rPr>
+              <a:t>Middle ·  · IKS Curriculum</a:t>
+            </a:r>
+            <a:endParaRPr lang="en-US" sz="1200" dirty="0"/>
+          </a:p>
+        </p:txBody>
+      </p:sp>
+    </p:spTree>
+  </p:cSld>
+  <p:clrMapOvr>
+    <a:masterClrMapping/>
+  </p:clrMapOvr>
+</p:sld>
+</file>
+
+<file path=ppt/slides/slide15.xml><?xml version="1.0" encoding="utf-8"?>
+<p:sld xmlns:a="http://schemas.openxmlformats.org/drawingml/2006/main" xmlns:r="http://schemas.openxmlformats.org/officeDocument/2006/relationships" xmlns:p="http://schemas.openxmlformats.org/presentationml/2006/main">
+  <p:cSld name="Slide 15">
+    <p:bg>
+      <p:bgPr>
+        <a:solidFill>
+          <a:srgbClr val="FFFFFF"/>
+        </a:solidFill>
+      </p:bgPr>
+    </p:bg>
+    <p:spTree>
+      <p:nvGrpSpPr>
+        <p:cNvPr id="1" name=""/>
+        <p:cNvGrpSpPr/>
+        <p:nvPr/>
+      </p:nvGrpSpPr>
+      <p:grpSpPr>
+        <a:xfrm>
+          <a:off x="0" y="0"/>
+          <a:ext cx="0" cy="0"/>
+          <a:chOff x="0" y="0"/>
+          <a:chExt cx="0" cy="0"/>
+        </a:xfrm>
+      </p:grpSpPr>
+      <p:sp>
+        <p:nvSpPr>
+          <p:cNvPr id="2" name="Text 0"/>
+          <p:cNvSpPr/>
+          <p:nvPr/>
+        </p:nvSpPr>
+        <p:spPr>
+          <a:xfrm>
+            <a:off x="0" y="0"/>
+            <a:ext cx="9144000" cy="101501"/>
+          </a:xfrm>
+          <a:prstGeom prst="rect">
+            <a:avLst/>
+          </a:prstGeom>
+          <a:solidFill>
+            <a:srgbClr val="277884"/>
+          </a:solidFill>
+          <a:ln/>
+        </p:spPr>
+        <p:txBody>
+          <a:bodyPr wrap="square" rtlCol="0" anchor="ctr"/>
+          <a:lstStyle/>
+          <a:p>
+            <a:pPr indent="0" marL="0">
+              <a:buNone/>
+            </a:pPr>
+            <a:endParaRPr lang="en-US" dirty="0"/>
+          </a:p>
+        </p:txBody>
+      </p:sp>
+      <p:sp>
+        <p:nvSpPr>
+          <p:cNvPr id="3" name="Text 1"/>
+          <p:cNvSpPr/>
+          <p:nvPr/>
+        </p:nvSpPr>
+        <p:spPr>
+          <a:xfrm>
+            <a:off x="406301" y="457051"/>
+            <a:ext cx="8498026" cy="274290"/>
+          </a:xfrm>
+          <a:prstGeom prst="rect">
+            <a:avLst/>
+          </a:prstGeom>
+          <a:noFill/>
+          <a:ln/>
+        </p:spPr>
+        <p:txBody>
+          <a:bodyPr wrap="square" lIns="0" tIns="0" rIns="0" bIns="0" rtlCol="0" anchor="t"/>
+          <a:lstStyle/>
+          <a:p>
+            <a:pPr algn="l" indent="0" marL="0">
+              <a:lnSpc>
+                <a:spcPts val="2160"/>
+              </a:lnSpc>
+              <a:spcBef>
+                <a:spcPts val="600"/>
+              </a:spcBef>
+              <a:spcAft>
+                <a:spcPts val="800"/>
+              </a:spcAft>
+              <a:buNone/>
+            </a:pPr>
+            <a:r>
+              <a:rPr lang="en-US" sz="1800" b="1" dirty="0">
+                <a:solidFill>
+                  <a:srgbClr val="FE4447"/>
+                </a:solidFill>
+                <a:latin typeface="Georgia" pitchFamily="34" charset="0"/>
+                <a:ea typeface="Georgia" pitchFamily="34" charset="-122"/>
+                <a:cs typeface="Georgia" pitchFamily="34" charset="-120"/>
+              </a:rPr>
+              <a:t>Student-facing content</a:t>
+            </a:r>
+            <a:endParaRPr lang="en-US" sz="1800" dirty="0"/>
+          </a:p>
+        </p:txBody>
+      </p:sp>
+      <p:sp>
+        <p:nvSpPr>
+          <p:cNvPr id="4" name="Text 2"/>
+          <p:cNvSpPr/>
+          <p:nvPr/>
+        </p:nvSpPr>
+        <p:spPr>
+          <a:xfrm>
+            <a:off x="406301" y="883593"/>
+            <a:ext cx="8331398" cy="3571875"/>
+          </a:xfrm>
+          <a:prstGeom prst="rect">
+            <a:avLst/>
+          </a:prstGeom>
+          <a:solidFill>
+            <a:srgbClr val="F4F8F9"/>
+          </a:solidFill>
+          <a:ln/>
+        </p:spPr>
+        <p:txBody>
+          <a:bodyPr wrap="square" rtlCol="0" anchor="ctr"/>
+          <a:lstStyle/>
+          <a:p>
+            <a:pPr indent="0" marL="0">
+              <a:buNone/>
+            </a:pPr>
+            <a:endParaRPr lang="en-US" dirty="0"/>
+          </a:p>
+        </p:txBody>
+      </p:sp>
+      <p:sp>
+        <p:nvSpPr>
+          <p:cNvPr id="5" name="Shape 3"/>
+          <p:cNvSpPr/>
+          <p:nvPr/>
+        </p:nvSpPr>
+        <p:spPr>
+          <a:xfrm>
+            <a:off x="434876" y="883593"/>
+            <a:ext cx="0" cy="3571875"/>
+          </a:xfrm>
+          <a:prstGeom prst="line">
+            <a:avLst/>
+          </a:prstGeom>
+          <a:noFill/>
+          <a:ln w="57150">
+            <a:solidFill>
+              <a:srgbClr val="FE4447"/>
+            </a:solidFill>
+            <a:prstDash val="solid"/>
+          </a:ln>
+        </p:spPr>
+      </p:sp>
+      <p:sp>
+        <p:nvSpPr>
+          <p:cNvPr id="6" name="Text 4"/>
+          <p:cNvSpPr/>
+          <p:nvPr/>
+        </p:nvSpPr>
+        <p:spPr>
+          <a:xfrm>
+            <a:off x="692051" y="1074093"/>
+            <a:ext cx="7973389" cy="230981"/>
+          </a:xfrm>
+          <a:prstGeom prst="rect">
+            <a:avLst/>
+          </a:prstGeom>
+          <a:noFill/>
+          <a:ln/>
+        </p:spPr>
+        <p:txBody>
+          <a:bodyPr wrap="square" lIns="0" tIns="0" rIns="0" bIns="0" rtlCol="0" anchor="t"/>
+          <a:lstStyle/>
+          <a:p>
+            <a:pPr algn="l" indent="0" marL="0">
+              <a:lnSpc>
+                <a:spcPts val="1820"/>
+              </a:lnSpc>
+              <a:spcBef>
+                <a:spcPts val="300"/>
+              </a:spcBef>
+              <a:spcAft>
+                <a:spcPts val="300"/>
+              </a:spcAft>
+              <a:buNone/>
+            </a:pPr>
+            <a:r>
+              <a:rPr lang="en-US" sz="1300" b="1" i="1" dirty="0">
+                <a:solidFill>
+                  <a:srgbClr val="1C2833"/>
+                </a:solidFill>
+                <a:latin typeface="Georgia" pitchFamily="34" charset="0"/>
+                <a:ea typeface="Georgia" pitchFamily="34" charset="-122"/>
+                <a:cs typeface="Georgia" pitchFamily="34" charset="-120"/>
+              </a:rPr>
+              <a:t>Mixed case: one above, one below</a:t>
+            </a:r>
+            <a:endParaRPr lang="en-US" sz="1300" dirty="0"/>
+          </a:p>
+        </p:txBody>
+      </p:sp>
+      <p:sp>
+        <p:nvSpPr>
+          <p:cNvPr id="7" name="Text 5"/>
+          <p:cNvSpPr/>
+          <p:nvPr/>
+        </p:nvSpPr>
+        <p:spPr>
+          <a:xfrm>
+            <a:off x="692051" y="1343174"/>
+            <a:ext cx="7973389" cy="461963"/>
+          </a:xfrm>
+          <a:prstGeom prst="rect">
+            <a:avLst/>
+          </a:prstGeom>
+          <a:noFill/>
+          <a:ln/>
+        </p:spPr>
+        <p:txBody>
+          <a:bodyPr wrap="square" lIns="0" tIns="0" rIns="0" bIns="0" rtlCol="0" anchor="t"/>
+          <a:lstStyle/>
+          <a:p>
+            <a:pPr algn="l" indent="0" marL="0">
+              <a:lnSpc>
+                <a:spcPts val="1820"/>
+              </a:lnSpc>
+              <a:spcBef>
+                <a:spcPts val="300"/>
+              </a:spcBef>
+              <a:spcAft>
+                <a:spcPts val="300"/>
+              </a:spcAft>
+              <a:buNone/>
+            </a:pPr>
+            <a:r>
+              <a:rPr lang="en-US" sz="1300" dirty="0">
+                <a:solidFill>
+                  <a:srgbClr val="1C2833"/>
+                </a:solidFill>
+                <a:latin typeface="Georgia" pitchFamily="34" charset="0"/>
+                <a:ea typeface="Georgia" pitchFamily="34" charset="-122"/>
+                <a:cs typeface="Georgia" pitchFamily="34" charset="-120"/>
+              </a:rPr>
+              <a:t>Find the </a:t>
+            </a:r>
+            <a:pPr algn="l" indent="0" marL="0">
+              <a:lnSpc>
+                <a:spcPts val="1820"/>
+              </a:lnSpc>
+              <a:spcBef>
+                <a:spcPts val="300"/>
+              </a:spcBef>
+              <a:spcAft>
+                <a:spcPts val="300"/>
+              </a:spcAft>
+              <a:buNone/>
+            </a:pPr>
+            <a:r>
+              <a:rPr lang="en-US" sz="1300" b="1" i="1" dirty="0">
+                <a:solidFill>
+                  <a:srgbClr val="1C2833"/>
+                </a:solidFill>
+                <a:latin typeface="Georgia" pitchFamily="34" charset="0"/>
+                <a:ea typeface="Georgia" pitchFamily="34" charset="-122"/>
+                <a:cs typeface="Georgia" pitchFamily="34" charset="-120"/>
+              </a:rPr>
+              <a:t>excess</a:t>
+            </a:r>
+            <a:pPr algn="l" indent="0" marL="0">
+              <a:lnSpc>
+                <a:spcPts val="1820"/>
+              </a:lnSpc>
+              <a:spcBef>
+                <a:spcPts val="300"/>
+              </a:spcBef>
+              <a:spcAft>
+                <a:spcPts val="300"/>
+              </a:spcAft>
+              <a:buNone/>
+            </a:pPr>
+            <a:r>
+              <a:rPr lang="en-US" sz="1300" dirty="0">
+                <a:solidFill>
+                  <a:srgbClr val="1C2833"/>
+                </a:solidFill>
+                <a:latin typeface="Georgia" pitchFamily="34" charset="0"/>
+                <a:ea typeface="Georgia" pitchFamily="34" charset="-122"/>
+                <a:cs typeface="Georgia" pitchFamily="34" charset="-120"/>
+              </a:rPr>
+              <a:t> of the bigger number and the </a:t>
+            </a:r>
+            <a:pPr algn="l" indent="0" marL="0">
+              <a:lnSpc>
+                <a:spcPts val="1820"/>
+              </a:lnSpc>
+              <a:spcBef>
+                <a:spcPts val="300"/>
+              </a:spcBef>
+              <a:spcAft>
+                <a:spcPts val="300"/>
+              </a:spcAft>
+              <a:buNone/>
+            </a:pPr>
+            <a:r>
+              <a:rPr lang="en-US" sz="1300" b="1" i="1" dirty="0">
+                <a:solidFill>
+                  <a:srgbClr val="1C2833"/>
+                </a:solidFill>
+                <a:latin typeface="Georgia" pitchFamily="34" charset="0"/>
+                <a:ea typeface="Georgia" pitchFamily="34" charset="-122"/>
+                <a:cs typeface="Georgia" pitchFamily="34" charset="-120"/>
+              </a:rPr>
+              <a:t>deficit</a:t>
+            </a:r>
+            <a:pPr algn="l" indent="0" marL="0">
+              <a:lnSpc>
+                <a:spcPts val="1820"/>
+              </a:lnSpc>
+              <a:spcBef>
+                <a:spcPts val="300"/>
+              </a:spcBef>
+              <a:spcAft>
+                <a:spcPts val="300"/>
+              </a:spcAft>
+              <a:buNone/>
+            </a:pPr>
+            <a:r>
+              <a:rPr lang="en-US" sz="1300" dirty="0">
+                <a:solidFill>
+                  <a:srgbClr val="1C2833"/>
+                </a:solidFill>
+                <a:latin typeface="Georgia" pitchFamily="34" charset="0"/>
+                <a:ea typeface="Georgia" pitchFamily="34" charset="-122"/>
+                <a:cs typeface="Georgia" pitchFamily="34" charset="-120"/>
+              </a:rPr>
+              <a:t> of the smaller (or just signed: + for above 100, − for below).</a:t>
+            </a:r>
+            <a:endParaRPr lang="en-US" sz="1300" dirty="0"/>
+          </a:p>
+        </p:txBody>
+      </p:sp>
+      <p:sp>
+        <p:nvSpPr>
+          <p:cNvPr id="8" name="Text 6"/>
+          <p:cNvSpPr/>
+          <p:nvPr/>
+        </p:nvSpPr>
+        <p:spPr>
+          <a:xfrm>
+            <a:off x="692051" y="1843236"/>
+            <a:ext cx="7973389" cy="250031"/>
+          </a:xfrm>
+          <a:prstGeom prst="rect">
+            <a:avLst/>
+          </a:prstGeom>
+          <a:noFill/>
+          <a:ln/>
+        </p:spPr>
+        <p:txBody>
+          <a:bodyPr wrap="square" lIns="0" tIns="0" rIns="0" bIns="0" rtlCol="0" anchor="t"/>
+          <a:lstStyle/>
+          <a:p>
+            <a:pPr algn="l" indent="0" marL="0">
+              <a:lnSpc>
+                <a:spcPts val="1820"/>
+              </a:lnSpc>
+              <a:spcBef>
+                <a:spcPts val="300"/>
+              </a:spcBef>
+              <a:spcAft>
+                <a:spcPts val="300"/>
+              </a:spcAft>
+              <a:buNone/>
+            </a:pPr>
+            <a:r>
+              <a:rPr lang="en-US" sz="1300" dirty="0">
+                <a:solidFill>
+                  <a:srgbClr val="1C2833"/>
+                </a:solidFill>
+                <a:latin typeface="Georgia" pitchFamily="34" charset="0"/>
+                <a:ea typeface="Georgia" pitchFamily="34" charset="-122"/>
+                <a:cs typeface="Georgia" pitchFamily="34" charset="-120"/>
+              </a:rPr>
+              <a:t>LEFT: cross-subtract using signs. </a:t>
+            </a:r>
+            <a:pPr algn="l" indent="0" marL="0">
+              <a:lnSpc>
+                <a:spcPts val="1820"/>
+              </a:lnSpc>
+              <a:spcBef>
+                <a:spcPts val="300"/>
+              </a:spcBef>
+              <a:spcAft>
+                <a:spcPts val="300"/>
+              </a:spcAft>
+              <a:buNone/>
+            </a:pPr>
+            <a:r>
+              <a:rPr lang="en-US" sz="1300" i="1" dirty="0">
+                <a:solidFill>
+                  <a:srgbClr val="1C2833"/>
+                </a:solidFill>
+                <a:latin typeface="Georgia" pitchFamily="34" charset="0"/>
+                <a:ea typeface="Georgia" pitchFamily="34" charset="-122"/>
+                <a:cs typeface="Georgia" pitchFamily="34" charset="-120"/>
+              </a:rPr>
+              <a:t>102 + (−2) = 100</a:t>
+            </a:r>
+            <a:pPr algn="l" indent="0" marL="0">
+              <a:lnSpc>
+                <a:spcPts val="1820"/>
+              </a:lnSpc>
+              <a:spcBef>
+                <a:spcPts val="300"/>
+              </a:spcBef>
+              <a:spcAft>
+                <a:spcPts val="300"/>
+              </a:spcAft>
+              <a:buNone/>
+            </a:pPr>
+            <a:r>
+              <a:rPr lang="en-US" sz="1300" dirty="0">
+                <a:solidFill>
+                  <a:srgbClr val="1C2833"/>
+                </a:solidFill>
+                <a:latin typeface="Georgia" pitchFamily="34" charset="0"/>
+                <a:ea typeface="Georgia" pitchFamily="34" charset="-122"/>
+                <a:cs typeface="Georgia" pitchFamily="34" charset="-120"/>
+              </a:rPr>
+              <a:t>. Either cross still works.</a:t>
+            </a:r>
+            <a:endParaRPr lang="en-US" sz="1300" dirty="0"/>
+          </a:p>
+        </p:txBody>
+      </p:sp>
+      <p:sp>
+        <p:nvSpPr>
+          <p:cNvPr id="9" name="Text 7"/>
+          <p:cNvSpPr/>
+          <p:nvPr/>
+        </p:nvSpPr>
+        <p:spPr>
+          <a:xfrm>
+            <a:off x="692051" y="2131368"/>
+            <a:ext cx="7973389" cy="230981"/>
+          </a:xfrm>
+          <a:prstGeom prst="rect">
+            <a:avLst/>
+          </a:prstGeom>
+          <a:noFill/>
+          <a:ln/>
+        </p:spPr>
+        <p:txBody>
+          <a:bodyPr wrap="square" lIns="0" tIns="0" rIns="0" bIns="0" rtlCol="0" anchor="t"/>
+          <a:lstStyle/>
+          <a:p>
+            <a:pPr algn="l" indent="0" marL="0">
+              <a:lnSpc>
+                <a:spcPts val="1820"/>
+              </a:lnSpc>
+              <a:spcBef>
+                <a:spcPts val="300"/>
+              </a:spcBef>
+              <a:spcAft>
+                <a:spcPts val="300"/>
+              </a:spcAft>
+              <a:buNone/>
+            </a:pPr>
+            <a:r>
+              <a:rPr lang="en-US" sz="1300" dirty="0">
+                <a:solidFill>
+                  <a:srgbClr val="1C2833"/>
+                </a:solidFill>
+                <a:latin typeface="Georgia" pitchFamily="34" charset="0"/>
+                <a:ea typeface="Georgia" pitchFamily="34" charset="-122"/>
+                <a:cs typeface="Georgia" pitchFamily="34" charset="-120"/>
+              </a:rPr>
+              <a:t>RIGHT: multiply the two signed numbers. The RIGHT part is </a:t>
+            </a:r>
+            <a:pPr algn="l" indent="0" marL="0">
+              <a:lnSpc>
+                <a:spcPts val="1820"/>
+              </a:lnSpc>
+              <a:spcBef>
+                <a:spcPts val="300"/>
+              </a:spcBef>
+              <a:spcAft>
+                <a:spcPts val="300"/>
+              </a:spcAft>
+              <a:buNone/>
+            </a:pPr>
+            <a:r>
+              <a:rPr lang="en-US" sz="1300" b="1" i="1" dirty="0">
+                <a:solidFill>
+                  <a:srgbClr val="1C2833"/>
+                </a:solidFill>
+                <a:latin typeface="Georgia" pitchFamily="34" charset="0"/>
+                <a:ea typeface="Georgia" pitchFamily="34" charset="-122"/>
+                <a:cs typeface="Georgia" pitchFamily="34" charset="-120"/>
+              </a:rPr>
+              <a:t>negative</a:t>
+            </a:r>
+            <a:pPr algn="l" indent="0" marL="0">
+              <a:lnSpc>
+                <a:spcPts val="1820"/>
+              </a:lnSpc>
+              <a:spcBef>
+                <a:spcPts val="300"/>
+              </a:spcBef>
+              <a:spcAft>
+                <a:spcPts val="300"/>
+              </a:spcAft>
+              <a:buNone/>
+            </a:pPr>
+            <a:r>
+              <a:rPr lang="en-US" sz="1300" dirty="0">
+                <a:solidFill>
+                  <a:srgbClr val="1C2833"/>
+                </a:solidFill>
+                <a:latin typeface="Georgia" pitchFamily="34" charset="0"/>
+                <a:ea typeface="Georgia" pitchFamily="34" charset="-122"/>
+                <a:cs typeface="Georgia" pitchFamily="34" charset="-120"/>
+              </a:rPr>
+              <a:t>.</a:t>
+            </a:r>
+            <a:endParaRPr lang="en-US" sz="1300" dirty="0"/>
+          </a:p>
+        </p:txBody>
+      </p:sp>
+      <p:sp>
+        <p:nvSpPr>
+          <p:cNvPr id="10" name="Text 8"/>
+          <p:cNvSpPr/>
+          <p:nvPr/>
+        </p:nvSpPr>
+        <p:spPr>
+          <a:xfrm>
+            <a:off x="692051" y="2400449"/>
+            <a:ext cx="7973389" cy="250031"/>
+          </a:xfrm>
+          <a:prstGeom prst="rect">
+            <a:avLst/>
+          </a:prstGeom>
+          <a:noFill/>
+          <a:ln/>
+        </p:spPr>
+        <p:txBody>
+          <a:bodyPr wrap="square" lIns="0" tIns="0" rIns="0" bIns="0" rtlCol="0" anchor="t"/>
+          <a:lstStyle/>
+          <a:p>
+            <a:pPr algn="l" indent="0" marL="0">
+              <a:lnSpc>
+                <a:spcPts val="1820"/>
+              </a:lnSpc>
+              <a:spcBef>
+                <a:spcPts val="300"/>
+              </a:spcBef>
+              <a:spcAft>
+                <a:spcPts val="300"/>
+              </a:spcAft>
+              <a:buNone/>
+            </a:pPr>
+            <a:r>
+              <a:rPr lang="en-US" sz="1300" dirty="0">
+                <a:solidFill>
+                  <a:srgbClr val="1C2833"/>
+                </a:solidFill>
+                <a:latin typeface="Georgia" pitchFamily="34" charset="0"/>
+                <a:ea typeface="Georgia" pitchFamily="34" charset="-122"/>
+                <a:cs typeface="Georgia" pitchFamily="34" charset="-120"/>
+              </a:rPr>
+              <a:t>Subtract the absolute value of the right from </a:t>
+            </a:r>
+            <a:pPr algn="l" indent="0" marL="0">
+              <a:lnSpc>
+                <a:spcPts val="1820"/>
+              </a:lnSpc>
+              <a:spcBef>
+                <a:spcPts val="300"/>
+              </a:spcBef>
+              <a:spcAft>
+                <a:spcPts val="300"/>
+              </a:spcAft>
+              <a:buNone/>
+            </a:pPr>
+            <a:r>
+              <a:rPr lang="en-US" sz="1300" i="1" dirty="0">
+                <a:solidFill>
+                  <a:srgbClr val="1C2833"/>
+                </a:solidFill>
+                <a:latin typeface="Georgia" pitchFamily="34" charset="0"/>
+                <a:ea typeface="Georgia" pitchFamily="34" charset="-122"/>
+                <a:cs typeface="Georgia" pitchFamily="34" charset="-120"/>
+              </a:rPr>
+              <a:t>LEFT × 100</a:t>
+            </a:r>
+            <a:pPr algn="l" indent="0" marL="0">
+              <a:lnSpc>
+                <a:spcPts val="1820"/>
+              </a:lnSpc>
+              <a:spcBef>
+                <a:spcPts val="300"/>
+              </a:spcBef>
+              <a:spcAft>
+                <a:spcPts val="300"/>
+              </a:spcAft>
+              <a:buNone/>
+            </a:pPr>
+            <a:r>
+              <a:rPr lang="en-US" sz="1300" dirty="0">
+                <a:solidFill>
+                  <a:srgbClr val="1C2833"/>
+                </a:solidFill>
+                <a:latin typeface="Georgia" pitchFamily="34" charset="0"/>
+                <a:ea typeface="Georgia" pitchFamily="34" charset="-122"/>
+                <a:cs typeface="Georgia" pitchFamily="34" charset="-120"/>
+              </a:rPr>
+              <a:t>.</a:t>
+            </a:r>
+            <a:endParaRPr lang="en-US" sz="1300" dirty="0"/>
+          </a:p>
+        </p:txBody>
+      </p:sp>
+      <p:sp>
+        <p:nvSpPr>
+          <p:cNvPr id="11" name="Text 9"/>
+          <p:cNvSpPr/>
+          <p:nvPr/>
+        </p:nvSpPr>
+        <p:spPr>
+          <a:xfrm>
+            <a:off x="692051" y="2688580"/>
+            <a:ext cx="7973389" cy="230981"/>
+          </a:xfrm>
+          <a:prstGeom prst="rect">
+            <a:avLst/>
+          </a:prstGeom>
+          <a:noFill/>
+          <a:ln/>
+        </p:spPr>
+        <p:txBody>
+          <a:bodyPr wrap="square" lIns="0" tIns="0" rIns="0" bIns="0" rtlCol="0" anchor="t"/>
+          <a:lstStyle/>
+          <a:p>
+            <a:pPr algn="l" indent="0" marL="0">
+              <a:lnSpc>
+                <a:spcPts val="1820"/>
+              </a:lnSpc>
+              <a:spcBef>
+                <a:spcPts val="300"/>
+              </a:spcBef>
+              <a:spcAft>
+                <a:spcPts val="300"/>
+              </a:spcAft>
+              <a:buNone/>
+            </a:pPr>
+            <a:r>
+              <a:rPr lang="en-US" sz="1300" b="1" i="1" dirty="0">
+                <a:solidFill>
+                  <a:srgbClr val="1C2833"/>
+                </a:solidFill>
+                <a:latin typeface="Georgia" pitchFamily="34" charset="0"/>
+                <a:ea typeface="Georgia" pitchFamily="34" charset="-122"/>
+                <a:cs typeface="Georgia" pitchFamily="34" charset="-120"/>
+              </a:rPr>
+              <a:t>Examples:</a:t>
+            </a:r>
+            <a:endParaRPr lang="en-US" sz="1300" dirty="0"/>
+          </a:p>
+        </p:txBody>
+      </p:sp>
+      <p:sp>
+        <p:nvSpPr>
+          <p:cNvPr id="12" name="Text 10"/>
+          <p:cNvSpPr/>
+          <p:nvPr/>
+        </p:nvSpPr>
+        <p:spPr>
+          <a:xfrm>
+            <a:off x="692051" y="2957661"/>
+            <a:ext cx="7973389" cy="230981"/>
+          </a:xfrm>
+          <a:prstGeom prst="rect">
+            <a:avLst/>
+          </a:prstGeom>
+          <a:noFill/>
+          <a:ln/>
+        </p:spPr>
+        <p:txBody>
+          <a:bodyPr wrap="square" lIns="0" tIns="0" rIns="0" bIns="0" rtlCol="0" anchor="t"/>
+          <a:lstStyle/>
+          <a:p>
+            <a:pPr algn="l" indent="0" marL="0">
+              <a:lnSpc>
+                <a:spcPts val="1820"/>
+              </a:lnSpc>
+              <a:spcBef>
+                <a:spcPts val="300"/>
+              </a:spcBef>
+              <a:spcAft>
+                <a:spcPts val="300"/>
+              </a:spcAft>
+              <a:buNone/>
+            </a:pPr>
+            <a:r>
+              <a:rPr lang="en-US" sz="1300" dirty="0">
+                <a:solidFill>
+                  <a:srgbClr val="1C2833"/>
+                </a:solidFill>
+                <a:latin typeface="Georgia" pitchFamily="34" charset="0"/>
+                <a:ea typeface="Georgia" pitchFamily="34" charset="-122"/>
+                <a:cs typeface="Georgia" pitchFamily="34" charset="-120"/>
+              </a:rPr>
+              <a:t>102 × 98 → 100 | −4 → 10000 − 4 = </a:t>
+            </a:r>
+            <a:pPr algn="l" indent="0" marL="0">
+              <a:lnSpc>
+                <a:spcPts val="1820"/>
+              </a:lnSpc>
+              <a:spcBef>
+                <a:spcPts val="300"/>
+              </a:spcBef>
+              <a:spcAft>
+                <a:spcPts val="300"/>
+              </a:spcAft>
+              <a:buNone/>
+            </a:pPr>
+            <a:r>
+              <a:rPr lang="en-US" sz="1300" b="1" i="1" dirty="0">
+                <a:solidFill>
+                  <a:srgbClr val="1C2833"/>
+                </a:solidFill>
+                <a:latin typeface="Georgia" pitchFamily="34" charset="0"/>
+                <a:ea typeface="Georgia" pitchFamily="34" charset="-122"/>
+                <a:cs typeface="Georgia" pitchFamily="34" charset="-120"/>
+              </a:rPr>
+              <a:t>9996</a:t>
+            </a:r>
+            <a:endParaRPr lang="en-US" sz="1300" dirty="0"/>
+          </a:p>
+        </p:txBody>
+      </p:sp>
+      <p:sp>
+        <p:nvSpPr>
+          <p:cNvPr id="13" name="Text 11"/>
+          <p:cNvSpPr/>
+          <p:nvPr/>
+        </p:nvSpPr>
+        <p:spPr>
+          <a:xfrm>
+            <a:off x="692051" y="3226743"/>
+            <a:ext cx="7973389" cy="230981"/>
+          </a:xfrm>
+          <a:prstGeom prst="rect">
+            <a:avLst/>
+          </a:prstGeom>
+          <a:noFill/>
+          <a:ln/>
+        </p:spPr>
+        <p:txBody>
+          <a:bodyPr wrap="square" lIns="0" tIns="0" rIns="0" bIns="0" rtlCol="0" anchor="t"/>
+          <a:lstStyle/>
+          <a:p>
+            <a:pPr algn="l" indent="0" marL="0">
+              <a:lnSpc>
+                <a:spcPts val="1820"/>
+              </a:lnSpc>
+              <a:spcBef>
+                <a:spcPts val="300"/>
+              </a:spcBef>
+              <a:spcAft>
+                <a:spcPts val="300"/>
+              </a:spcAft>
+              <a:buNone/>
+            </a:pPr>
+            <a:r>
+              <a:rPr lang="en-US" sz="1300" dirty="0">
+                <a:solidFill>
+                  <a:srgbClr val="1C2833"/>
+                </a:solidFill>
+                <a:latin typeface="Georgia" pitchFamily="34" charset="0"/>
+                <a:ea typeface="Georgia" pitchFamily="34" charset="-122"/>
+                <a:cs typeface="Georgia" pitchFamily="34" charset="-120"/>
+              </a:rPr>
+              <a:t>104 × 96 → 100 | −16 → 10000 − 16 = </a:t>
+            </a:r>
+            <a:pPr algn="l" indent="0" marL="0">
+              <a:lnSpc>
+                <a:spcPts val="1820"/>
+              </a:lnSpc>
+              <a:spcBef>
+                <a:spcPts val="300"/>
+              </a:spcBef>
+              <a:spcAft>
+                <a:spcPts val="300"/>
+              </a:spcAft>
+              <a:buNone/>
+            </a:pPr>
+            <a:r>
+              <a:rPr lang="en-US" sz="1300" b="1" i="1" dirty="0">
+                <a:solidFill>
+                  <a:srgbClr val="1C2833"/>
+                </a:solidFill>
+                <a:latin typeface="Georgia" pitchFamily="34" charset="0"/>
+                <a:ea typeface="Georgia" pitchFamily="34" charset="-122"/>
+                <a:cs typeface="Georgia" pitchFamily="34" charset="-120"/>
+              </a:rPr>
+              <a:t>9984</a:t>
+            </a:r>
+            <a:endParaRPr lang="en-US" sz="1300" dirty="0"/>
+          </a:p>
+        </p:txBody>
+      </p:sp>
+      <p:sp>
+        <p:nvSpPr>
+          <p:cNvPr id="14" name="Text 12"/>
+          <p:cNvSpPr/>
+          <p:nvPr/>
+        </p:nvSpPr>
+        <p:spPr>
+          <a:xfrm>
+            <a:off x="692051" y="3495824"/>
+            <a:ext cx="7973389" cy="230981"/>
+          </a:xfrm>
+          <a:prstGeom prst="rect">
+            <a:avLst/>
+          </a:prstGeom>
+          <a:noFill/>
+          <a:ln/>
+        </p:spPr>
+        <p:txBody>
+          <a:bodyPr wrap="square" lIns="0" tIns="0" rIns="0" bIns="0" rtlCol="0" anchor="t"/>
+          <a:lstStyle/>
+          <a:p>
+            <a:pPr algn="l" indent="0" marL="0">
+              <a:lnSpc>
+                <a:spcPts val="1820"/>
+              </a:lnSpc>
+              <a:spcBef>
+                <a:spcPts val="300"/>
+              </a:spcBef>
+              <a:spcAft>
+                <a:spcPts val="300"/>
+              </a:spcAft>
+              <a:buNone/>
+            </a:pPr>
+            <a:r>
+              <a:rPr lang="en-US" sz="1300" dirty="0">
+                <a:solidFill>
+                  <a:srgbClr val="1C2833"/>
+                </a:solidFill>
+                <a:latin typeface="Georgia" pitchFamily="34" charset="0"/>
+                <a:ea typeface="Georgia" pitchFamily="34" charset="-122"/>
+                <a:cs typeface="Georgia" pitchFamily="34" charset="-120"/>
+              </a:rPr>
+              <a:t>108 × 95 → 103 | −40 → 10300 − 40 = </a:t>
+            </a:r>
+            <a:pPr algn="l" indent="0" marL="0">
+              <a:lnSpc>
+                <a:spcPts val="1820"/>
+              </a:lnSpc>
+              <a:spcBef>
+                <a:spcPts val="300"/>
+              </a:spcBef>
+              <a:spcAft>
+                <a:spcPts val="300"/>
+              </a:spcAft>
+              <a:buNone/>
+            </a:pPr>
+            <a:r>
+              <a:rPr lang="en-US" sz="1300" b="1" i="1" dirty="0">
+                <a:solidFill>
+                  <a:srgbClr val="1C2833"/>
+                </a:solidFill>
+                <a:latin typeface="Georgia" pitchFamily="34" charset="0"/>
+                <a:ea typeface="Georgia" pitchFamily="34" charset="-122"/>
+                <a:cs typeface="Georgia" pitchFamily="34" charset="-120"/>
+              </a:rPr>
+              <a:t>10260</a:t>
+            </a:r>
+            <a:endParaRPr lang="en-US" sz="1300" dirty="0"/>
+          </a:p>
+        </p:txBody>
+      </p:sp>
+      <p:sp>
+        <p:nvSpPr>
+          <p:cNvPr id="15" name="Text 13"/>
+          <p:cNvSpPr/>
+          <p:nvPr/>
+        </p:nvSpPr>
+        <p:spPr>
+          <a:xfrm>
+            <a:off x="692051" y="3764905"/>
+            <a:ext cx="7973389" cy="500063"/>
+          </a:xfrm>
+          <a:prstGeom prst="rect">
+            <a:avLst/>
+          </a:prstGeom>
+          <a:noFill/>
+          <a:ln/>
+        </p:spPr>
+        <p:txBody>
+          <a:bodyPr wrap="square" lIns="0" tIns="0" rIns="0" bIns="0" rtlCol="0" anchor="t"/>
+          <a:lstStyle/>
+          <a:p>
+            <a:pPr algn="l" indent="0" marL="0">
+              <a:lnSpc>
+                <a:spcPts val="1820"/>
+              </a:lnSpc>
+              <a:spcBef>
+                <a:spcPts val="300"/>
+              </a:spcBef>
+              <a:spcAft>
+                <a:spcPts val="300"/>
+              </a:spcAft>
+              <a:buNone/>
+            </a:pPr>
+            <a:r>
+              <a:rPr lang="en-US" sz="1300" dirty="0">
+                <a:solidFill>
+                  <a:srgbClr val="1C2833"/>
+                </a:solidFill>
+                <a:latin typeface="Georgia" pitchFamily="34" charset="0"/>
+                <a:ea typeface="Georgia" pitchFamily="34" charset="-122"/>
+                <a:cs typeface="Georgia" pitchFamily="34" charset="-120"/>
+              </a:rPr>
+              <a:t>Tip: for </a:t>
+            </a:r>
+            <a:pPr algn="l" indent="0" marL="0">
+              <a:lnSpc>
+                <a:spcPts val="1820"/>
+              </a:lnSpc>
+              <a:spcBef>
+                <a:spcPts val="300"/>
+              </a:spcBef>
+              <a:spcAft>
+                <a:spcPts val="300"/>
+              </a:spcAft>
+              <a:buNone/>
+            </a:pPr>
+            <a:r>
+              <a:rPr lang="en-US" sz="1300" i="1" dirty="0">
+                <a:solidFill>
+                  <a:srgbClr val="1C2833"/>
+                </a:solidFill>
+                <a:latin typeface="Georgia" pitchFamily="34" charset="0"/>
+                <a:ea typeface="Georgia" pitchFamily="34" charset="-122"/>
+                <a:cs typeface="Georgia" pitchFamily="34" charset="-120"/>
+              </a:rPr>
+              <a:t>(a+x)(a−y)</a:t>
+            </a:r>
+            <a:pPr algn="l" indent="0" marL="0">
+              <a:lnSpc>
+                <a:spcPts val="1820"/>
+              </a:lnSpc>
+              <a:spcBef>
+                <a:spcPts val="300"/>
+              </a:spcBef>
+              <a:spcAft>
+                <a:spcPts val="300"/>
+              </a:spcAft>
+              <a:buNone/>
+            </a:pPr>
+            <a:r>
+              <a:rPr lang="en-US" sz="1300" dirty="0">
+                <a:solidFill>
+                  <a:srgbClr val="1C2833"/>
+                </a:solidFill>
+                <a:latin typeface="Georgia" pitchFamily="34" charset="0"/>
+                <a:ea typeface="Georgia" pitchFamily="34" charset="-122"/>
+                <a:cs typeface="Georgia" pitchFamily="34" charset="-120"/>
+              </a:rPr>
+              <a:t> with a = base, the left is </a:t>
+            </a:r>
+            <a:pPr algn="l" indent="0" marL="0">
+              <a:lnSpc>
+                <a:spcPts val="1820"/>
+              </a:lnSpc>
+              <a:spcBef>
+                <a:spcPts val="300"/>
+              </a:spcBef>
+              <a:spcAft>
+                <a:spcPts val="300"/>
+              </a:spcAft>
+              <a:buNone/>
+            </a:pPr>
+            <a:r>
+              <a:rPr lang="en-US" sz="1300" i="1" dirty="0">
+                <a:solidFill>
+                  <a:srgbClr val="1C2833"/>
+                </a:solidFill>
+                <a:latin typeface="Georgia" pitchFamily="34" charset="0"/>
+                <a:ea typeface="Georgia" pitchFamily="34" charset="-122"/>
+                <a:cs typeface="Georgia" pitchFamily="34" charset="-120"/>
+              </a:rPr>
+              <a:t>a + x − y</a:t>
+            </a:r>
+            <a:pPr algn="l" indent="0" marL="0">
+              <a:lnSpc>
+                <a:spcPts val="1820"/>
+              </a:lnSpc>
+              <a:spcBef>
+                <a:spcPts val="300"/>
+              </a:spcBef>
+              <a:spcAft>
+                <a:spcPts val="300"/>
+              </a:spcAft>
+              <a:buNone/>
+            </a:pPr>
+            <a:r>
+              <a:rPr lang="en-US" sz="1300" dirty="0">
+                <a:solidFill>
+                  <a:srgbClr val="1C2833"/>
+                </a:solidFill>
+                <a:latin typeface="Georgia" pitchFamily="34" charset="0"/>
+                <a:ea typeface="Georgia" pitchFamily="34" charset="-122"/>
+                <a:cs typeface="Georgia" pitchFamily="34" charset="-120"/>
+              </a:rPr>
+              <a:t> and the right is </a:t>
+            </a:r>
+            <a:pPr algn="l" indent="0" marL="0">
+              <a:lnSpc>
+                <a:spcPts val="1820"/>
+              </a:lnSpc>
+              <a:spcBef>
+                <a:spcPts val="300"/>
+              </a:spcBef>
+              <a:spcAft>
+                <a:spcPts val="300"/>
+              </a:spcAft>
+              <a:buNone/>
+            </a:pPr>
+            <a:r>
+              <a:rPr lang="en-US" sz="1300" i="1" dirty="0">
+                <a:solidFill>
+                  <a:srgbClr val="1C2833"/>
+                </a:solidFill>
+                <a:latin typeface="Georgia" pitchFamily="34" charset="0"/>
+                <a:ea typeface="Georgia" pitchFamily="34" charset="-122"/>
+                <a:cs typeface="Georgia" pitchFamily="34" charset="-120"/>
+              </a:rPr>
+              <a:t>−xy</a:t>
+            </a:r>
+            <a:pPr algn="l" indent="0" marL="0">
+              <a:lnSpc>
+                <a:spcPts val="1820"/>
+              </a:lnSpc>
+              <a:spcBef>
+                <a:spcPts val="300"/>
+              </a:spcBef>
+              <a:spcAft>
+                <a:spcPts val="300"/>
+              </a:spcAft>
+              <a:buNone/>
+            </a:pPr>
+            <a:r>
+              <a:rPr lang="en-US" sz="1300" dirty="0">
+                <a:solidFill>
+                  <a:srgbClr val="1C2833"/>
+                </a:solidFill>
+                <a:latin typeface="Georgia" pitchFamily="34" charset="0"/>
+                <a:ea typeface="Georgia" pitchFamily="34" charset="-122"/>
+                <a:cs typeface="Georgia" pitchFamily="34" charset="-120"/>
+              </a:rPr>
+              <a:t>. Whenever excess equals deficit, the left is exactly the base and the answer is </a:t>
+            </a:r>
+            <a:pPr algn="l" indent="0" marL="0">
+              <a:lnSpc>
+                <a:spcPts val="1820"/>
+              </a:lnSpc>
+              <a:spcBef>
+                <a:spcPts val="300"/>
+              </a:spcBef>
+              <a:spcAft>
+                <a:spcPts val="300"/>
+              </a:spcAft>
+              <a:buNone/>
+            </a:pPr>
+            <a:r>
+              <a:rPr lang="en-US" sz="1300" i="1" dirty="0">
+                <a:solidFill>
+                  <a:srgbClr val="1C2833"/>
+                </a:solidFill>
+                <a:latin typeface="Georgia" pitchFamily="34" charset="0"/>
+                <a:ea typeface="Georgia" pitchFamily="34" charset="-122"/>
+                <a:cs typeface="Georgia" pitchFamily="34" charset="-120"/>
+              </a:rPr>
+              <a:t>base² − xy</a:t>
+            </a:r>
+            <a:pPr algn="l" indent="0" marL="0">
+              <a:lnSpc>
+                <a:spcPts val="1820"/>
+              </a:lnSpc>
+              <a:spcBef>
+                <a:spcPts val="300"/>
+              </a:spcBef>
+              <a:spcAft>
+                <a:spcPts val="300"/>
+              </a:spcAft>
+              <a:buNone/>
+            </a:pPr>
+            <a:r>
+              <a:rPr lang="en-US" sz="1300" dirty="0">
+                <a:solidFill>
+                  <a:srgbClr val="1C2833"/>
+                </a:solidFill>
+                <a:latin typeface="Georgia" pitchFamily="34" charset="0"/>
+                <a:ea typeface="Georgia" pitchFamily="34" charset="-122"/>
+                <a:cs typeface="Georgia" pitchFamily="34" charset="-120"/>
+              </a:rPr>
+              <a:t>.</a:t>
+            </a:r>
+            <a:endParaRPr lang="en-US" sz="1300" dirty="0"/>
+          </a:p>
+        </p:txBody>
+      </p:sp>
+      <p:sp>
+        <p:nvSpPr>
+          <p:cNvPr id="16" name="Text 14"/>
+          <p:cNvSpPr/>
+          <p:nvPr/>
+        </p:nvSpPr>
+        <p:spPr>
+          <a:xfrm>
+            <a:off x="406301" y="4620518"/>
+            <a:ext cx="8498026" cy="213271"/>
+          </a:xfrm>
+          <a:prstGeom prst="rect">
+            <a:avLst/>
+          </a:prstGeom>
+          <a:noFill/>
+          <a:ln/>
+        </p:spPr>
+        <p:txBody>
+          <a:bodyPr wrap="square" lIns="0" tIns="0" rIns="0" bIns="0" rtlCol="0" anchor="t"/>
+          <a:lstStyle/>
+          <a:p>
+            <a:pPr algn="l" indent="0" marL="0">
+              <a:lnSpc>
+                <a:spcPts val="1680"/>
+              </a:lnSpc>
+              <a:spcBef>
+                <a:spcPts val="300"/>
+              </a:spcBef>
+              <a:spcAft>
+                <a:spcPts val="300"/>
+              </a:spcAft>
+              <a:buNone/>
+            </a:pPr>
+            <a:r>
+              <a:rPr lang="en-US" sz="1200" dirty="0">
+                <a:solidFill>
+                  <a:srgbClr val="1C2833"/>
+                </a:solidFill>
+                <a:latin typeface="Arial" pitchFamily="34" charset="0"/>
+                <a:ea typeface="Arial" pitchFamily="34" charset="-122"/>
+                <a:cs typeface="Arial" pitchFamily="34" charset="-120"/>
+              </a:rPr>
+              <a:t>Middle ·  · IKS Curriculum</a:t>
+            </a:r>
+            <a:endParaRPr lang="en-US" sz="1200" dirty="0"/>
+          </a:p>
+        </p:txBody>
+      </p:sp>
+    </p:spTree>
+  </p:cSld>
+  <p:clrMapOvr>
+    <a:masterClrMapping/>
+  </p:clrMapOvr>
+</p:sld>
+</file>
+
+<file path=ppt/slides/slide16.xml><?xml version="1.0" encoding="utf-8"?>
+<p:sld xmlns:a="http://schemas.openxmlformats.org/drawingml/2006/main" xmlns:r="http://schemas.openxmlformats.org/officeDocument/2006/relationships" xmlns:p="http://schemas.openxmlformats.org/presentationml/2006/main">
+  <p:cSld name="Slide 16">
+    <p:bg>
+      <p:bgPr>
+        <a:solidFill>
+          <a:srgbClr val="FFFFFF"/>
+        </a:solidFill>
+      </p:bgPr>
+    </p:bg>
+    <p:spTree>
+      <p:nvGrpSpPr>
+        <p:cNvPr id="1" name=""/>
+        <p:cNvGrpSpPr/>
+        <p:nvPr/>
+      </p:nvGrpSpPr>
+      <p:grpSpPr>
+        <a:xfrm>
+          <a:off x="0" y="0"/>
+          <a:ext cx="0" cy="0"/>
+          <a:chOff x="0" y="0"/>
+          <a:chExt cx="0" cy="0"/>
+        </a:xfrm>
+      </p:grpSpPr>
+      <p:sp>
+        <p:nvSpPr>
+          <p:cNvPr id="2" name="Text 0"/>
+          <p:cNvSpPr/>
+          <p:nvPr/>
+        </p:nvSpPr>
+        <p:spPr>
+          <a:xfrm>
+            <a:off x="0" y="0"/>
+            <a:ext cx="9144000" cy="101501"/>
+          </a:xfrm>
+          <a:prstGeom prst="rect">
+            <a:avLst/>
+          </a:prstGeom>
+          <a:solidFill>
+            <a:srgbClr val="277884"/>
+          </a:solidFill>
+          <a:ln/>
+        </p:spPr>
+        <p:txBody>
+          <a:bodyPr wrap="square" rtlCol="0" anchor="ctr"/>
+          <a:lstStyle/>
+          <a:p>
+            <a:pPr indent="0" marL="0">
+              <a:buNone/>
+            </a:pPr>
+            <a:endParaRPr lang="en-US" dirty="0"/>
+          </a:p>
+        </p:txBody>
+      </p:sp>
+      <p:sp>
+        <p:nvSpPr>
+          <p:cNvPr id="3" name="Text 1"/>
+          <p:cNvSpPr/>
+          <p:nvPr/>
+        </p:nvSpPr>
+        <p:spPr>
+          <a:xfrm>
+            <a:off x="406301" y="457051"/>
+            <a:ext cx="8498026" cy="274290"/>
+          </a:xfrm>
+          <a:prstGeom prst="rect">
+            <a:avLst/>
+          </a:prstGeom>
+          <a:noFill/>
+          <a:ln/>
+        </p:spPr>
+        <p:txBody>
+          <a:bodyPr wrap="square" lIns="0" tIns="0" rIns="0" bIns="0" rtlCol="0" anchor="t"/>
+          <a:lstStyle/>
+          <a:p>
+            <a:pPr algn="l" indent="0" marL="0">
+              <a:lnSpc>
+                <a:spcPts val="2160"/>
+              </a:lnSpc>
+              <a:spcBef>
+                <a:spcPts val="600"/>
+              </a:spcBef>
+              <a:spcAft>
+                <a:spcPts val="800"/>
+              </a:spcAft>
+              <a:buNone/>
+            </a:pPr>
+            <a:r>
+              <a:rPr lang="en-US" sz="1800" b="1" dirty="0">
+                <a:solidFill>
+                  <a:srgbClr val="FE4447"/>
+                </a:solidFill>
+                <a:latin typeface="Georgia" pitchFamily="34" charset="0"/>
+                <a:ea typeface="Georgia" pitchFamily="34" charset="-122"/>
+                <a:cs typeface="Georgia" pitchFamily="34" charset="-120"/>
+              </a:rPr>
+              <a:t>Homework</a:t>
+            </a:r>
+            <a:endParaRPr lang="en-US" sz="1800" dirty="0"/>
+          </a:p>
+        </p:txBody>
+      </p:sp>
+      <p:sp>
+        <p:nvSpPr>
+          <p:cNvPr id="4" name="Text 2"/>
+          <p:cNvSpPr/>
+          <p:nvPr/>
+        </p:nvSpPr>
+        <p:spPr>
+          <a:xfrm>
+            <a:off x="634901" y="883593"/>
+            <a:ext cx="8102798" cy="525661"/>
+          </a:xfrm>
+          <a:prstGeom prst="rect">
+            <a:avLst/>
+          </a:prstGeom>
+          <a:noFill/>
+          <a:ln/>
+        </p:spPr>
+        <p:txBody>
+          <a:bodyPr wrap="square" lIns="0" tIns="0" rIns="0" bIns="0" rtlCol="0" anchor="t"/>
+          <a:lstStyle/>
+          <a:p>
+            <a:pPr algn="l" marL="342900" indent="-342900">
+              <a:lnSpc>
+                <a:spcPts val="1620"/>
+              </a:lnSpc>
+              <a:spcAft>
+                <a:spcPts val="300"/>
+              </a:spcAft>
+              <a:buSzPct val="100000"/>
+              <a:buChar char="•"/>
+            </a:pPr>
+            <a:r>
+              <a:rPr lang="en-US" sz="1200" dirty="0">
+                <a:solidFill>
+                  <a:srgbClr val="1C2833"/>
+                </a:solidFill>
+                <a:latin typeface="Arial" pitchFamily="34" charset="0"/>
+                <a:ea typeface="Arial" pitchFamily="34" charset="-122"/>
+                <a:cs typeface="Arial" pitchFamily="34" charset="-120"/>
+              </a:rPr>
+              <a:t>10 mixed problems (mix of both-below, both-above, and mixed-sign). Decide the case first.</a:t>
+            </a:r>
+            <a:endParaRPr lang="en-US" sz="1200" dirty="0"/>
+          </a:p>
+          <a:p>
+            <a:pPr algn="l" marL="342900" indent="-342900">
+              <a:lnSpc>
+                <a:spcPts val="1620"/>
+              </a:lnSpc>
+              <a:spcAft>
+                <a:spcPts val="300"/>
+              </a:spcAft>
+              <a:buSzPct val="100000"/>
+              <a:buChar char="•"/>
+            </a:pPr>
+            <a:r>
+              <a:rPr lang="en-US" sz="1200" dirty="0">
+                <a:solidFill>
+                  <a:srgbClr val="1C2833"/>
+                </a:solidFill>
+                <a:latin typeface="Arial" pitchFamily="34" charset="0"/>
+                <a:ea typeface="Arial" pitchFamily="34" charset="-122"/>
+                <a:cs typeface="Arial" pitchFamily="34" charset="-120"/>
+              </a:rPr>
+              <a:t>Find ONE example in your textbook where mixed-sign Nikhilam would be faster than long multiplication. Bring it.</a:t>
+            </a:r>
+            <a:endParaRPr lang="en-US" sz="1200" dirty="0"/>
+          </a:p>
+        </p:txBody>
+      </p:sp>
+      <p:sp>
+        <p:nvSpPr>
+          <p:cNvPr id="5" name="Text 3"/>
+          <p:cNvSpPr/>
+          <p:nvPr/>
+        </p:nvSpPr>
+        <p:spPr>
+          <a:xfrm>
+            <a:off x="406301" y="4434929"/>
+            <a:ext cx="8498026" cy="213271"/>
+          </a:xfrm>
+          <a:prstGeom prst="rect">
+            <a:avLst/>
+          </a:prstGeom>
+          <a:noFill/>
+          <a:ln/>
+        </p:spPr>
+        <p:txBody>
+          <a:bodyPr wrap="square" lIns="0" tIns="0" rIns="0" bIns="0" rtlCol="0" anchor="t"/>
+          <a:lstStyle/>
+          <a:p>
+            <a:pPr algn="l" indent="0" marL="0">
+              <a:lnSpc>
+                <a:spcPts val="1680"/>
+              </a:lnSpc>
+              <a:spcBef>
+                <a:spcPts val="300"/>
+              </a:spcBef>
+              <a:spcAft>
+                <a:spcPts val="300"/>
+              </a:spcAft>
+              <a:buNone/>
+            </a:pPr>
+            <a:r>
+              <a:rPr lang="en-US" sz="1200" dirty="0">
+                <a:solidFill>
+                  <a:srgbClr val="1C2833"/>
+                </a:solidFill>
+                <a:latin typeface="Arial" pitchFamily="34" charset="0"/>
+                <a:ea typeface="Arial" pitchFamily="34" charset="-122"/>
+                <a:cs typeface="Arial" pitchFamily="34" charset="-120"/>
+              </a:rPr>
+              <a:t>Middle ·  · IKS Curriculum</a:t>
+            </a:r>
+            <a:endParaRPr lang="en-US" sz="1200" dirty="0"/>
+          </a:p>
+        </p:txBody>
+      </p:sp>
+    </p:spTree>
+  </p:cSld>
+  <p:clrMapOvr>
+    <a:masterClrMapping/>
+  </p:clrMapOvr>
+</p:sld>
+</file>
+
+<file path=ppt/slides/slide17.xml><?xml version="1.0" encoding="utf-8"?>
+<p:sld xmlns:a="http://schemas.openxmlformats.org/drawingml/2006/main" xmlns:r="http://schemas.openxmlformats.org/officeDocument/2006/relationships" xmlns:p="http://schemas.openxmlformats.org/presentationml/2006/main">
+  <p:cSld name="Slide 17">
+    <p:bg>
+      <p:bgPr>
+        <a:solidFill>
+          <a:srgbClr val="FFFFFF"/>
+        </a:solidFill>
+      </p:bgPr>
+    </p:bg>
+    <p:spTree>
+      <p:nvGrpSpPr>
+        <p:cNvPr id="1" name=""/>
+        <p:cNvGrpSpPr/>
+        <p:nvPr/>
+      </p:nvGrpSpPr>
+      <p:grpSpPr>
+        <a:xfrm>
+          <a:off x="0" y="0"/>
+          <a:ext cx="0" cy="0"/>
+          <a:chOff x="0" y="0"/>
+          <a:chExt cx="0" cy="0"/>
+        </a:xfrm>
+      </p:grpSpPr>
+      <p:sp>
+        <p:nvSpPr>
+          <p:cNvPr id="2" name="Text 0"/>
+          <p:cNvSpPr/>
+          <p:nvPr/>
+        </p:nvSpPr>
+        <p:spPr>
+          <a:xfrm>
+            <a:off x="0" y="0"/>
+            <a:ext cx="9144000" cy="101501"/>
+          </a:xfrm>
+          <a:prstGeom prst="rect">
+            <a:avLst/>
+          </a:prstGeom>
+          <a:solidFill>
+            <a:srgbClr val="277884"/>
+          </a:solidFill>
+          <a:ln/>
+        </p:spPr>
+        <p:txBody>
+          <a:bodyPr wrap="square" rtlCol="0" anchor="ctr"/>
+          <a:lstStyle/>
+          <a:p>
+            <a:pPr indent="0" marL="0">
+              <a:buNone/>
+            </a:pPr>
+            <a:endParaRPr lang="en-US" dirty="0"/>
+          </a:p>
+        </p:txBody>
+      </p:sp>
+      <p:sp>
+        <p:nvSpPr>
+          <p:cNvPr id="3" name="Text 1"/>
+          <p:cNvSpPr/>
+          <p:nvPr/>
+        </p:nvSpPr>
+        <p:spPr>
+          <a:xfrm>
+            <a:off x="406301" y="457051"/>
+            <a:ext cx="8498026" cy="274290"/>
+          </a:xfrm>
+          <a:prstGeom prst="rect">
+            <a:avLst/>
+          </a:prstGeom>
+          <a:noFill/>
+          <a:ln/>
+        </p:spPr>
+        <p:txBody>
+          <a:bodyPr wrap="square" lIns="0" tIns="0" rIns="0" bIns="0" rtlCol="0" anchor="t"/>
+          <a:lstStyle/>
+          <a:p>
+            <a:pPr algn="l" indent="0" marL="0">
+              <a:lnSpc>
+                <a:spcPts val="2160"/>
+              </a:lnSpc>
+              <a:spcBef>
+                <a:spcPts val="600"/>
+              </a:spcBef>
+              <a:spcAft>
+                <a:spcPts val="800"/>
+              </a:spcAft>
+              <a:buNone/>
+            </a:pPr>
+            <a:r>
+              <a:rPr lang="en-US" sz="1800" b="1" dirty="0">
+                <a:solidFill>
+                  <a:srgbClr val="FE4447"/>
+                </a:solidFill>
+                <a:latin typeface="Georgia" pitchFamily="34" charset="0"/>
+                <a:ea typeface="Georgia" pitchFamily="34" charset="-122"/>
+                <a:cs typeface="Georgia" pitchFamily="34" charset="-120"/>
+              </a:rPr>
+              <a:t>Differentiation</a:t>
+            </a:r>
+            <a:endParaRPr lang="en-US" sz="1800" dirty="0"/>
+          </a:p>
+        </p:txBody>
+      </p:sp>
+      <p:sp>
+        <p:nvSpPr>
+          <p:cNvPr id="4" name="Text 2"/>
+          <p:cNvSpPr/>
+          <p:nvPr/>
+        </p:nvSpPr>
+        <p:spPr>
+          <a:xfrm>
+            <a:off x="634901" y="883593"/>
+            <a:ext cx="8102798" cy="975122"/>
+          </a:xfrm>
+          <a:prstGeom prst="rect">
+            <a:avLst/>
+          </a:prstGeom>
+          <a:noFill/>
+          <a:ln/>
+        </p:spPr>
+        <p:txBody>
+          <a:bodyPr wrap="square" lIns="0" tIns="0" rIns="0" bIns="0" rtlCol="0" anchor="t"/>
+          <a:lstStyle/>
+          <a:p>
+            <a:pPr algn="l" marL="342900" indent="-342900">
+              <a:lnSpc>
+                <a:spcPts val="1620"/>
+              </a:lnSpc>
+              <a:spcAft>
+                <a:spcPts val="300"/>
+              </a:spcAft>
+              <a:buSzPct val="100000"/>
+              <a:buChar char="•"/>
+            </a:pPr>
+            <a:r>
+              <a:rPr lang="en-US" sz="1200" b="1" dirty="0">
+                <a:solidFill>
+                  <a:srgbClr val="1C2833"/>
+                </a:solidFill>
+                <a:latin typeface="Arial" pitchFamily="34" charset="0"/>
+                <a:ea typeface="Arial" pitchFamily="34" charset="-122"/>
+                <a:cs typeface="Arial" pitchFamily="34" charset="-120"/>
+              </a:rPr>
+              <a:t>Tier up:</a:t>
+            </a:r>
+            <a:pPr algn="l" indent="0" marL="0">
+              <a:lnSpc>
+                <a:spcPts val="1620"/>
+              </a:lnSpc>
+              <a:spcAft>
+                <a:spcPts val="300"/>
+              </a:spcAft>
+              <a:buNone/>
+            </a:pPr>
+            <a:r>
+              <a:rPr lang="en-US" sz="1200" dirty="0">
+                <a:solidFill>
+                  <a:srgbClr val="1C2833"/>
+                </a:solidFill>
+                <a:latin typeface="Arial" pitchFamily="34" charset="0"/>
+                <a:ea typeface="Arial" pitchFamily="34" charset="-122"/>
+                <a:cs typeface="Arial" pitchFamily="34" charset="-120"/>
+              </a:rPr>
+              <a:t> Try </a:t>
+            </a:r>
+            <a:pPr algn="l" indent="0" marL="0">
+              <a:lnSpc>
+                <a:spcPts val="1620"/>
+              </a:lnSpc>
+              <a:spcAft>
+                <a:spcPts val="300"/>
+              </a:spcAft>
+              <a:buNone/>
+            </a:pPr>
+            <a:r>
+              <a:rPr lang="en-US" sz="1200" dirty="0">
+                <a:solidFill>
+                  <a:srgbClr val="1C2833"/>
+                </a:solidFill>
+                <a:latin typeface="Arial" pitchFamily="34" charset="0"/>
+                <a:ea typeface="Arial" pitchFamily="34" charset="-122"/>
+                <a:cs typeface="Arial" pitchFamily="34" charset="-120"/>
+              </a:rPr>
+              <a:t>121 × 79</a:t>
+            </a:r>
+            <a:pPr algn="l" indent="0" marL="0">
+              <a:lnSpc>
+                <a:spcPts val="1620"/>
+              </a:lnSpc>
+              <a:spcAft>
+                <a:spcPts val="300"/>
+              </a:spcAft>
+              <a:buNone/>
+            </a:pPr>
+            <a:r>
+              <a:rPr lang="en-US" sz="1200" dirty="0">
+                <a:solidFill>
+                  <a:srgbClr val="1C2833"/>
+                </a:solidFill>
+                <a:latin typeface="Arial" pitchFamily="34" charset="0"/>
+                <a:ea typeface="Arial" pitchFamily="34" charset="-122"/>
+                <a:cs typeface="Arial" pitchFamily="34" charset="-120"/>
+              </a:rPr>
+              <a:t> (further from 100). Excess +21, deficit −21. Cross: 121 − 21 = 100. Right: +21 × −21 = −441. Answer: 10000 − 441 = </a:t>
+            </a:r>
+            <a:pPr algn="l" indent="0" marL="0">
+              <a:lnSpc>
+                <a:spcPts val="1620"/>
+              </a:lnSpc>
+              <a:spcAft>
+                <a:spcPts val="300"/>
+              </a:spcAft>
+              <a:buNone/>
+            </a:pPr>
+            <a:r>
+              <a:rPr lang="en-US" sz="1200" b="1" dirty="0">
+                <a:solidFill>
+                  <a:srgbClr val="1C2833"/>
+                </a:solidFill>
+                <a:latin typeface="Arial" pitchFamily="34" charset="0"/>
+                <a:ea typeface="Arial" pitchFamily="34" charset="-122"/>
+                <a:cs typeface="Arial" pitchFamily="34" charset="-120"/>
+              </a:rPr>
+              <a:t>9559</a:t>
+            </a:r>
+            <a:pPr algn="l" indent="0" marL="0">
+              <a:lnSpc>
+                <a:spcPts val="1620"/>
+              </a:lnSpc>
+              <a:spcAft>
+                <a:spcPts val="300"/>
+              </a:spcAft>
+              <a:buNone/>
+            </a:pPr>
+            <a:r>
+              <a:rPr lang="en-US" sz="1200" dirty="0">
+                <a:solidFill>
+                  <a:srgbClr val="1C2833"/>
+                </a:solidFill>
+                <a:latin typeface="Arial" pitchFamily="34" charset="0"/>
+                <a:ea typeface="Arial" pitchFamily="34" charset="-122"/>
+                <a:cs typeface="Arial" pitchFamily="34" charset="-120"/>
+              </a:rPr>
+              <a:t>. (Equivalently: (100+21)(100−21) = 100² − 21² = 10000 − 441.) Notice you've just used the </a:t>
+            </a:r>
+            <a:pPr algn="l" indent="0" marL="0">
+              <a:lnSpc>
+                <a:spcPts val="1620"/>
+              </a:lnSpc>
+              <a:spcAft>
+                <a:spcPts val="300"/>
+              </a:spcAft>
+              <a:buNone/>
+            </a:pPr>
+            <a:r>
+              <a:rPr lang="en-US" sz="1200" i="1" dirty="0">
+                <a:solidFill>
+                  <a:srgbClr val="1C2833"/>
+                </a:solidFill>
+                <a:latin typeface="Arial" pitchFamily="34" charset="0"/>
+                <a:ea typeface="Arial" pitchFamily="34" charset="-122"/>
+                <a:cs typeface="Arial" pitchFamily="34" charset="-120"/>
+              </a:rPr>
+              <a:t>difference of squares</a:t>
+            </a:r>
+            <a:pPr algn="l" indent="0" marL="0">
+              <a:lnSpc>
+                <a:spcPts val="1620"/>
+              </a:lnSpc>
+              <a:spcAft>
+                <a:spcPts val="300"/>
+              </a:spcAft>
+              <a:buNone/>
+            </a:pPr>
+            <a:r>
+              <a:rPr lang="en-US" sz="1200" dirty="0">
+                <a:solidFill>
+                  <a:srgbClr val="1C2833"/>
+                </a:solidFill>
+                <a:latin typeface="Arial" pitchFamily="34" charset="0"/>
+                <a:ea typeface="Arial" pitchFamily="34" charset="-122"/>
+                <a:cs typeface="Arial" pitchFamily="34" charset="-120"/>
+              </a:rPr>
+              <a:t> identity. Connect to algebra.</a:t>
+            </a:r>
+            <a:endParaRPr lang="en-US" sz="1200" dirty="0"/>
+          </a:p>
+          <a:p>
+            <a:pPr algn="l" marL="342900" indent="-342900">
+              <a:lnSpc>
+                <a:spcPts val="1620"/>
+              </a:lnSpc>
+              <a:spcAft>
+                <a:spcPts val="300"/>
+              </a:spcAft>
+              <a:buSzPct val="100000"/>
+              <a:buChar char="•"/>
+            </a:pPr>
+            <a:r>
+              <a:rPr lang="en-US" sz="1200" b="1" dirty="0">
+                <a:solidFill>
+                  <a:srgbClr val="1C2833"/>
+                </a:solidFill>
+                <a:latin typeface="Arial" pitchFamily="34" charset="0"/>
+                <a:ea typeface="Arial" pitchFamily="34" charset="-122"/>
+                <a:cs typeface="Arial" pitchFamily="34" charset="-120"/>
+              </a:rPr>
+              <a:t>Tier down:</a:t>
+            </a:r>
+            <a:pPr algn="l" indent="0" marL="0">
+              <a:lnSpc>
+                <a:spcPts val="1620"/>
+              </a:lnSpc>
+              <a:spcAft>
+                <a:spcPts val="300"/>
+              </a:spcAft>
+              <a:buNone/>
+            </a:pPr>
+            <a:r>
+              <a:rPr lang="en-US" sz="1200" dirty="0">
+                <a:solidFill>
+                  <a:srgbClr val="1C2833"/>
+                </a:solidFill>
+                <a:latin typeface="Arial" pitchFamily="34" charset="0"/>
+                <a:ea typeface="Arial" pitchFamily="34" charset="-122"/>
+                <a:cs typeface="Arial" pitchFamily="34" charset="-120"/>
+              </a:rPr>
+              <a:t> Stay with </a:t>
+            </a:r>
+            <a:pPr algn="l" indent="0" marL="0">
+              <a:lnSpc>
+                <a:spcPts val="1620"/>
+              </a:lnSpc>
+              <a:spcAft>
+                <a:spcPts val="300"/>
+              </a:spcAft>
+              <a:buNone/>
+            </a:pPr>
+            <a:r>
+              <a:rPr lang="en-US" sz="1200" dirty="0">
+                <a:solidFill>
+                  <a:srgbClr val="1C2833"/>
+                </a:solidFill>
+                <a:latin typeface="Arial" pitchFamily="34" charset="0"/>
+                <a:ea typeface="Arial" pitchFamily="34" charset="-122"/>
+                <a:cs typeface="Arial" pitchFamily="34" charset="-120"/>
+              </a:rPr>
+              <a:t>102 × 99</a:t>
+            </a:r>
+            <a:pPr algn="l" indent="0" marL="0">
+              <a:lnSpc>
+                <a:spcPts val="1620"/>
+              </a:lnSpc>
+              <a:spcAft>
+                <a:spcPts val="300"/>
+              </a:spcAft>
+              <a:buNone/>
+            </a:pPr>
+            <a:r>
+              <a:rPr lang="en-US" sz="1200" dirty="0">
+                <a:solidFill>
+                  <a:srgbClr val="1C2833"/>
+                </a:solidFill>
+                <a:latin typeface="Arial" pitchFamily="34" charset="0"/>
+                <a:ea typeface="Arial" pitchFamily="34" charset="-122"/>
+                <a:cs typeface="Arial" pitchFamily="34" charset="-120"/>
+              </a:rPr>
+              <a:t>, </a:t>
+            </a:r>
+            <a:pPr algn="l" indent="0" marL="0">
+              <a:lnSpc>
+                <a:spcPts val="1620"/>
+              </a:lnSpc>
+              <a:spcAft>
+                <a:spcPts val="300"/>
+              </a:spcAft>
+              <a:buNone/>
+            </a:pPr>
+            <a:r>
+              <a:rPr lang="en-US" sz="1200" dirty="0">
+                <a:solidFill>
+                  <a:srgbClr val="1C2833"/>
+                </a:solidFill>
+                <a:latin typeface="Arial" pitchFamily="34" charset="0"/>
+                <a:ea typeface="Arial" pitchFamily="34" charset="-122"/>
+                <a:cs typeface="Arial" pitchFamily="34" charset="-120"/>
+              </a:rPr>
+              <a:t>103 × 98</a:t>
+            </a:r>
+            <a:pPr algn="l" indent="0" marL="0">
+              <a:lnSpc>
+                <a:spcPts val="1620"/>
+              </a:lnSpc>
+              <a:spcAft>
+                <a:spcPts val="300"/>
+              </a:spcAft>
+              <a:buNone/>
+            </a:pPr>
+            <a:r>
+              <a:rPr lang="en-US" sz="1200" dirty="0">
+                <a:solidFill>
+                  <a:srgbClr val="1C2833"/>
+                </a:solidFill>
+                <a:latin typeface="Arial" pitchFamily="34" charset="0"/>
+                <a:ea typeface="Arial" pitchFamily="34" charset="-122"/>
+                <a:cs typeface="Arial" pitchFamily="34" charset="-120"/>
+              </a:rPr>
+              <a:t> (small differences). Build up the sign care before tackling larger gaps.</a:t>
+            </a:r>
+            <a:endParaRPr lang="en-US" sz="1200" dirty="0"/>
+          </a:p>
+        </p:txBody>
+      </p:sp>
+      <p:sp>
+        <p:nvSpPr>
+          <p:cNvPr id="5" name="Text 3"/>
+          <p:cNvSpPr/>
+          <p:nvPr/>
+        </p:nvSpPr>
+        <p:spPr>
+          <a:xfrm>
+            <a:off x="406301" y="4434929"/>
+            <a:ext cx="8498026" cy="213271"/>
+          </a:xfrm>
+          <a:prstGeom prst="rect">
+            <a:avLst/>
+          </a:prstGeom>
+          <a:noFill/>
+          <a:ln/>
+        </p:spPr>
+        <p:txBody>
+          <a:bodyPr wrap="square" lIns="0" tIns="0" rIns="0" bIns="0" rtlCol="0" anchor="t"/>
+          <a:lstStyle/>
+          <a:p>
+            <a:pPr algn="l" indent="0" marL="0">
+              <a:lnSpc>
+                <a:spcPts val="1680"/>
+              </a:lnSpc>
+              <a:spcBef>
+                <a:spcPts val="300"/>
+              </a:spcBef>
+              <a:spcAft>
+                <a:spcPts val="300"/>
+              </a:spcAft>
+              <a:buNone/>
+            </a:pPr>
+            <a:r>
+              <a:rPr lang="en-US" sz="1200" dirty="0">
+                <a:solidFill>
+                  <a:srgbClr val="1C2833"/>
+                </a:solidFill>
+                <a:latin typeface="Arial" pitchFamily="34" charset="0"/>
+                <a:ea typeface="Arial" pitchFamily="34" charset="-122"/>
+                <a:cs typeface="Arial" pitchFamily="34" charset="-120"/>
+              </a:rPr>
+              <a:t>Middle ·  · IKS Curriculum</a:t>
+            </a:r>
+            <a:endParaRPr lang="en-US" sz="1200" dirty="0"/>
+          </a:p>
+        </p:txBody>
+      </p:sp>
+    </p:spTree>
+  </p:cSld>
+  <p:clrMapOvr>
+    <a:masterClrMapping/>
+  </p:clrMapOvr>
+</p:sld>
+</file>
+
+<file path=ppt/slides/slide18.xml><?xml version="1.0" encoding="utf-8"?>
+<p:sld xmlns:a="http://schemas.openxmlformats.org/drawingml/2006/main" xmlns:r="http://schemas.openxmlformats.org/officeDocument/2006/relationships" xmlns:p="http://schemas.openxmlformats.org/presentationml/2006/main">
+  <p:cSld name="Slide 18">
+    <p:bg>
+      <p:bgPr>
+        <a:solidFill>
+          <a:srgbClr val="FFFFFF"/>
+        </a:solidFill>
+      </p:bgPr>
+    </p:bg>
+    <p:spTree>
+      <p:nvGrpSpPr>
+        <p:cNvPr id="1" name=""/>
+        <p:cNvGrpSpPr/>
+        <p:nvPr/>
+      </p:nvGrpSpPr>
+      <p:grpSpPr>
+        <a:xfrm>
+          <a:off x="0" y="0"/>
+          <a:ext cx="0" cy="0"/>
+          <a:chOff x="0" y="0"/>
+          <a:chExt cx="0" cy="0"/>
+        </a:xfrm>
+      </p:grpSpPr>
+      <p:sp>
+        <p:nvSpPr>
+          <p:cNvPr id="2" name="Text 0"/>
+          <p:cNvSpPr/>
+          <p:nvPr/>
+        </p:nvSpPr>
+        <p:spPr>
+          <a:xfrm>
+            <a:off x="0" y="0"/>
+            <a:ext cx="9144000" cy="101501"/>
+          </a:xfrm>
+          <a:prstGeom prst="rect">
+            <a:avLst/>
+          </a:prstGeom>
+          <a:solidFill>
+            <a:srgbClr val="277884"/>
+          </a:solidFill>
+          <a:ln/>
+        </p:spPr>
+        <p:txBody>
+          <a:bodyPr wrap="square" rtlCol="0" anchor="ctr"/>
+          <a:lstStyle/>
+          <a:p>
+            <a:pPr indent="0" marL="0">
+              <a:buNone/>
+            </a:pPr>
+            <a:endParaRPr lang="en-US" dirty="0"/>
+          </a:p>
+        </p:txBody>
+      </p:sp>
+      <p:sp>
+        <p:nvSpPr>
+          <p:cNvPr id="3" name="Text 1"/>
+          <p:cNvSpPr/>
+          <p:nvPr/>
+        </p:nvSpPr>
+        <p:spPr>
+          <a:xfrm>
+            <a:off x="406301" y="457051"/>
+            <a:ext cx="8498026" cy="274290"/>
+          </a:xfrm>
+          <a:prstGeom prst="rect">
+            <a:avLst/>
+          </a:prstGeom>
+          <a:noFill/>
+          <a:ln/>
+        </p:spPr>
+        <p:txBody>
+          <a:bodyPr wrap="square" lIns="0" tIns="0" rIns="0" bIns="0" rtlCol="0" anchor="t"/>
+          <a:lstStyle/>
+          <a:p>
+            <a:pPr algn="l" indent="0" marL="0">
+              <a:lnSpc>
+                <a:spcPts val="2160"/>
+              </a:lnSpc>
+              <a:spcBef>
+                <a:spcPts val="600"/>
+              </a:spcBef>
+              <a:spcAft>
+                <a:spcPts val="800"/>
+              </a:spcAft>
+              <a:buNone/>
+            </a:pPr>
+            <a:r>
+              <a:rPr lang="en-US" sz="1800" b="1" dirty="0">
+                <a:solidFill>
+                  <a:srgbClr val="FE4447"/>
+                </a:solidFill>
+                <a:latin typeface="Georgia" pitchFamily="34" charset="0"/>
+                <a:ea typeface="Georgia" pitchFamily="34" charset="-122"/>
+                <a:cs typeface="Georgia" pitchFamily="34" charset="-120"/>
+              </a:rPr>
+              <a:t>Teacher notes</a:t>
+            </a:r>
+            <a:endParaRPr lang="en-US" sz="1800" dirty="0"/>
+          </a:p>
+        </p:txBody>
+      </p:sp>
+      <p:sp>
+        <p:nvSpPr>
+          <p:cNvPr id="4" name="Text 2"/>
+          <p:cNvSpPr/>
+          <p:nvPr/>
+        </p:nvSpPr>
+        <p:spPr>
+          <a:xfrm>
+            <a:off x="634901" y="883593"/>
+            <a:ext cx="8102798" cy="1386483"/>
+          </a:xfrm>
+          <a:prstGeom prst="rect">
+            <a:avLst/>
+          </a:prstGeom>
+          <a:noFill/>
+          <a:ln/>
+        </p:spPr>
+        <p:txBody>
+          <a:bodyPr wrap="square" lIns="0" tIns="0" rIns="0" bIns="0" rtlCol="0" anchor="t"/>
+          <a:lstStyle/>
+          <a:p>
+            <a:pPr algn="l" marL="342900" indent="-342900">
+              <a:lnSpc>
+                <a:spcPts val="1620"/>
+              </a:lnSpc>
+              <a:spcAft>
+                <a:spcPts val="300"/>
+              </a:spcAft>
+              <a:buSzPct val="100000"/>
+              <a:buChar char="•"/>
+            </a:pPr>
+            <a:r>
+              <a:rPr lang="en-US" sz="1200" dirty="0">
+                <a:solidFill>
+                  <a:srgbClr val="1C2833"/>
+                </a:solidFill>
+                <a:latin typeface="Arial" pitchFamily="34" charset="0"/>
+                <a:ea typeface="Arial" pitchFamily="34" charset="-122"/>
+                <a:cs typeface="Arial" pitchFamily="34" charset="-120"/>
+              </a:rPr>
+              <a:t>The mixed case is where most students give up and revert to long multiplication. </a:t>
+            </a:r>
+            <a:pPr algn="l" indent="0" marL="0">
+              <a:lnSpc>
+                <a:spcPts val="1620"/>
+              </a:lnSpc>
+              <a:spcAft>
+                <a:spcPts val="300"/>
+              </a:spcAft>
+              <a:buNone/>
+            </a:pPr>
+            <a:r>
+              <a:rPr lang="en-US" sz="1200" b="1" dirty="0">
+                <a:solidFill>
+                  <a:srgbClr val="1C2833"/>
+                </a:solidFill>
+                <a:latin typeface="Arial" pitchFamily="34" charset="0"/>
+                <a:ea typeface="Arial" pitchFamily="34" charset="-122"/>
+                <a:cs typeface="Arial" pitchFamily="34" charset="-120"/>
+              </a:rPr>
+              <a:t>Don't let them.</a:t>
+            </a:r>
+            <a:pPr algn="l" indent="0" marL="0">
+              <a:lnSpc>
+                <a:spcPts val="1620"/>
+              </a:lnSpc>
+              <a:spcAft>
+                <a:spcPts val="300"/>
+              </a:spcAft>
+              <a:buNone/>
+            </a:pPr>
+            <a:r>
+              <a:rPr lang="en-US" sz="1200" dirty="0">
+                <a:solidFill>
+                  <a:srgbClr val="1C2833"/>
+                </a:solidFill>
+                <a:latin typeface="Arial" pitchFamily="34" charset="0"/>
+                <a:ea typeface="Arial" pitchFamily="34" charset="-122"/>
+                <a:cs typeface="Arial" pitchFamily="34" charset="-120"/>
+              </a:rPr>
+              <a:t> The sign care is genuinely tricky for one day; by Day 6 it'll be a non-issue.</a:t>
+            </a:r>
+            <a:endParaRPr lang="en-US" sz="1200" dirty="0"/>
+          </a:p>
+          <a:p>
+            <a:pPr algn="l" marL="342900" indent="-342900">
+              <a:lnSpc>
+                <a:spcPts val="1620"/>
+              </a:lnSpc>
+              <a:spcAft>
+                <a:spcPts val="300"/>
+              </a:spcAft>
+              <a:buSzPct val="100000"/>
+              <a:buChar char="•"/>
+            </a:pPr>
+            <a:r>
+              <a:rPr lang="en-US" sz="1200" dirty="0">
+                <a:solidFill>
+                  <a:srgbClr val="1C2833"/>
+                </a:solidFill>
+                <a:latin typeface="Arial" pitchFamily="34" charset="0"/>
+                <a:ea typeface="Arial" pitchFamily="34" charset="-122"/>
+                <a:cs typeface="Arial" pitchFamily="34" charset="-120"/>
+              </a:rPr>
+              <a:t>The "tier up" connection to difference-of-squares (a²−b² identity) is a real bridge to algebra. If a student spots it, celebrate.</a:t>
+            </a:r>
+            <a:endParaRPr lang="en-US" sz="1200" dirty="0"/>
+          </a:p>
+          <a:p>
+            <a:pPr algn="l" marL="342900" indent="-342900">
+              <a:lnSpc>
+                <a:spcPts val="1620"/>
+              </a:lnSpc>
+              <a:spcAft>
+                <a:spcPts val="300"/>
+              </a:spcAft>
+              <a:buSzPct val="100000"/>
+              <a:buChar char="•"/>
+            </a:pPr>
+            <a:r>
+              <a:rPr lang="en-US" sz="1200" dirty="0">
+                <a:solidFill>
+                  <a:srgbClr val="1C2833"/>
+                </a:solidFill>
+                <a:latin typeface="Arial" pitchFamily="34" charset="0"/>
+                <a:ea typeface="Arial" pitchFamily="34" charset="-122"/>
+                <a:cs typeface="Arial" pitchFamily="34" charset="-120"/>
+              </a:rPr>
+              <a:t>Some students will resist the negative right part. Show them the "borrow from left" form (above) as an alternative — both forms give the same answer.</a:t>
+            </a:r>
+            <a:endParaRPr lang="en-US" sz="1200" dirty="0"/>
+          </a:p>
+        </p:txBody>
+      </p:sp>
+      <p:sp>
+        <p:nvSpPr>
+          <p:cNvPr id="5" name="Text 3"/>
+          <p:cNvSpPr/>
+          <p:nvPr/>
+        </p:nvSpPr>
+        <p:spPr>
+          <a:xfrm>
+            <a:off x="406301" y="4434929"/>
+            <a:ext cx="8498026" cy="213271"/>
+          </a:xfrm>
+          <a:prstGeom prst="rect">
+            <a:avLst/>
+          </a:prstGeom>
+          <a:noFill/>
+          <a:ln/>
+        </p:spPr>
+        <p:txBody>
+          <a:bodyPr wrap="square" lIns="0" tIns="0" rIns="0" bIns="0" rtlCol="0" anchor="t"/>
+          <a:lstStyle/>
+          <a:p>
+            <a:pPr algn="l" indent="0" marL="0">
+              <a:lnSpc>
+                <a:spcPts val="1680"/>
+              </a:lnSpc>
+              <a:spcBef>
+                <a:spcPts val="300"/>
+              </a:spcBef>
+              <a:spcAft>
+                <a:spcPts val="300"/>
+              </a:spcAft>
+              <a:buNone/>
+            </a:pPr>
+            <a:r>
+              <a:rPr lang="en-US" sz="1200" dirty="0">
+                <a:solidFill>
+                  <a:srgbClr val="1C2833"/>
+                </a:solidFill>
+                <a:latin typeface="Arial" pitchFamily="34" charset="0"/>
+                <a:ea typeface="Arial" pitchFamily="34" charset="-122"/>
+                <a:cs typeface="Arial" pitchFamily="34" charset="-120"/>
+              </a:rPr>
+              <a:t>Middle ·  · IKS Curriculum</a:t>
+            </a:r>
+            <a:endParaRPr lang="en-US" sz="1200" dirty="0"/>
+          </a:p>
+        </p:txBody>
+      </p:sp>
+    </p:spTree>
+  </p:cSld>
+  <p:clrMapOvr>
+    <a:masterClrMapping/>
+  </p:clrMapOvr>
+</p:sld>
+</file>
+
+<file path=ppt/slides/slide19.xml><?xml version="1.0" encoding="utf-8"?>
+<p:sld xmlns:a="http://schemas.openxmlformats.org/drawingml/2006/main" xmlns:r="http://schemas.openxmlformats.org/officeDocument/2006/relationships" xmlns:p="http://schemas.openxmlformats.org/presentationml/2006/main">
+  <p:cSld name="Slide 19">
+    <p:bg>
+      <p:bgPr>
+        <a:solidFill>
+          <a:srgbClr val="FFFFFF"/>
+        </a:solidFill>
+      </p:bgPr>
+    </p:bg>
+    <p:spTree>
+      <p:nvGrpSpPr>
+        <p:cNvPr id="1" name=""/>
+        <p:cNvGrpSpPr/>
+        <p:nvPr/>
+      </p:nvGrpSpPr>
+      <p:grpSpPr>
+        <a:xfrm>
+          <a:off x="0" y="0"/>
+          <a:ext cx="0" cy="0"/>
+          <a:chOff x="0" y="0"/>
+          <a:chExt cx="0" cy="0"/>
+        </a:xfrm>
+      </p:grpSpPr>
+      <p:sp>
+        <p:nvSpPr>
+          <p:cNvPr id="2" name="Text 0"/>
+          <p:cNvSpPr/>
+          <p:nvPr/>
+        </p:nvSpPr>
+        <p:spPr>
+          <a:xfrm>
+            <a:off x="0" y="0"/>
+            <a:ext cx="9144000" cy="101501"/>
+          </a:xfrm>
+          <a:prstGeom prst="rect">
+            <a:avLst/>
+          </a:prstGeom>
+          <a:solidFill>
+            <a:srgbClr val="277884"/>
+          </a:solidFill>
+          <a:ln/>
+        </p:spPr>
+        <p:txBody>
+          <a:bodyPr wrap="square" rtlCol="0" anchor="ctr"/>
+          <a:lstStyle/>
+          <a:p>
+            <a:pPr indent="0" marL="0">
+              <a:buNone/>
+            </a:pPr>
+            <a:endParaRPr lang="en-US" dirty="0"/>
+          </a:p>
+        </p:txBody>
+      </p:sp>
+      <p:sp>
+        <p:nvSpPr>
+          <p:cNvPr id="3" name="Text 1"/>
+          <p:cNvSpPr/>
+          <p:nvPr/>
+        </p:nvSpPr>
+        <p:spPr>
+          <a:xfrm>
+            <a:off x="406301" y="457051"/>
+            <a:ext cx="8498026" cy="274290"/>
+          </a:xfrm>
+          <a:prstGeom prst="rect">
+            <a:avLst/>
+          </a:prstGeom>
+          <a:noFill/>
+          <a:ln/>
+        </p:spPr>
+        <p:txBody>
+          <a:bodyPr wrap="square" lIns="0" tIns="0" rIns="0" bIns="0" rtlCol="0" anchor="t"/>
+          <a:lstStyle/>
+          <a:p>
+            <a:pPr algn="l" indent="0" marL="0">
+              <a:lnSpc>
+                <a:spcPts val="2160"/>
+              </a:lnSpc>
+              <a:spcBef>
+                <a:spcPts val="600"/>
+              </a:spcBef>
+              <a:spcAft>
+                <a:spcPts val="800"/>
+              </a:spcAft>
+              <a:buNone/>
+            </a:pPr>
+            <a:r>
+              <a:rPr lang="en-US" sz="1800" b="1" dirty="0">
+                <a:solidFill>
+                  <a:srgbClr val="FE4447"/>
+                </a:solidFill>
+                <a:latin typeface="Georgia" pitchFamily="34" charset="0"/>
+                <a:ea typeface="Georgia" pitchFamily="34" charset="-122"/>
+                <a:cs typeface="Georgia" pitchFamily="34" charset="-120"/>
+              </a:rPr>
               <a:t>Citation(s) used in this lesson</a:t>
             </a:r>
             <a:endParaRPr lang="en-US" sz="1800" dirty="0"/>
@@ -2819,7 +7250,7 @@
                 <a:ea typeface="Georgia" pitchFamily="34" charset="-122"/>
                 <a:cs typeface="Georgia" pitchFamily="34" charset="-120"/>
               </a:rPr>
-              <a:t>Materials</a:t>
+              <a:t>Learning objective</a:t>
             </a:r>
             <a:endParaRPr lang="en-US" sz="1800" dirty="0"/>
           </a:p>
@@ -2834,7 +7265,7 @@
         <p:spPr>
           <a:xfrm>
             <a:off x="406301" y="870942"/>
-            <a:ext cx="8498026" cy="213271"/>
+            <a:ext cx="8498026" cy="426541"/>
           </a:xfrm>
           <a:prstGeom prst="rect">
             <a:avLst/>
@@ -2867,7 +7298,99 @@
                 <a:ea typeface="Arial" pitchFamily="34" charset="-122"/>
                 <a:cs typeface="Arial" pitchFamily="34" charset="-120"/>
               </a:rPr>
-              <a:t>– Whiteboard. – Drill sheet (8 mixed-sign problems).</a:t>
+              <a:t>By the end of this lesson, students will solve any 2-digit × 2-digit multiplication where one factor is </a:t>
+            </a:r>
+            <a:pPr algn="l" indent="0" marL="0">
+              <a:lnSpc>
+                <a:spcPts val="1680"/>
+              </a:lnSpc>
+              <a:spcBef>
+                <a:spcPts val="300"/>
+              </a:spcBef>
+              <a:spcAft>
+                <a:spcPts val="300"/>
+              </a:spcAft>
+              <a:buNone/>
+            </a:pPr>
+            <a:r>
+              <a:rPr lang="en-US" sz="1200" i="1" dirty="0">
+                <a:solidFill>
+                  <a:srgbClr val="1C2833"/>
+                </a:solidFill>
+                <a:latin typeface="Arial" pitchFamily="34" charset="0"/>
+                <a:ea typeface="Arial" pitchFamily="34" charset="-122"/>
+                <a:cs typeface="Arial" pitchFamily="34" charset="-120"/>
+              </a:rPr>
+              <a:t>above</a:t>
+            </a:r>
+            <a:pPr algn="l" indent="0" marL="0">
+              <a:lnSpc>
+                <a:spcPts val="1680"/>
+              </a:lnSpc>
+              <a:spcBef>
+                <a:spcPts val="300"/>
+              </a:spcBef>
+              <a:spcAft>
+                <a:spcPts val="300"/>
+              </a:spcAft>
+              <a:buNone/>
+            </a:pPr>
+            <a:r>
+              <a:rPr lang="en-US" sz="1200" dirty="0">
+                <a:solidFill>
+                  <a:srgbClr val="1C2833"/>
+                </a:solidFill>
+                <a:latin typeface="Arial" pitchFamily="34" charset="0"/>
+                <a:ea typeface="Arial" pitchFamily="34" charset="-122"/>
+                <a:cs typeface="Arial" pitchFamily="34" charset="-120"/>
+              </a:rPr>
+              <a:t> 100 and one is </a:t>
+            </a:r>
+            <a:pPr algn="l" indent="0" marL="0">
+              <a:lnSpc>
+                <a:spcPts val="1680"/>
+              </a:lnSpc>
+              <a:spcBef>
+                <a:spcPts val="300"/>
+              </a:spcBef>
+              <a:spcAft>
+                <a:spcPts val="300"/>
+              </a:spcAft>
+              <a:buNone/>
+            </a:pPr>
+            <a:r>
+              <a:rPr lang="en-US" sz="1200" i="1" dirty="0">
+                <a:solidFill>
+                  <a:srgbClr val="1C2833"/>
+                </a:solidFill>
+                <a:latin typeface="Arial" pitchFamily="34" charset="0"/>
+                <a:ea typeface="Arial" pitchFamily="34" charset="-122"/>
+                <a:cs typeface="Arial" pitchFamily="34" charset="-120"/>
+              </a:rPr>
+              <a:t>below</a:t>
+            </a:r>
+            <a:pPr algn="l" indent="0" marL="0">
+              <a:lnSpc>
+                <a:spcPts val="1680"/>
+              </a:lnSpc>
+              <a:spcBef>
+                <a:spcPts val="300"/>
+              </a:spcBef>
+              <a:spcAft>
+                <a:spcPts val="300"/>
+              </a:spcAft>
+              <a:buNone/>
+            </a:pPr>
+            <a:r>
+              <a:rPr lang="en-US" sz="1200" dirty="0">
+                <a:solidFill>
+                  <a:srgbClr val="1C2833"/>
+                </a:solidFill>
+                <a:latin typeface="Arial" pitchFamily="34" charset="0"/>
+                <a:ea typeface="Arial" pitchFamily="34" charset="-122"/>
+                <a:cs typeface="Arial" pitchFamily="34" charset="-120"/>
+              </a:rPr>
+              <a:t>, handling the negative right-part correctly.</a:t>
             </a:r>
             <a:endParaRPr lang="en-US" sz="1200" dirty="0"/>
           </a:p>
@@ -2876,72 +7399,6 @@
       <p:sp>
         <p:nvSpPr>
           <p:cNvPr id="5" name="Text 3"/>
-          <p:cNvSpPr/>
-          <p:nvPr/>
-        </p:nvSpPr>
-        <p:spPr>
-          <a:xfrm>
-            <a:off x="634901" y="1173063"/>
-            <a:ext cx="8102798" cy="300930"/>
-          </a:xfrm>
-          <a:prstGeom prst="rect">
-            <a:avLst/>
-          </a:prstGeom>
-          <a:noFill/>
-          <a:ln/>
-        </p:spPr>
-        <p:txBody>
-          <a:bodyPr wrap="square" lIns="0" tIns="0" rIns="0" bIns="0" rtlCol="0" anchor="t"/>
-          <a:lstStyle/>
-          <a:p>
-            <a:pPr algn="l" marL="342900" indent="-342900">
-              <a:lnSpc>
-                <a:spcPts val="1620"/>
-              </a:lnSpc>
-              <a:spcAft>
-                <a:spcPts val="300"/>
-              </a:spcAft>
-              <a:buSzPct val="100000"/>
-              <a:buChar char="•"/>
-            </a:pPr>
-            <a:r>
-              <a:rPr lang="en-US" sz="1200" dirty="0">
-                <a:solidFill>
-                  <a:srgbClr val="1C2833"/>
-                </a:solidFill>
-                <a:latin typeface="Arial" pitchFamily="34" charset="0"/>
-                <a:ea typeface="Arial" pitchFamily="34" charset="-122"/>
-                <a:cs typeface="Arial" pitchFamily="34" charset="-120"/>
-              </a:rPr>
-              <a:t>activities/activity-01-mixed-signs.md</a:t>
-            </a:r>
-            <a:pPr algn="l" indent="0" marL="0">
-              <a:lnSpc>
-                <a:spcPts val="1620"/>
-              </a:lnSpc>
-              <a:spcAft>
-                <a:spcPts val="300"/>
-              </a:spcAft>
-              <a:buNone/>
-            </a:pPr>
-            <a:r>
-              <a:rPr lang="en-US" sz="1200" dirty="0">
-                <a:solidFill>
-                  <a:srgbClr val="1C2833"/>
-                </a:solidFill>
-                <a:latin typeface="Arial" pitchFamily="34" charset="0"/>
-                <a:ea typeface="Arial" pitchFamily="34" charset="-122"/>
-                <a:cs typeface="Arial" pitchFamily="34" charset="-120"/>
-              </a:rPr>
-              <a:t> worksheet.</a:t>
-            </a:r>
-            <a:endParaRPr lang="en-US" sz="1200" dirty="0"/>
-          </a:p>
-        </p:txBody>
-      </p:sp>
-      <p:sp>
-        <p:nvSpPr>
-          <p:cNvPr id="6" name="Text 4"/>
           <p:cNvSpPr/>
           <p:nvPr/>
         </p:nvSpPr>
@@ -3091,7 +7548,7 @@
                 <a:ea typeface="Georgia" pitchFamily="34" charset="-122"/>
                 <a:cs typeface="Georgia" pitchFamily="34" charset="-120"/>
               </a:rPr>
-              <a:t>Lesson flow</a:t>
+              <a:t>Materials</a:t>
             </a:r>
             <a:endParaRPr lang="en-US" sz="1800" dirty="0"/>
           </a:p>
@@ -3100,6 +7557,120 @@
       <p:sp>
         <p:nvSpPr>
           <p:cNvPr id="4" name="Text 2"/>
+          <p:cNvSpPr/>
+          <p:nvPr/>
+        </p:nvSpPr>
+        <p:spPr>
+          <a:xfrm>
+            <a:off x="634901" y="883593"/>
+            <a:ext cx="8102798" cy="788491"/>
+          </a:xfrm>
+          <a:prstGeom prst="rect">
+            <a:avLst/>
+          </a:prstGeom>
+          <a:noFill/>
+          <a:ln/>
+        </p:spPr>
+        <p:txBody>
+          <a:bodyPr wrap="square" lIns="0" tIns="0" rIns="0" bIns="0" rtlCol="0" anchor="t"/>
+          <a:lstStyle/>
+          <a:p>
+            <a:pPr algn="l" marL="342900" indent="-342900">
+              <a:lnSpc>
+                <a:spcPts val="1620"/>
+              </a:lnSpc>
+              <a:spcAft>
+                <a:spcPts val="300"/>
+              </a:spcAft>
+              <a:buSzPct val="100000"/>
+              <a:buChar char="•"/>
+            </a:pPr>
+            <a:r>
+              <a:rPr lang="en-US" sz="1200" dirty="0">
+                <a:solidFill>
+                  <a:srgbClr val="1C2833"/>
+                </a:solidFill>
+                <a:latin typeface="Arial" pitchFamily="34" charset="0"/>
+                <a:ea typeface="Arial" pitchFamily="34" charset="-122"/>
+                <a:cs typeface="Arial" pitchFamily="34" charset="-120"/>
+              </a:rPr>
+              <a:t>Whiteboard.</a:t>
+            </a:r>
+            <a:endParaRPr lang="en-US" sz="1200" dirty="0"/>
+          </a:p>
+          <a:p>
+            <a:pPr algn="l" marL="342900" indent="-342900">
+              <a:lnSpc>
+                <a:spcPts val="1620"/>
+              </a:lnSpc>
+              <a:spcAft>
+                <a:spcPts val="300"/>
+              </a:spcAft>
+              <a:buSzPct val="100000"/>
+              <a:buChar char="•"/>
+            </a:pPr>
+            <a:r>
+              <a:rPr lang="en-US" sz="1200" dirty="0">
+                <a:solidFill>
+                  <a:srgbClr val="1C2833"/>
+                </a:solidFill>
+                <a:latin typeface="Arial" pitchFamily="34" charset="0"/>
+                <a:ea typeface="Arial" pitchFamily="34" charset="-122"/>
+                <a:cs typeface="Arial" pitchFamily="34" charset="-120"/>
+              </a:rPr>
+              <a:t>Drill sheet (8 mixed-sign problems).</a:t>
+            </a:r>
+            <a:endParaRPr lang="en-US" sz="1200" dirty="0"/>
+          </a:p>
+          <a:p>
+            <a:pPr algn="l" marL="342900" indent="-342900">
+              <a:lnSpc>
+                <a:spcPts val="1620"/>
+              </a:lnSpc>
+              <a:spcAft>
+                <a:spcPts val="300"/>
+              </a:spcAft>
+              <a:buSzPct val="100000"/>
+              <a:buChar char="•"/>
+            </a:pPr>
+            <a:r>
+              <a:rPr lang="en-US" sz="1200" dirty="0">
+                <a:solidFill>
+                  <a:srgbClr val="1C2833"/>
+                </a:solidFill>
+                <a:latin typeface="Arial" pitchFamily="34" charset="0"/>
+                <a:ea typeface="Arial" pitchFamily="34" charset="-122"/>
+                <a:cs typeface="Arial" pitchFamily="34" charset="-120"/>
+              </a:rPr>
+              <a:t>activities/activity-01-mixed-signs.md</a:t>
+            </a:r>
+            <a:pPr algn="l" indent="0" marL="0">
+              <a:lnSpc>
+                <a:spcPts val="1620"/>
+              </a:lnSpc>
+              <a:spcAft>
+                <a:spcPts val="300"/>
+              </a:spcAft>
+              <a:buNone/>
+            </a:pPr>
+            <a:r>
+              <a:rPr lang="en-US" sz="1200" dirty="0">
+                <a:solidFill>
+                  <a:srgbClr val="1C2833"/>
+                </a:solidFill>
+                <a:latin typeface="Arial" pitchFamily="34" charset="0"/>
+                <a:ea typeface="Arial" pitchFamily="34" charset="-122"/>
+                <a:cs typeface="Arial" pitchFamily="34" charset="-120"/>
+              </a:rPr>
+              <a:t> worksheet.</a:t>
+            </a:r>
+            <a:endParaRPr lang="en-US" sz="1200" dirty="0"/>
+          </a:p>
+        </p:txBody>
+      </p:sp>
+      <p:sp>
+        <p:nvSpPr>
+          <p:cNvPr id="5" name="Text 3"/>
           <p:cNvSpPr/>
           <p:nvPr/>
         </p:nvSpPr>
@@ -3249,7 +7820,7 @@
                 <a:ea typeface="Georgia" pitchFamily="34" charset="-122"/>
                 <a:cs typeface="Georgia" pitchFamily="34" charset="-120"/>
               </a:rPr>
-              <a:t>Warm-up (5 min)</a:t>
+              <a:t>Lesson flow</a:t>
             </a:r>
             <a:endParaRPr lang="en-US" sz="1800" dirty="0"/>
           </a:p>
@@ -3258,54 +7829,6 @@
       <p:sp>
         <p:nvSpPr>
           <p:cNvPr id="4" name="Text 2"/>
-          <p:cNvSpPr/>
-          <p:nvPr/>
-        </p:nvSpPr>
-        <p:spPr>
-          <a:xfrm>
-            <a:off x="406301" y="870942"/>
-            <a:ext cx="8498026" cy="426541"/>
-          </a:xfrm>
-          <a:prstGeom prst="rect">
-            <a:avLst/>
-          </a:prstGeom>
-          <a:noFill/>
-          <a:ln/>
-        </p:spPr>
-        <p:txBody>
-          <a:bodyPr wrap="square" lIns="0" tIns="0" rIns="0" bIns="0" rtlCol="0" anchor="t"/>
-          <a:lstStyle/>
-          <a:p>
-            <a:pPr algn="l" indent="0" marL="0">
-              <a:lnSpc>
-                <a:spcPts val="1680"/>
-              </a:lnSpc>
-              <a:spcBef>
-                <a:spcPts val="300"/>
-              </a:spcBef>
-              <a:spcAft>
-                <a:spcPts val="300"/>
-              </a:spcAft>
-              <a:buNone/>
-            </a:pPr>
-            <a:r>
-              <a:rPr lang="en-US" sz="1200" dirty="0">
-                <a:solidFill>
-                  <a:srgbClr val="1C2833"/>
-                </a:solidFill>
-                <a:latin typeface="Arial" pitchFamily="34" charset="0"/>
-                <a:ea typeface="Arial" pitchFamily="34" charset="-122"/>
-                <a:cs typeface="Arial" pitchFamily="34" charset="-120"/>
-              </a:rPr>
-              <a:t>– Complement-to-100 round. – Excess-from-100 round. – Now mix: teacher says "97," class says "−3." Teacher says "103," class says "+3." This trains the sign attention.</a:t>
-            </a:r>
-            <a:endParaRPr lang="en-US" sz="1200" dirty="0"/>
-          </a:p>
-        </p:txBody>
-      </p:sp>
-      <p:sp>
-        <p:nvSpPr>
-          <p:cNvPr id="5" name="Text 3"/>
           <p:cNvSpPr/>
           <p:nvPr/>
         </p:nvSpPr>
@@ -3422,7 +7945,7 @@
         <p:spPr>
           <a:xfrm>
             <a:off x="406301" y="457051"/>
-            <a:ext cx="8498026" cy="293340"/>
+            <a:ext cx="8498026" cy="274290"/>
           </a:xfrm>
           <a:prstGeom prst="rect">
             <a:avLst/>
@@ -3447,7 +7970,7 @@
               <a:buNone/>
             </a:pPr>
             <a:r>
-              <a:rPr lang="en-US" sz="1800" dirty="0">
+              <a:rPr lang="en-US" sz="1800" b="1" dirty="0">
                 <a:solidFill>
                   <a:srgbClr val="FE4447"/>
                 </a:solidFill>
@@ -3455,30 +7978,7 @@
                 <a:ea typeface="Georgia" pitchFamily="34" charset="-122"/>
                 <a:cs typeface="Georgia" pitchFamily="34" charset="-120"/>
               </a:rPr>
-              <a:t>Activity (20 min) — </a:t>
-            </a:r>
-            <a:pPr algn="l" indent="0" marL="0">
-              <a:lnSpc>
-                <a:spcPts val="2160"/>
-              </a:lnSpc>
-              <a:spcBef>
-                <a:spcPts val="600"/>
-              </a:spcBef>
-              <a:spcAft>
-                <a:spcPts val="800"/>
-              </a:spcAft>
-              <a:buNone/>
-            </a:pPr>
-            <a:r>
-              <a:rPr lang="en-US" sz="1800" b="1" dirty="0">
-                <a:solidFill>
-                  <a:srgbClr val="FE4447"/>
-                </a:solidFill>
-                <a:latin typeface="Georgia" pitchFamily="34" charset="0"/>
-                <a:ea typeface="Georgia" pitchFamily="34" charset="-122"/>
-                <a:cs typeface="Georgia" pitchFamily="34" charset="-120"/>
-              </a:rPr>
-              <a:t>activities/activity-01-mixed-signs.md</a:t>
+              <a:t>Warm-up (5 min)</a:t>
             </a:r>
             <a:endParaRPr lang="en-US" sz="1800" dirty="0"/>
           </a:p>
@@ -3492,8 +7992,8 @@
         </p:nvSpPr>
         <p:spPr>
           <a:xfrm>
-            <a:off x="406301" y="889992"/>
-            <a:ext cx="8498026" cy="426541"/>
+            <a:off x="634901" y="883593"/>
+            <a:ext cx="8102798" cy="769441"/>
           </a:xfrm>
           <a:prstGeom prst="rect">
             <a:avLst/>
@@ -3505,17 +8005,15 @@
           <a:bodyPr wrap="square" lIns="0" tIns="0" rIns="0" bIns="0" rtlCol="0" anchor="t"/>
           <a:lstStyle/>
           <a:p>
-            <a:pPr algn="l" indent="0" marL="0">
-              <a:lnSpc>
-                <a:spcPts val="1680"/>
-              </a:lnSpc>
-              <a:spcBef>
-                <a:spcPts val="300"/>
-              </a:spcBef>
-              <a:spcAft>
-                <a:spcPts val="300"/>
-              </a:spcAft>
-              <a:buNone/>
+            <a:pPr algn="l" marL="342900" indent="-342900">
+              <a:lnSpc>
+                <a:spcPts val="1620"/>
+              </a:lnSpc>
+              <a:spcAft>
+                <a:spcPts val="300"/>
+              </a:spcAft>
+              <a:buSzPct val="100000"/>
+              <a:buChar char="•"/>
             </a:pPr>
             <a:r>
               <a:rPr lang="en-US" sz="1200" dirty="0">
@@ -3526,7 +8024,55 @@
                 <a:ea typeface="Arial" pitchFamily="34" charset="-122"/>
                 <a:cs typeface="Arial" pitchFamily="34" charset="-120"/>
               </a:rPr>
-              <a:t>Brief: – 8 problems on the activity sheet, all mixed-sign. – 8 min individual silent. – 7 min paired check. – 5 min: students re-do any they got wrong, OR move to challenge problems if all correct.</a:t>
+              <a:t>Complement-to-100 round.</a:t>
+            </a:r>
+            <a:endParaRPr lang="en-US" sz="1200" dirty="0"/>
+          </a:p>
+          <a:p>
+            <a:pPr algn="l" marL="342900" indent="-342900">
+              <a:lnSpc>
+                <a:spcPts val="1620"/>
+              </a:lnSpc>
+              <a:spcAft>
+                <a:spcPts val="300"/>
+              </a:spcAft>
+              <a:buSzPct val="100000"/>
+              <a:buChar char="•"/>
+            </a:pPr>
+            <a:r>
+              <a:rPr lang="en-US" sz="1200" dirty="0">
+                <a:solidFill>
+                  <a:srgbClr val="1C2833"/>
+                </a:solidFill>
+                <a:latin typeface="Arial" pitchFamily="34" charset="0"/>
+                <a:ea typeface="Arial" pitchFamily="34" charset="-122"/>
+                <a:cs typeface="Arial" pitchFamily="34" charset="-120"/>
+              </a:rPr>
+              <a:t>Excess-from-100 round.</a:t>
+            </a:r>
+            <a:endParaRPr lang="en-US" sz="1200" dirty="0"/>
+          </a:p>
+          <a:p>
+            <a:pPr algn="l" marL="342900" indent="-342900">
+              <a:lnSpc>
+                <a:spcPts val="1620"/>
+              </a:lnSpc>
+              <a:spcAft>
+                <a:spcPts val="300"/>
+              </a:spcAft>
+              <a:buSzPct val="100000"/>
+              <a:buChar char="•"/>
+            </a:pPr>
+            <a:r>
+              <a:rPr lang="en-US" sz="1200" dirty="0">
+                <a:solidFill>
+                  <a:srgbClr val="1C2833"/>
+                </a:solidFill>
+                <a:latin typeface="Arial" pitchFamily="34" charset="0"/>
+                <a:ea typeface="Arial" pitchFamily="34" charset="-122"/>
+                <a:cs typeface="Arial" pitchFamily="34" charset="-120"/>
+              </a:rPr>
+              <a:t>Now mix: teacher says "97," class says "−3." Teacher says "103," class says "+3." This trains the sign attention.</a:t>
             </a:r>
             <a:endParaRPr lang="en-US" sz="1200" dirty="0"/>
           </a:p>
@@ -3684,7 +8230,7 @@
                 <a:ea typeface="Georgia" pitchFamily="34" charset="-122"/>
                 <a:cs typeface="Georgia" pitchFamily="34" charset="-120"/>
               </a:rPr>
-              <a:t>Wrap-up (5 min)</a:t>
+              <a:t>Core (15 min) — One above, one below</a:t>
             </a:r>
             <a:endParaRPr lang="en-US" sz="1800" dirty="0"/>
           </a:p>
@@ -3698,8 +8244,8 @@
         </p:nvSpPr>
         <p:spPr>
           <a:xfrm>
-            <a:off x="406301" y="870942"/>
-            <a:ext cx="8498026" cy="436066"/>
+            <a:off x="634901" y="883593"/>
+            <a:ext cx="8102798" cy="300930"/>
           </a:xfrm>
           <a:prstGeom prst="rect">
             <a:avLst/>
@@ -3711,13 +8257,71 @@
           <a:bodyPr wrap="square" lIns="0" tIns="0" rIns="0" bIns="0" rtlCol="0" anchor="t"/>
           <a:lstStyle/>
           <a:p>
-            <a:pPr algn="l" indent="0" marL="0">
-              <a:lnSpc>
-                <a:spcPts val="1680"/>
-              </a:lnSpc>
-              <a:spcBef>
-                <a:spcPts val="300"/>
-              </a:spcBef>
+            <a:pPr algn="l" marL="342900" indent="-342900">
+              <a:lnSpc>
+                <a:spcPts val="1620"/>
+              </a:lnSpc>
+              <a:spcAft>
+                <a:spcPts val="300"/>
+              </a:spcAft>
+              <a:buSzPct val="100000"/>
+              <a:buChar char="•"/>
+            </a:pPr>
+            <a:r>
+              <a:rPr lang="en-US" sz="1200" b="1" dirty="0">
+                <a:solidFill>
+                  <a:srgbClr val="1C2833"/>
+                </a:solidFill>
+                <a:latin typeface="Arial" pitchFamily="34" charset="0"/>
+                <a:ea typeface="Arial" pitchFamily="34" charset="-122"/>
+                <a:cs typeface="Arial" pitchFamily="34" charset="-120"/>
+              </a:rPr>
+              <a:t>Set up </a:t>
+            </a:r>
+            <a:pPr algn="l" indent="0" marL="0">
+              <a:lnSpc>
+                <a:spcPts val="1620"/>
+              </a:lnSpc>
+              <a:spcAft>
+                <a:spcPts val="300"/>
+              </a:spcAft>
+              <a:buNone/>
+            </a:pPr>
+            <a:r>
+              <a:rPr lang="en-US" sz="1200" b="1" dirty="0">
+                <a:solidFill>
+                  <a:srgbClr val="1C2833"/>
+                </a:solidFill>
+                <a:latin typeface="Arial" pitchFamily="34" charset="0"/>
+                <a:ea typeface="Arial" pitchFamily="34" charset="-122"/>
+                <a:cs typeface="Arial" pitchFamily="34" charset="-120"/>
+              </a:rPr>
+              <a:t>102 × 98</a:t>
+            </a:r>
+            <a:pPr algn="l" indent="0" marL="0">
+              <a:lnSpc>
+                <a:spcPts val="1620"/>
+              </a:lnSpc>
+              <a:spcAft>
+                <a:spcPts val="300"/>
+              </a:spcAft>
+              <a:buNone/>
+            </a:pPr>
+            <a:r>
+              <a:rPr lang="en-US" sz="1200" b="1" dirty="0">
+                <a:solidFill>
+                  <a:srgbClr val="1C2833"/>
+                </a:solidFill>
+                <a:latin typeface="Arial" pitchFamily="34" charset="0"/>
+                <a:ea typeface="Arial" pitchFamily="34" charset="-122"/>
+                <a:cs typeface="Arial" pitchFamily="34" charset="-120"/>
+              </a:rPr>
+              <a:t>.</a:t>
+            </a:r>
+            <a:pPr algn="l" indent="0" marL="0">
+              <a:lnSpc>
+                <a:spcPts val="1620"/>
+              </a:lnSpc>
               <a:spcAft>
                 <a:spcPts val="300"/>
               </a:spcAft>
@@ -3732,168 +8336,7 @@
                 <a:ea typeface="Arial" pitchFamily="34" charset="-122"/>
                 <a:cs typeface="Arial" pitchFamily="34" charset="-120"/>
               </a:rPr>
-              <a:t>– Quick chorus check: </a:t>
-            </a:r>
-            <a:pPr algn="l" indent="0" marL="0">
-              <a:lnSpc>
-                <a:spcPts val="1680"/>
-              </a:lnSpc>
-              <a:spcBef>
-                <a:spcPts val="300"/>
-              </a:spcBef>
-              <a:spcAft>
-                <a:spcPts val="300"/>
-              </a:spcAft>
-              <a:buNone/>
-            </a:pPr>
-            <a:r>
-              <a:rPr lang="en-US" sz="1200" dirty="0">
-                <a:solidFill>
-                  <a:srgbClr val="1C2833"/>
-                </a:solidFill>
-                <a:latin typeface="Arial" pitchFamily="34" charset="0"/>
-                <a:ea typeface="Arial" pitchFamily="34" charset="-122"/>
-                <a:cs typeface="Arial" pitchFamily="34" charset="-120"/>
-              </a:rPr>
-              <a:t>102 × 98</a:t>
-            </a:r>
-            <a:pPr algn="l" indent="0" marL="0">
-              <a:lnSpc>
-                <a:spcPts val="1680"/>
-              </a:lnSpc>
-              <a:spcBef>
-                <a:spcPts val="300"/>
-              </a:spcBef>
-              <a:spcAft>
-                <a:spcPts val="300"/>
-              </a:spcAft>
-              <a:buNone/>
-            </a:pPr>
-            <a:r>
-              <a:rPr lang="en-US" sz="1200" dirty="0">
-                <a:solidFill>
-                  <a:srgbClr val="1C2833"/>
-                </a:solidFill>
-                <a:latin typeface="Arial" pitchFamily="34" charset="0"/>
-                <a:ea typeface="Arial" pitchFamily="34" charset="-122"/>
-                <a:cs typeface="Arial" pitchFamily="34" charset="-120"/>
-              </a:rPr>
-              <a:t>? (9996.) </a:t>
-            </a:r>
-            <a:pPr algn="l" indent="0" marL="0">
-              <a:lnSpc>
-                <a:spcPts val="1680"/>
-              </a:lnSpc>
-              <a:spcBef>
-                <a:spcPts val="300"/>
-              </a:spcBef>
-              <a:spcAft>
-                <a:spcPts val="300"/>
-              </a:spcAft>
-              <a:buNone/>
-            </a:pPr>
-            <a:r>
-              <a:rPr lang="en-US" sz="1200" dirty="0">
-                <a:solidFill>
-                  <a:srgbClr val="1C2833"/>
-                </a:solidFill>
-                <a:latin typeface="Arial" pitchFamily="34" charset="0"/>
-                <a:ea typeface="Arial" pitchFamily="34" charset="-122"/>
-                <a:cs typeface="Arial" pitchFamily="34" charset="-120"/>
-              </a:rPr>
-              <a:t>104 × 96</a:t>
-            </a:r>
-            <a:pPr algn="l" indent="0" marL="0">
-              <a:lnSpc>
-                <a:spcPts val="1680"/>
-              </a:lnSpc>
-              <a:spcBef>
-                <a:spcPts val="300"/>
-              </a:spcBef>
-              <a:spcAft>
-                <a:spcPts val="300"/>
-              </a:spcAft>
-              <a:buNone/>
-            </a:pPr>
-            <a:r>
-              <a:rPr lang="en-US" sz="1200" dirty="0">
-                <a:solidFill>
-                  <a:srgbClr val="1C2833"/>
-                </a:solidFill>
-                <a:latin typeface="Arial" pitchFamily="34" charset="0"/>
-                <a:ea typeface="Arial" pitchFamily="34" charset="-122"/>
-                <a:cs typeface="Arial" pitchFamily="34" charset="-120"/>
-              </a:rPr>
-              <a:t>? (9984.) </a:t>
-            </a:r>
-            <a:pPr algn="l" indent="0" marL="0">
-              <a:lnSpc>
-                <a:spcPts val="1680"/>
-              </a:lnSpc>
-              <a:spcBef>
-                <a:spcPts val="300"/>
-              </a:spcBef>
-              <a:spcAft>
-                <a:spcPts val="300"/>
-              </a:spcAft>
-              <a:buNone/>
-            </a:pPr>
-            <a:r>
-              <a:rPr lang="en-US" sz="1200" dirty="0">
-                <a:solidFill>
-                  <a:srgbClr val="1C2833"/>
-                </a:solidFill>
-                <a:latin typeface="Arial" pitchFamily="34" charset="0"/>
-                <a:ea typeface="Arial" pitchFamily="34" charset="-122"/>
-                <a:cs typeface="Arial" pitchFamily="34" charset="-120"/>
-              </a:rPr>
-              <a:t>108 × 95</a:t>
-            </a:r>
-            <a:pPr algn="l" indent="0" marL="0">
-              <a:lnSpc>
-                <a:spcPts val="1680"/>
-              </a:lnSpc>
-              <a:spcBef>
-                <a:spcPts val="300"/>
-              </a:spcBef>
-              <a:spcAft>
-                <a:spcPts val="300"/>
-              </a:spcAft>
-              <a:buNone/>
-            </a:pPr>
-            <a:r>
-              <a:rPr lang="en-US" sz="1200" dirty="0">
-                <a:solidFill>
-                  <a:srgbClr val="1C2833"/>
-                </a:solidFill>
-                <a:latin typeface="Arial" pitchFamily="34" charset="0"/>
-                <a:ea typeface="Arial" pitchFamily="34" charset="-122"/>
-                <a:cs typeface="Arial" pitchFamily="34" charset="-120"/>
-              </a:rPr>
-              <a:t>? (10260.) – Preview Day 6: </a:t>
-            </a:r>
-            <a:pPr algn="l" indent="0" marL="0">
-              <a:lnSpc>
-                <a:spcPts val="1680"/>
-              </a:lnSpc>
-              <a:spcBef>
-                <a:spcPts val="300"/>
-              </a:spcBef>
-              <a:spcAft>
-                <a:spcPts val="300"/>
-              </a:spcAft>
-              <a:buNone/>
-            </a:pPr>
-            <a:r>
-              <a:rPr lang="en-US" sz="1200" i="1" dirty="0">
-                <a:solidFill>
-                  <a:srgbClr val="1C2833"/>
-                </a:solidFill>
-                <a:latin typeface="Arial" pitchFamily="34" charset="0"/>
-                <a:ea typeface="Arial" pitchFamily="34" charset="-122"/>
-                <a:cs typeface="Arial" pitchFamily="34" charset="-120"/>
-              </a:rPr>
-              <a:t>"Tomorrow — base 1000. The pad becomes 3 digits."</a:t>
+              <a:t> Write on board:</a:t>
             </a:r>
             <a:endParaRPr lang="en-US" sz="1200" dirty="0"/>
           </a:p>
@@ -3902,6 +8345,227 @@
       <p:sp>
         <p:nvSpPr>
           <p:cNvPr id="5" name="Text 3"/>
+          <p:cNvSpPr/>
+          <p:nvPr/>
+        </p:nvSpPr>
+        <p:spPr>
+          <a:xfrm>
+            <a:off x="406301" y="1286024"/>
+            <a:ext cx="8331398" cy="952202"/>
+          </a:xfrm>
+          <a:prstGeom prst="rect">
+            <a:avLst/>
+          </a:prstGeom>
+          <a:solidFill>
+            <a:srgbClr val="F4F8F9"/>
+          </a:solidFill>
+          <a:ln/>
+        </p:spPr>
+        <p:txBody>
+          <a:bodyPr wrap="square" rtlCol="0" anchor="ctr"/>
+          <a:lstStyle/>
+          <a:p>
+            <a:pPr indent="0" marL="0">
+              <a:buNone/>
+            </a:pPr>
+            <a:endParaRPr lang="en-US" dirty="0"/>
+          </a:p>
+        </p:txBody>
+      </p:sp>
+      <p:sp>
+        <p:nvSpPr>
+          <p:cNvPr id="6" name="Shape 4"/>
+          <p:cNvSpPr/>
+          <p:nvPr/>
+        </p:nvSpPr>
+        <p:spPr>
+          <a:xfrm>
+            <a:off x="430113" y="1286024"/>
+            <a:ext cx="0" cy="952202"/>
+          </a:xfrm>
+          <a:prstGeom prst="line">
+            <a:avLst/>
+          </a:prstGeom>
+          <a:noFill/>
+          <a:ln w="47625">
+            <a:solidFill>
+              <a:srgbClr val="277884"/>
+            </a:solidFill>
+            <a:prstDash val="solid"/>
+          </a:ln>
+        </p:spPr>
+      </p:sp>
+      <p:sp>
+        <p:nvSpPr>
+          <p:cNvPr id="7" name="Text 5"/>
+          <p:cNvSpPr/>
+          <p:nvPr/>
+        </p:nvSpPr>
+        <p:spPr>
+          <a:xfrm>
+            <a:off x="631627" y="1412974"/>
+            <a:ext cx="8086939" cy="174575"/>
+          </a:xfrm>
+          <a:prstGeom prst="rect">
+            <a:avLst/>
+          </a:prstGeom>
+          <a:noFill/>
+          <a:ln/>
+        </p:spPr>
+        <p:txBody>
+          <a:bodyPr wrap="square" lIns="0" tIns="0" rIns="0" bIns="0" rtlCol="0" anchor="t"/>
+          <a:lstStyle/>
+          <a:p>
+            <a:pPr algn="l" indent="0" marL="0">
+              <a:lnSpc>
+                <a:spcPts val="1375"/>
+              </a:lnSpc>
+              <a:buNone/>
+            </a:pPr>
+            <a:r>
+              <a:rPr lang="en-US" sz="1100" dirty="0">
+                <a:solidFill>
+                  <a:srgbClr val="1C2833"/>
+                </a:solidFill>
+                <a:latin typeface="Courier New" pitchFamily="34" charset="0"/>
+                <a:ea typeface="Courier New" pitchFamily="34" charset="-122"/>
+                <a:cs typeface="Courier New" pitchFamily="34" charset="-120"/>
+              </a:rPr>
+              <a:t>102 │ +2       ← excess</a:t>
+            </a:r>
+            <a:endParaRPr lang="en-US" sz="1100" dirty="0"/>
+          </a:p>
+        </p:txBody>
+      </p:sp>
+      <p:sp>
+        <p:nvSpPr>
+          <p:cNvPr id="8" name="Text 6"/>
+          <p:cNvSpPr/>
+          <p:nvPr/>
+        </p:nvSpPr>
+        <p:spPr>
+          <a:xfrm>
+            <a:off x="631627" y="1587550"/>
+            <a:ext cx="8086939" cy="174575"/>
+          </a:xfrm>
+          <a:prstGeom prst="rect">
+            <a:avLst/>
+          </a:prstGeom>
+          <a:noFill/>
+          <a:ln/>
+        </p:spPr>
+        <p:txBody>
+          <a:bodyPr wrap="square" lIns="0" tIns="0" rIns="0" bIns="0" rtlCol="0" anchor="t"/>
+          <a:lstStyle/>
+          <a:p>
+            <a:pPr algn="l" indent="0" marL="0">
+              <a:lnSpc>
+                <a:spcPts val="1375"/>
+              </a:lnSpc>
+              <a:buNone/>
+            </a:pPr>
+            <a:r>
+              <a:rPr lang="en-US" sz="1100" dirty="0">
+                <a:solidFill>
+                  <a:srgbClr val="1C2833"/>
+                </a:solidFill>
+                <a:latin typeface="Courier New" pitchFamily="34" charset="0"/>
+                <a:ea typeface="Courier New" pitchFamily="34" charset="-122"/>
+                <a:cs typeface="Courier New" pitchFamily="34" charset="-120"/>
+              </a:rPr>
+              <a:t>×  98 │ −2       ← deficit</a:t>
+            </a:r>
+            <a:endParaRPr lang="en-US" sz="1100" dirty="0"/>
+          </a:p>
+        </p:txBody>
+      </p:sp>
+      <p:sp>
+        <p:nvSpPr>
+          <p:cNvPr id="9" name="Text 7"/>
+          <p:cNvSpPr/>
+          <p:nvPr/>
+        </p:nvSpPr>
+        <p:spPr>
+          <a:xfrm>
+            <a:off x="631627" y="1762125"/>
+            <a:ext cx="8086939" cy="174575"/>
+          </a:xfrm>
+          <a:prstGeom prst="rect">
+            <a:avLst/>
+          </a:prstGeom>
+          <a:noFill/>
+          <a:ln/>
+        </p:spPr>
+        <p:txBody>
+          <a:bodyPr wrap="square" lIns="0" tIns="0" rIns="0" bIns="0" rtlCol="0" anchor="t"/>
+          <a:lstStyle/>
+          <a:p>
+            <a:pPr algn="l" indent="0" marL="0">
+              <a:lnSpc>
+                <a:spcPts val="1375"/>
+              </a:lnSpc>
+              <a:buNone/>
+            </a:pPr>
+            <a:r>
+              <a:rPr lang="en-US" sz="1100" dirty="0">
+                <a:solidFill>
+                  <a:srgbClr val="1C2833"/>
+                </a:solidFill>
+                <a:latin typeface="Courier New" pitchFamily="34" charset="0"/>
+                <a:ea typeface="Courier New" pitchFamily="34" charset="-122"/>
+                <a:cs typeface="Courier New" pitchFamily="34" charset="-120"/>
+              </a:rPr>
+              <a:t>─────┼──────</a:t>
+            </a:r>
+            <a:endParaRPr lang="en-US" sz="1100" dirty="0"/>
+          </a:p>
+        </p:txBody>
+      </p:sp>
+      <p:sp>
+        <p:nvSpPr>
+          <p:cNvPr id="10" name="Text 8"/>
+          <p:cNvSpPr/>
+          <p:nvPr/>
+        </p:nvSpPr>
+        <p:spPr>
+          <a:xfrm>
+            <a:off x="631627" y="1936700"/>
+            <a:ext cx="8086939" cy="174575"/>
+          </a:xfrm>
+          <a:prstGeom prst="rect">
+            <a:avLst/>
+          </a:prstGeom>
+          <a:noFill/>
+          <a:ln/>
+        </p:spPr>
+        <p:txBody>
+          <a:bodyPr wrap="square" lIns="0" tIns="0" rIns="0" bIns="0" rtlCol="0" anchor="t"/>
+          <a:lstStyle/>
+          <a:p>
+            <a:pPr algn="l" indent="0" marL="0">
+              <a:lnSpc>
+                <a:spcPts val="1375"/>
+              </a:lnSpc>
+              <a:buNone/>
+            </a:pPr>
+            <a:r>
+              <a:rPr lang="en-US" sz="1100" dirty="0">
+                <a:solidFill>
+                  <a:srgbClr val="1C2833"/>
+                </a:solidFill>
+                <a:latin typeface="Courier New" pitchFamily="34" charset="0"/>
+                <a:ea typeface="Courier New" pitchFamily="34" charset="-122"/>
+                <a:cs typeface="Courier New" pitchFamily="34" charset="-120"/>
+              </a:rPr>
+              <a:t>?   │  ?</a:t>
+            </a:r>
+            <a:endParaRPr lang="en-US" sz="1100" dirty="0"/>
+          </a:p>
+        </p:txBody>
+      </p:sp>
+      <p:sp>
+        <p:nvSpPr>
+          <p:cNvPr id="11" name="Text 9"/>
           <p:cNvSpPr/>
           <p:nvPr/>
         </p:nvSpPr>
@@ -4051,7 +8715,7 @@
                 <a:ea typeface="Georgia" pitchFamily="34" charset="-122"/>
                 <a:cs typeface="Georgia" pitchFamily="34" charset="-120"/>
               </a:rPr>
-              <a:t>Student-facing content</a:t>
+              <a:t>Core (15 min) — One above, one below (cont.)</a:t>
             </a:r>
             <a:endParaRPr lang="en-US" sz="1800" dirty="0"/>
           </a:p>
@@ -4065,50 +8729,153 @@
         </p:nvSpPr>
         <p:spPr>
           <a:xfrm>
-            <a:off x="406301" y="883593"/>
-            <a:ext cx="8331398" cy="2650331"/>
-          </a:xfrm>
-          <a:prstGeom prst="rect">
-            <a:avLst/>
-          </a:prstGeom>
-          <a:solidFill>
-            <a:srgbClr val="F4F8F9"/>
-          </a:solidFill>
+            <a:off x="634901" y="883593"/>
+            <a:ext cx="8102798" cy="281880"/>
+          </a:xfrm>
+          <a:prstGeom prst="rect">
+            <a:avLst/>
+          </a:prstGeom>
+          <a:noFill/>
           <a:ln/>
         </p:spPr>
         <p:txBody>
-          <a:bodyPr wrap="square" rtlCol="0" anchor="ctr"/>
-          <a:lstStyle/>
-          <a:p>
-            <a:pPr indent="0" marL="0">
-              <a:buNone/>
-            </a:pPr>
-            <a:endParaRPr lang="en-US" dirty="0"/>
-          </a:p>
-        </p:txBody>
-      </p:sp>
-      <p:sp>
-        <p:nvSpPr>
-          <p:cNvPr id="5" name="Shape 3"/>
+          <a:bodyPr wrap="square" lIns="0" tIns="0" rIns="0" bIns="0" rtlCol="0" anchor="t"/>
+          <a:lstStyle/>
+          <a:p>
+            <a:pPr algn="l" marL="342900" indent="-342900">
+              <a:lnSpc>
+                <a:spcPts val="1620"/>
+              </a:lnSpc>
+              <a:spcAft>
+                <a:spcPts val="300"/>
+              </a:spcAft>
+              <a:buSzPct val="100000"/>
+              <a:buChar char="•"/>
+            </a:pPr>
+            <a:r>
+              <a:rPr lang="en-US" sz="1200" b="1" dirty="0">
+                <a:solidFill>
+                  <a:srgbClr val="1C2833"/>
+                </a:solidFill>
+                <a:latin typeface="Arial" pitchFamily="34" charset="0"/>
+                <a:ea typeface="Arial" pitchFamily="34" charset="-122"/>
+                <a:cs typeface="Arial" pitchFamily="34" charset="-120"/>
+              </a:rPr>
+              <a:t>The left part — either cross still works:</a:t>
+            </a:r>
+            <a:endParaRPr lang="en-US" sz="1200" dirty="0"/>
+          </a:p>
+        </p:txBody>
+      </p:sp>
+      <p:sp>
+        <p:nvSpPr>
+          <p:cNvPr id="5" name="Text 3"/>
           <p:cNvSpPr/>
           <p:nvPr/>
         </p:nvSpPr>
         <p:spPr>
           <a:xfrm>
-            <a:off x="434876" y="883593"/>
-            <a:ext cx="0" cy="2650331"/>
-          </a:xfrm>
-          <a:prstGeom prst="line">
+            <a:off x="634901" y="1266974"/>
+            <a:ext cx="8102798" cy="563761"/>
+          </a:xfrm>
+          <a:prstGeom prst="rect">
             <a:avLst/>
           </a:prstGeom>
           <a:noFill/>
-          <a:ln w="57150">
-            <a:solidFill>
-              <a:srgbClr val="FE4447"/>
-            </a:solidFill>
-            <a:prstDash val="solid"/>
-          </a:ln>
-        </p:spPr>
+          <a:ln/>
+        </p:spPr>
+        <p:txBody>
+          <a:bodyPr wrap="square" lIns="0" tIns="0" rIns="0" bIns="0" rtlCol="0" anchor="t"/>
+          <a:lstStyle/>
+          <a:p>
+            <a:pPr algn="l" marL="342900" indent="-342900">
+              <a:lnSpc>
+                <a:spcPts val="1620"/>
+              </a:lnSpc>
+              <a:spcAft>
+                <a:spcPts val="300"/>
+              </a:spcAft>
+              <a:buSzPct val="100000"/>
+              <a:buChar char="•"/>
+            </a:pPr>
+            <a:r>
+              <a:rPr lang="en-US" sz="1200" dirty="0">
+                <a:solidFill>
+                  <a:srgbClr val="1C2833"/>
+                </a:solidFill>
+                <a:latin typeface="Arial" pitchFamily="34" charset="0"/>
+                <a:ea typeface="Arial" pitchFamily="34" charset="-122"/>
+                <a:cs typeface="Arial" pitchFamily="34" charset="-120"/>
+              </a:rPr>
+              <a:t>102 + (−2) = 102 − 2 = 100</a:t>
+            </a:r>
+            <a:pPr algn="l" indent="0" marL="0">
+              <a:lnSpc>
+                <a:spcPts val="1620"/>
+              </a:lnSpc>
+              <a:spcAft>
+                <a:spcPts val="300"/>
+              </a:spcAft>
+              <a:buNone/>
+            </a:pPr>
+            <a:r>
+              <a:rPr lang="en-US" sz="1200" dirty="0">
+                <a:solidFill>
+                  <a:srgbClr val="1C2833"/>
+                </a:solidFill>
+                <a:latin typeface="Arial" pitchFamily="34" charset="0"/>
+                <a:ea typeface="Arial" pitchFamily="34" charset="-122"/>
+                <a:cs typeface="Arial" pitchFamily="34" charset="-120"/>
+              </a:rPr>
+              <a:t>.</a:t>
+            </a:r>
+            <a:endParaRPr lang="en-US" sz="1200" dirty="0"/>
+          </a:p>
+          <a:p>
+            <a:pPr algn="l" marL="342900" indent="-342900">
+              <a:lnSpc>
+                <a:spcPts val="1620"/>
+              </a:lnSpc>
+              <a:spcAft>
+                <a:spcPts val="300"/>
+              </a:spcAft>
+              <a:buSzPct val="100000"/>
+              <a:buChar char="•"/>
+            </a:pPr>
+            <a:r>
+              <a:rPr lang="en-US" sz="1200" dirty="0">
+                <a:solidFill>
+                  <a:srgbClr val="1C2833"/>
+                </a:solidFill>
+                <a:latin typeface="Arial" pitchFamily="34" charset="0"/>
+                <a:ea typeface="Arial" pitchFamily="34" charset="-122"/>
+                <a:cs typeface="Arial" pitchFamily="34" charset="-120"/>
+              </a:rPr>
+              <a:t>98 + 2 = 100</a:t>
+            </a:r>
+            <a:pPr algn="l" indent="0" marL="0">
+              <a:lnSpc>
+                <a:spcPts val="1620"/>
+              </a:lnSpc>
+              <a:spcAft>
+                <a:spcPts val="300"/>
+              </a:spcAft>
+              <a:buNone/>
+            </a:pPr>
+            <a:r>
+              <a:rPr lang="en-US" sz="1200" dirty="0">
+                <a:solidFill>
+                  <a:srgbClr val="1C2833"/>
+                </a:solidFill>
+                <a:latin typeface="Arial" pitchFamily="34" charset="0"/>
+                <a:ea typeface="Arial" pitchFamily="34" charset="-122"/>
+                <a:cs typeface="Arial" pitchFamily="34" charset="-120"/>
+              </a:rPr>
+              <a:t>. (Same answer ✓.)</a:t>
+            </a:r>
+            <a:endParaRPr lang="en-US" sz="1200" dirty="0"/>
+          </a:p>
+        </p:txBody>
       </p:sp>
       <p:sp>
         <p:nvSpPr>
@@ -4118,8 +8885,8 @@
         </p:nvSpPr>
         <p:spPr>
           <a:xfrm>
-            <a:off x="692051" y="1074093"/>
-            <a:ext cx="7973389" cy="230981"/>
+            <a:off x="634901" y="1932236"/>
+            <a:ext cx="8102798" cy="281880"/>
           </a:xfrm>
           <a:prstGeom prst="rect">
             <a:avLst/>
@@ -4131,30 +8898,28 @@
           <a:bodyPr wrap="square" lIns="0" tIns="0" rIns="0" bIns="0" rtlCol="0" anchor="t"/>
           <a:lstStyle/>
           <a:p>
-            <a:pPr algn="l" indent="0" marL="0">
-              <a:lnSpc>
-                <a:spcPts val="1820"/>
-              </a:lnSpc>
-              <a:spcBef>
-                <a:spcPts val="300"/>
-              </a:spcBef>
-              <a:spcAft>
-                <a:spcPts val="300"/>
-              </a:spcAft>
-              <a:buNone/>
-            </a:pPr>
-            <a:r>
-              <a:rPr lang="en-US" sz="1300" b="1" i="1" dirty="0">
-                <a:solidFill>
-                  <a:srgbClr val="1C2833"/>
-                </a:solidFill>
-                <a:latin typeface="Georgia" pitchFamily="34" charset="0"/>
-                <a:ea typeface="Georgia" pitchFamily="34" charset="-122"/>
-                <a:cs typeface="Georgia" pitchFamily="34" charset="-120"/>
-              </a:rPr>
-              <a:t>Mixed case: one above, one below</a:t>
-            </a:r>
-            <a:endParaRPr lang="en-US" sz="1300" dirty="0"/>
+            <a:pPr algn="l" marL="342900" indent="-342900">
+              <a:lnSpc>
+                <a:spcPts val="1620"/>
+              </a:lnSpc>
+              <a:spcAft>
+                <a:spcPts val="300"/>
+              </a:spcAft>
+              <a:buSzPct val="100000"/>
+              <a:buChar char="•"/>
+            </a:pPr>
+            <a:r>
+              <a:rPr lang="en-US" sz="1200" b="1" dirty="0">
+                <a:solidFill>
+                  <a:srgbClr val="1C2833"/>
+                </a:solidFill>
+                <a:latin typeface="Arial" pitchFamily="34" charset="0"/>
+                <a:ea typeface="Arial" pitchFamily="34" charset="-122"/>
+                <a:cs typeface="Arial" pitchFamily="34" charset="-120"/>
+              </a:rPr>
+              <a:t>The right part — sign matters:</a:t>
+            </a:r>
+            <a:endParaRPr lang="en-US" sz="1200" dirty="0"/>
           </a:p>
         </p:txBody>
       </p:sp>
@@ -4166,8 +8931,8 @@
         </p:nvSpPr>
         <p:spPr>
           <a:xfrm>
-            <a:off x="692051" y="1343174"/>
-            <a:ext cx="7973389" cy="962025"/>
+            <a:off x="634901" y="2315617"/>
+            <a:ext cx="8102798" cy="544711"/>
           </a:xfrm>
           <a:prstGeom prst="rect">
             <a:avLst/>
@@ -4179,684 +8944,118 @@
           <a:bodyPr wrap="square" lIns="0" tIns="0" rIns="0" bIns="0" rtlCol="0" anchor="t"/>
           <a:lstStyle/>
           <a:p>
-            <a:pPr algn="l" indent="0" marL="0">
-              <a:lnSpc>
-                <a:spcPts val="1820"/>
-              </a:lnSpc>
-              <a:spcBef>
-                <a:spcPts val="300"/>
-              </a:spcBef>
-              <a:spcAft>
-                <a:spcPts val="300"/>
-              </a:spcAft>
-              <a:buNone/>
-            </a:pPr>
-            <a:r>
-              <a:rPr lang="en-US" sz="1300" dirty="0">
-                <a:solidFill>
-                  <a:srgbClr val="1C2833"/>
-                </a:solidFill>
-                <a:latin typeface="Georgia" pitchFamily="34" charset="0"/>
-                <a:ea typeface="Georgia" pitchFamily="34" charset="-122"/>
-                <a:cs typeface="Georgia" pitchFamily="34" charset="-120"/>
-              </a:rPr>
-              <a:t>1. Find the </a:t>
-            </a:r>
-            <a:pPr algn="l" indent="0" marL="0">
-              <a:lnSpc>
-                <a:spcPts val="1820"/>
-              </a:lnSpc>
-              <a:spcBef>
-                <a:spcPts val="300"/>
-              </a:spcBef>
-              <a:spcAft>
-                <a:spcPts val="300"/>
-              </a:spcAft>
-              <a:buNone/>
-            </a:pPr>
-            <a:r>
-              <a:rPr lang="en-US" sz="1300" b="1" i="1" dirty="0">
-                <a:solidFill>
-                  <a:srgbClr val="1C2833"/>
-                </a:solidFill>
-                <a:latin typeface="Georgia" pitchFamily="34" charset="0"/>
-                <a:ea typeface="Georgia" pitchFamily="34" charset="-122"/>
-                <a:cs typeface="Georgia" pitchFamily="34" charset="-120"/>
-              </a:rPr>
-              <a:t>excess</a:t>
-            </a:r>
-            <a:pPr algn="l" indent="0" marL="0">
-              <a:lnSpc>
-                <a:spcPts val="1820"/>
-              </a:lnSpc>
-              <a:spcBef>
-                <a:spcPts val="300"/>
-              </a:spcBef>
-              <a:spcAft>
-                <a:spcPts val="300"/>
-              </a:spcAft>
-              <a:buNone/>
-            </a:pPr>
-            <a:r>
-              <a:rPr lang="en-US" sz="1300" dirty="0">
-                <a:solidFill>
-                  <a:srgbClr val="1C2833"/>
-                </a:solidFill>
-                <a:latin typeface="Georgia" pitchFamily="34" charset="0"/>
-                <a:ea typeface="Georgia" pitchFamily="34" charset="-122"/>
-                <a:cs typeface="Georgia" pitchFamily="34" charset="-120"/>
-              </a:rPr>
-              <a:t> of the bigger number and the </a:t>
-            </a:r>
-            <a:pPr algn="l" indent="0" marL="0">
-              <a:lnSpc>
-                <a:spcPts val="1820"/>
-              </a:lnSpc>
-              <a:spcBef>
-                <a:spcPts val="300"/>
-              </a:spcBef>
-              <a:spcAft>
-                <a:spcPts val="300"/>
-              </a:spcAft>
-              <a:buNone/>
-            </a:pPr>
-            <a:r>
-              <a:rPr lang="en-US" sz="1300" b="1" i="1" dirty="0">
-                <a:solidFill>
-                  <a:srgbClr val="1C2833"/>
-                </a:solidFill>
-                <a:latin typeface="Georgia" pitchFamily="34" charset="0"/>
-                <a:ea typeface="Georgia" pitchFamily="34" charset="-122"/>
-                <a:cs typeface="Georgia" pitchFamily="34" charset="-120"/>
-              </a:rPr>
-              <a:t>deficit</a:t>
-            </a:r>
-            <a:pPr algn="l" indent="0" marL="0">
-              <a:lnSpc>
-                <a:spcPts val="1820"/>
-              </a:lnSpc>
-              <a:spcBef>
-                <a:spcPts val="300"/>
-              </a:spcBef>
-              <a:spcAft>
-                <a:spcPts val="300"/>
-              </a:spcAft>
-              <a:buNone/>
-            </a:pPr>
-            <a:r>
-              <a:rPr lang="en-US" sz="1300" dirty="0">
-                <a:solidFill>
-                  <a:srgbClr val="1C2833"/>
-                </a:solidFill>
-                <a:latin typeface="Georgia" pitchFamily="34" charset="0"/>
-                <a:ea typeface="Georgia" pitchFamily="34" charset="-122"/>
-                <a:cs typeface="Georgia" pitchFamily="34" charset="-120"/>
-              </a:rPr>
-              <a:t> of the smaller (or just signed: + for above 100, − for below). 2. LEFT: cross-subtract using signs. </a:t>
-            </a:r>
-            <a:pPr algn="l" indent="0" marL="0">
-              <a:lnSpc>
-                <a:spcPts val="1820"/>
-              </a:lnSpc>
-              <a:spcBef>
-                <a:spcPts val="300"/>
-              </a:spcBef>
-              <a:spcAft>
-                <a:spcPts val="300"/>
-              </a:spcAft>
-              <a:buNone/>
-            </a:pPr>
-            <a:r>
-              <a:rPr lang="en-US" sz="1300" i="1" dirty="0">
-                <a:solidFill>
-                  <a:srgbClr val="1C2833"/>
-                </a:solidFill>
-                <a:latin typeface="Georgia" pitchFamily="34" charset="0"/>
-                <a:ea typeface="Georgia" pitchFamily="34" charset="-122"/>
-                <a:cs typeface="Georgia" pitchFamily="34" charset="-120"/>
-              </a:rPr>
-              <a:t>102 + (−2) = 100</a:t>
-            </a:r>
-            <a:pPr algn="l" indent="0" marL="0">
-              <a:lnSpc>
-                <a:spcPts val="1820"/>
-              </a:lnSpc>
-              <a:spcBef>
-                <a:spcPts val="300"/>
-              </a:spcBef>
-              <a:spcAft>
-                <a:spcPts val="300"/>
-              </a:spcAft>
-              <a:buNone/>
-            </a:pPr>
-            <a:r>
-              <a:rPr lang="en-US" sz="1300" dirty="0">
-                <a:solidFill>
-                  <a:srgbClr val="1C2833"/>
-                </a:solidFill>
-                <a:latin typeface="Georgia" pitchFamily="34" charset="0"/>
-                <a:ea typeface="Georgia" pitchFamily="34" charset="-122"/>
-                <a:cs typeface="Georgia" pitchFamily="34" charset="-120"/>
-              </a:rPr>
-              <a:t>. Either cross still works. 3. RIGHT: multiply the two signed numbers. The RIGHT part is </a:t>
-            </a:r>
-            <a:pPr algn="l" indent="0" marL="0">
-              <a:lnSpc>
-                <a:spcPts val="1820"/>
-              </a:lnSpc>
-              <a:spcBef>
-                <a:spcPts val="300"/>
-              </a:spcBef>
-              <a:spcAft>
-                <a:spcPts val="300"/>
-              </a:spcAft>
-              <a:buNone/>
-            </a:pPr>
-            <a:r>
-              <a:rPr lang="en-US" sz="1300" b="1" i="1" dirty="0">
-                <a:solidFill>
-                  <a:srgbClr val="1C2833"/>
-                </a:solidFill>
-                <a:latin typeface="Georgia" pitchFamily="34" charset="0"/>
-                <a:ea typeface="Georgia" pitchFamily="34" charset="-122"/>
-                <a:cs typeface="Georgia" pitchFamily="34" charset="-120"/>
+            <a:pPr algn="l" marL="342900" indent="-342900">
+              <a:lnSpc>
+                <a:spcPts val="1620"/>
+              </a:lnSpc>
+              <a:spcAft>
+                <a:spcPts val="300"/>
+              </a:spcAft>
+              <a:buSzPct val="100000"/>
+              <a:buChar char="•"/>
+            </a:pPr>
+            <a:r>
+              <a:rPr lang="en-US" sz="1200" dirty="0">
+                <a:solidFill>
+                  <a:srgbClr val="1C2833"/>
+                </a:solidFill>
+                <a:latin typeface="Arial" pitchFamily="34" charset="0"/>
+                <a:ea typeface="Arial" pitchFamily="34" charset="-122"/>
+                <a:cs typeface="Arial" pitchFamily="34" charset="-120"/>
+              </a:rPr>
+              <a:t>(+2) × (−2) = −4</a:t>
+            </a:r>
+            <a:pPr algn="l" indent="0" marL="0">
+              <a:lnSpc>
+                <a:spcPts val="1620"/>
+              </a:lnSpc>
+              <a:spcAft>
+                <a:spcPts val="300"/>
+              </a:spcAft>
+              <a:buNone/>
+            </a:pPr>
+            <a:r>
+              <a:rPr lang="en-US" sz="1200" dirty="0">
+                <a:solidFill>
+                  <a:srgbClr val="1C2833"/>
+                </a:solidFill>
+                <a:latin typeface="Arial" pitchFamily="34" charset="0"/>
+                <a:ea typeface="Arial" pitchFamily="34" charset="-122"/>
+                <a:cs typeface="Arial" pitchFamily="34" charset="-120"/>
+              </a:rPr>
+              <a:t>.</a:t>
+            </a:r>
+            <a:endParaRPr lang="en-US" sz="1200" dirty="0"/>
+          </a:p>
+          <a:p>
+            <a:pPr algn="l" marL="342900" indent="-342900">
+              <a:lnSpc>
+                <a:spcPts val="1620"/>
+              </a:lnSpc>
+              <a:spcAft>
+                <a:spcPts val="300"/>
+              </a:spcAft>
+              <a:buSzPct val="100000"/>
+              <a:buChar char="•"/>
+            </a:pPr>
+            <a:r>
+              <a:rPr lang="en-US" sz="1200" dirty="0">
+                <a:solidFill>
+                  <a:srgbClr val="1C2833"/>
+                </a:solidFill>
+                <a:latin typeface="Arial" pitchFamily="34" charset="0"/>
+                <a:ea typeface="Arial" pitchFamily="34" charset="-122"/>
+                <a:cs typeface="Arial" pitchFamily="34" charset="-120"/>
+              </a:rPr>
+              <a:t>The right part is </a:t>
+            </a:r>
+            <a:pPr algn="l" indent="0" marL="0">
+              <a:lnSpc>
+                <a:spcPts val="1620"/>
+              </a:lnSpc>
+              <a:spcAft>
+                <a:spcPts val="300"/>
+              </a:spcAft>
+              <a:buNone/>
+            </a:pPr>
+            <a:r>
+              <a:rPr lang="en-US" sz="1200" b="1" dirty="0">
+                <a:solidFill>
+                  <a:srgbClr val="1C2833"/>
+                </a:solidFill>
+                <a:latin typeface="Arial" pitchFamily="34" charset="0"/>
+                <a:ea typeface="Arial" pitchFamily="34" charset="-122"/>
+                <a:cs typeface="Arial" pitchFamily="34" charset="-120"/>
               </a:rPr>
               <a:t>negative</a:t>
             </a:r>
             <a:pPr algn="l" indent="0" marL="0">
               <a:lnSpc>
-                <a:spcPts val="1820"/>
-              </a:lnSpc>
-              <a:spcBef>
-                <a:spcPts val="300"/>
-              </a:spcBef>
-              <a:spcAft>
-                <a:spcPts val="300"/>
-              </a:spcAft>
-              <a:buNone/>
-            </a:pPr>
-            <a:r>
-              <a:rPr lang="en-US" sz="1300" dirty="0">
-                <a:solidFill>
-                  <a:srgbClr val="1C2833"/>
-                </a:solidFill>
-                <a:latin typeface="Georgia" pitchFamily="34" charset="0"/>
-                <a:ea typeface="Georgia" pitchFamily="34" charset="-122"/>
-                <a:cs typeface="Georgia" pitchFamily="34" charset="-120"/>
-              </a:rPr>
-              <a:t>. 4. Subtract the absolute value of the right from </a:t>
-            </a:r>
-            <a:pPr algn="l" indent="0" marL="0">
-              <a:lnSpc>
-                <a:spcPts val="1820"/>
-              </a:lnSpc>
-              <a:spcBef>
-                <a:spcPts val="300"/>
-              </a:spcBef>
-              <a:spcAft>
-                <a:spcPts val="300"/>
-              </a:spcAft>
-              <a:buNone/>
-            </a:pPr>
-            <a:r>
-              <a:rPr lang="en-US" sz="1300" i="1" dirty="0">
-                <a:solidFill>
-                  <a:srgbClr val="1C2833"/>
-                </a:solidFill>
-                <a:latin typeface="Georgia" pitchFamily="34" charset="0"/>
-                <a:ea typeface="Georgia" pitchFamily="34" charset="-122"/>
-                <a:cs typeface="Georgia" pitchFamily="34" charset="-120"/>
-              </a:rPr>
-              <a:t>LEFT × 100</a:t>
-            </a:r>
-            <a:pPr algn="l" indent="0" marL="0">
-              <a:lnSpc>
-                <a:spcPts val="1820"/>
-              </a:lnSpc>
-              <a:spcBef>
-                <a:spcPts val="300"/>
-              </a:spcBef>
-              <a:spcAft>
-                <a:spcPts val="300"/>
-              </a:spcAft>
-              <a:buNone/>
-            </a:pPr>
-            <a:r>
-              <a:rPr lang="en-US" sz="1300" dirty="0">
-                <a:solidFill>
-                  <a:srgbClr val="1C2833"/>
-                </a:solidFill>
-                <a:latin typeface="Georgia" pitchFamily="34" charset="0"/>
-                <a:ea typeface="Georgia" pitchFamily="34" charset="-122"/>
-                <a:cs typeface="Georgia" pitchFamily="34" charset="-120"/>
-              </a:rPr>
-              <a:t>.</a:t>
-            </a:r>
-            <a:endParaRPr lang="en-US" sz="1300" dirty="0"/>
+                <a:spcPts val="1620"/>
+              </a:lnSpc>
+              <a:spcAft>
+                <a:spcPts val="300"/>
+              </a:spcAft>
+              <a:buNone/>
+            </a:pPr>
+            <a:r>
+              <a:rPr lang="en-US" sz="1200" dirty="0">
+                <a:solidFill>
+                  <a:srgbClr val="1C2833"/>
+                </a:solidFill>
+                <a:latin typeface="Arial" pitchFamily="34" charset="0"/>
+                <a:ea typeface="Arial" pitchFamily="34" charset="-122"/>
+                <a:cs typeface="Arial" pitchFamily="34" charset="-120"/>
+              </a:rPr>
+              <a:t>!</a:t>
+            </a:r>
+            <a:endParaRPr lang="en-US" sz="1200" dirty="0"/>
           </a:p>
         </p:txBody>
       </p:sp>
       <p:sp>
         <p:nvSpPr>
           <p:cNvPr id="8" name="Text 6"/>
-          <p:cNvSpPr/>
-          <p:nvPr/>
-        </p:nvSpPr>
-        <p:spPr>
-          <a:xfrm>
-            <a:off x="692051" y="2343299"/>
-            <a:ext cx="7973389" cy="461963"/>
-          </a:xfrm>
-          <a:prstGeom prst="rect">
-            <a:avLst/>
-          </a:prstGeom>
-          <a:noFill/>
-          <a:ln/>
-        </p:spPr>
-        <p:txBody>
-          <a:bodyPr wrap="square" lIns="0" tIns="0" rIns="0" bIns="0" rtlCol="0" anchor="t"/>
-          <a:lstStyle/>
-          <a:p>
-            <a:pPr algn="l" indent="0" marL="0">
-              <a:lnSpc>
-                <a:spcPts val="1820"/>
-              </a:lnSpc>
-              <a:spcBef>
-                <a:spcPts val="300"/>
-              </a:spcBef>
-              <a:spcAft>
-                <a:spcPts val="300"/>
-              </a:spcAft>
-              <a:buNone/>
-            </a:pPr>
-            <a:r>
-              <a:rPr lang="en-US" sz="1300" b="1" i="1" dirty="0">
-                <a:solidFill>
-                  <a:srgbClr val="1C2833"/>
-                </a:solidFill>
-                <a:latin typeface="Georgia" pitchFamily="34" charset="0"/>
-                <a:ea typeface="Georgia" pitchFamily="34" charset="-122"/>
-                <a:cs typeface="Georgia" pitchFamily="34" charset="-120"/>
-              </a:rPr>
-              <a:t>Examples:</a:t>
-            </a:r>
-            <a:pPr algn="l" indent="0" marL="0">
-              <a:lnSpc>
-                <a:spcPts val="1820"/>
-              </a:lnSpc>
-              <a:spcBef>
-                <a:spcPts val="300"/>
-              </a:spcBef>
-              <a:spcAft>
-                <a:spcPts val="300"/>
-              </a:spcAft>
-              <a:buNone/>
-            </a:pPr>
-            <a:r>
-              <a:rPr lang="en-US" sz="1300" dirty="0">
-                <a:solidFill>
-                  <a:srgbClr val="1C2833"/>
-                </a:solidFill>
-                <a:latin typeface="Georgia" pitchFamily="34" charset="0"/>
-                <a:ea typeface="Georgia" pitchFamily="34" charset="-122"/>
-                <a:cs typeface="Georgia" pitchFamily="34" charset="-120"/>
-              </a:rPr>
-              <a:t> - 102 × 98 → 100 | −4 → 10000 − 4 = </a:t>
-            </a:r>
-            <a:pPr algn="l" indent="0" marL="0">
-              <a:lnSpc>
-                <a:spcPts val="1820"/>
-              </a:lnSpc>
-              <a:spcBef>
-                <a:spcPts val="300"/>
-              </a:spcBef>
-              <a:spcAft>
-                <a:spcPts val="300"/>
-              </a:spcAft>
-              <a:buNone/>
-            </a:pPr>
-            <a:r>
-              <a:rPr lang="en-US" sz="1300" b="1" i="1" dirty="0">
-                <a:solidFill>
-                  <a:srgbClr val="1C2833"/>
-                </a:solidFill>
-                <a:latin typeface="Georgia" pitchFamily="34" charset="0"/>
-                <a:ea typeface="Georgia" pitchFamily="34" charset="-122"/>
-                <a:cs typeface="Georgia" pitchFamily="34" charset="-120"/>
-              </a:rPr>
-              <a:t>9996</a:t>
-            </a:r>
-            <a:pPr algn="l" indent="0" marL="0">
-              <a:lnSpc>
-                <a:spcPts val="1820"/>
-              </a:lnSpc>
-              <a:spcBef>
-                <a:spcPts val="300"/>
-              </a:spcBef>
-              <a:spcAft>
-                <a:spcPts val="300"/>
-              </a:spcAft>
-              <a:buNone/>
-            </a:pPr>
-            <a:r>
-              <a:rPr lang="en-US" sz="1300" dirty="0">
-                <a:solidFill>
-                  <a:srgbClr val="1C2833"/>
-                </a:solidFill>
-                <a:latin typeface="Georgia" pitchFamily="34" charset="0"/>
-                <a:ea typeface="Georgia" pitchFamily="34" charset="-122"/>
-                <a:cs typeface="Georgia" pitchFamily="34" charset="-120"/>
-              </a:rPr>
-              <a:t> - 104 × 96 → 100 | −16 → 10000 − 16 = </a:t>
-            </a:r>
-            <a:pPr algn="l" indent="0" marL="0">
-              <a:lnSpc>
-                <a:spcPts val="1820"/>
-              </a:lnSpc>
-              <a:spcBef>
-                <a:spcPts val="300"/>
-              </a:spcBef>
-              <a:spcAft>
-                <a:spcPts val="300"/>
-              </a:spcAft>
-              <a:buNone/>
-            </a:pPr>
-            <a:r>
-              <a:rPr lang="en-US" sz="1300" b="1" i="1" dirty="0">
-                <a:solidFill>
-                  <a:srgbClr val="1C2833"/>
-                </a:solidFill>
-                <a:latin typeface="Georgia" pitchFamily="34" charset="0"/>
-                <a:ea typeface="Georgia" pitchFamily="34" charset="-122"/>
-                <a:cs typeface="Georgia" pitchFamily="34" charset="-120"/>
-              </a:rPr>
-              <a:t>9984</a:t>
-            </a:r>
-            <a:pPr algn="l" indent="0" marL="0">
-              <a:lnSpc>
-                <a:spcPts val="1820"/>
-              </a:lnSpc>
-              <a:spcBef>
-                <a:spcPts val="300"/>
-              </a:spcBef>
-              <a:spcAft>
-                <a:spcPts val="300"/>
-              </a:spcAft>
-              <a:buNone/>
-            </a:pPr>
-            <a:r>
-              <a:rPr lang="en-US" sz="1300" dirty="0">
-                <a:solidFill>
-                  <a:srgbClr val="1C2833"/>
-                </a:solidFill>
-                <a:latin typeface="Georgia" pitchFamily="34" charset="0"/>
-                <a:ea typeface="Georgia" pitchFamily="34" charset="-122"/>
-                <a:cs typeface="Georgia" pitchFamily="34" charset="-120"/>
-              </a:rPr>
-              <a:t> - 108 × 95 → 103 | −40 → 10300 − 40 = </a:t>
-            </a:r>
-            <a:pPr algn="l" indent="0" marL="0">
-              <a:lnSpc>
-                <a:spcPts val="1820"/>
-              </a:lnSpc>
-              <a:spcBef>
-                <a:spcPts val="300"/>
-              </a:spcBef>
-              <a:spcAft>
-                <a:spcPts val="300"/>
-              </a:spcAft>
-              <a:buNone/>
-            </a:pPr>
-            <a:r>
-              <a:rPr lang="en-US" sz="1300" b="1" i="1" dirty="0">
-                <a:solidFill>
-                  <a:srgbClr val="1C2833"/>
-                </a:solidFill>
-                <a:latin typeface="Georgia" pitchFamily="34" charset="0"/>
-                <a:ea typeface="Georgia" pitchFamily="34" charset="-122"/>
-                <a:cs typeface="Georgia" pitchFamily="34" charset="-120"/>
-              </a:rPr>
-              <a:t>10260</a:t>
-            </a:r>
-            <a:endParaRPr lang="en-US" sz="1300" dirty="0"/>
-          </a:p>
-        </p:txBody>
-      </p:sp>
-      <p:sp>
-        <p:nvSpPr>
-          <p:cNvPr id="9" name="Text 7"/>
-          <p:cNvSpPr/>
-          <p:nvPr/>
-        </p:nvSpPr>
-        <p:spPr>
-          <a:xfrm>
-            <a:off x="692051" y="2843361"/>
-            <a:ext cx="7973389" cy="500063"/>
-          </a:xfrm>
-          <a:prstGeom prst="rect">
-            <a:avLst/>
-          </a:prstGeom>
-          <a:noFill/>
-          <a:ln/>
-        </p:spPr>
-        <p:txBody>
-          <a:bodyPr wrap="square" lIns="0" tIns="0" rIns="0" bIns="0" rtlCol="0" anchor="t"/>
-          <a:lstStyle/>
-          <a:p>
-            <a:pPr algn="l" indent="0" marL="0">
-              <a:lnSpc>
-                <a:spcPts val="1820"/>
-              </a:lnSpc>
-              <a:spcBef>
-                <a:spcPts val="300"/>
-              </a:spcBef>
-              <a:spcAft>
-                <a:spcPts val="300"/>
-              </a:spcAft>
-              <a:buNone/>
-            </a:pPr>
-            <a:r>
-              <a:rPr lang="en-US" sz="1300" dirty="0">
-                <a:solidFill>
-                  <a:srgbClr val="1C2833"/>
-                </a:solidFill>
-                <a:latin typeface="Georgia" pitchFamily="34" charset="0"/>
-                <a:ea typeface="Georgia" pitchFamily="34" charset="-122"/>
-                <a:cs typeface="Georgia" pitchFamily="34" charset="-120"/>
-              </a:rPr>
-              <a:t>Tip: for </a:t>
-            </a:r>
-            <a:pPr algn="l" indent="0" marL="0">
-              <a:lnSpc>
-                <a:spcPts val="1820"/>
-              </a:lnSpc>
-              <a:spcBef>
-                <a:spcPts val="300"/>
-              </a:spcBef>
-              <a:spcAft>
-                <a:spcPts val="300"/>
-              </a:spcAft>
-              <a:buNone/>
-            </a:pPr>
-            <a:r>
-              <a:rPr lang="en-US" sz="1300" i="1" dirty="0">
-                <a:solidFill>
-                  <a:srgbClr val="1C2833"/>
-                </a:solidFill>
-                <a:latin typeface="Georgia" pitchFamily="34" charset="0"/>
-                <a:ea typeface="Georgia" pitchFamily="34" charset="-122"/>
-                <a:cs typeface="Georgia" pitchFamily="34" charset="-120"/>
-              </a:rPr>
-              <a:t>(a+x)(a−y)</a:t>
-            </a:r>
-            <a:pPr algn="l" indent="0" marL="0">
-              <a:lnSpc>
-                <a:spcPts val="1820"/>
-              </a:lnSpc>
-              <a:spcBef>
-                <a:spcPts val="300"/>
-              </a:spcBef>
-              <a:spcAft>
-                <a:spcPts val="300"/>
-              </a:spcAft>
-              <a:buNone/>
-            </a:pPr>
-            <a:r>
-              <a:rPr lang="en-US" sz="1300" dirty="0">
-                <a:solidFill>
-                  <a:srgbClr val="1C2833"/>
-                </a:solidFill>
-                <a:latin typeface="Georgia" pitchFamily="34" charset="0"/>
-                <a:ea typeface="Georgia" pitchFamily="34" charset="-122"/>
-                <a:cs typeface="Georgia" pitchFamily="34" charset="-120"/>
-              </a:rPr>
-              <a:t> with a = base, the left is </a:t>
-            </a:r>
-            <a:pPr algn="l" indent="0" marL="0">
-              <a:lnSpc>
-                <a:spcPts val="1820"/>
-              </a:lnSpc>
-              <a:spcBef>
-                <a:spcPts val="300"/>
-              </a:spcBef>
-              <a:spcAft>
-                <a:spcPts val="300"/>
-              </a:spcAft>
-              <a:buNone/>
-            </a:pPr>
-            <a:r>
-              <a:rPr lang="en-US" sz="1300" i="1" dirty="0">
-                <a:solidFill>
-                  <a:srgbClr val="1C2833"/>
-                </a:solidFill>
-                <a:latin typeface="Georgia" pitchFamily="34" charset="0"/>
-                <a:ea typeface="Georgia" pitchFamily="34" charset="-122"/>
-                <a:cs typeface="Georgia" pitchFamily="34" charset="-120"/>
-              </a:rPr>
-              <a:t>a + x − y</a:t>
-            </a:r>
-            <a:pPr algn="l" indent="0" marL="0">
-              <a:lnSpc>
-                <a:spcPts val="1820"/>
-              </a:lnSpc>
-              <a:spcBef>
-                <a:spcPts val="300"/>
-              </a:spcBef>
-              <a:spcAft>
-                <a:spcPts val="300"/>
-              </a:spcAft>
-              <a:buNone/>
-            </a:pPr>
-            <a:r>
-              <a:rPr lang="en-US" sz="1300" dirty="0">
-                <a:solidFill>
-                  <a:srgbClr val="1C2833"/>
-                </a:solidFill>
-                <a:latin typeface="Georgia" pitchFamily="34" charset="0"/>
-                <a:ea typeface="Georgia" pitchFamily="34" charset="-122"/>
-                <a:cs typeface="Georgia" pitchFamily="34" charset="-120"/>
-              </a:rPr>
-              <a:t> and the right is </a:t>
-            </a:r>
-            <a:pPr algn="l" indent="0" marL="0">
-              <a:lnSpc>
-                <a:spcPts val="1820"/>
-              </a:lnSpc>
-              <a:spcBef>
-                <a:spcPts val="300"/>
-              </a:spcBef>
-              <a:spcAft>
-                <a:spcPts val="300"/>
-              </a:spcAft>
-              <a:buNone/>
-            </a:pPr>
-            <a:r>
-              <a:rPr lang="en-US" sz="1300" i="1" dirty="0">
-                <a:solidFill>
-                  <a:srgbClr val="1C2833"/>
-                </a:solidFill>
-                <a:latin typeface="Georgia" pitchFamily="34" charset="0"/>
-                <a:ea typeface="Georgia" pitchFamily="34" charset="-122"/>
-                <a:cs typeface="Georgia" pitchFamily="34" charset="-120"/>
-              </a:rPr>
-              <a:t>−xy</a:t>
-            </a:r>
-            <a:pPr algn="l" indent="0" marL="0">
-              <a:lnSpc>
-                <a:spcPts val="1820"/>
-              </a:lnSpc>
-              <a:spcBef>
-                <a:spcPts val="300"/>
-              </a:spcBef>
-              <a:spcAft>
-                <a:spcPts val="300"/>
-              </a:spcAft>
-              <a:buNone/>
-            </a:pPr>
-            <a:r>
-              <a:rPr lang="en-US" sz="1300" dirty="0">
-                <a:solidFill>
-                  <a:srgbClr val="1C2833"/>
-                </a:solidFill>
-                <a:latin typeface="Georgia" pitchFamily="34" charset="0"/>
-                <a:ea typeface="Georgia" pitchFamily="34" charset="-122"/>
-                <a:cs typeface="Georgia" pitchFamily="34" charset="-120"/>
-              </a:rPr>
-              <a:t>. Whenever excess equals deficit, the left is exactly the base and the answer is </a:t>
-            </a:r>
-            <a:pPr algn="l" indent="0" marL="0">
-              <a:lnSpc>
-                <a:spcPts val="1820"/>
-              </a:lnSpc>
-              <a:spcBef>
-                <a:spcPts val="300"/>
-              </a:spcBef>
-              <a:spcAft>
-                <a:spcPts val="300"/>
-              </a:spcAft>
-              <a:buNone/>
-            </a:pPr>
-            <a:r>
-              <a:rPr lang="en-US" sz="1300" i="1" dirty="0">
-                <a:solidFill>
-                  <a:srgbClr val="1C2833"/>
-                </a:solidFill>
-                <a:latin typeface="Georgia" pitchFamily="34" charset="0"/>
-                <a:ea typeface="Georgia" pitchFamily="34" charset="-122"/>
-                <a:cs typeface="Georgia" pitchFamily="34" charset="-120"/>
-              </a:rPr>
-              <a:t>base² − xy</a:t>
-            </a:r>
-            <a:pPr algn="l" indent="0" marL="0">
-              <a:lnSpc>
-                <a:spcPts val="1820"/>
-              </a:lnSpc>
-              <a:spcBef>
-                <a:spcPts val="300"/>
-              </a:spcBef>
-              <a:spcAft>
-                <a:spcPts val="300"/>
-              </a:spcAft>
-              <a:buNone/>
-            </a:pPr>
-            <a:r>
-              <a:rPr lang="en-US" sz="1300" dirty="0">
-                <a:solidFill>
-                  <a:srgbClr val="1C2833"/>
-                </a:solidFill>
-                <a:latin typeface="Georgia" pitchFamily="34" charset="0"/>
-                <a:ea typeface="Georgia" pitchFamily="34" charset="-122"/>
-                <a:cs typeface="Georgia" pitchFamily="34" charset="-120"/>
-              </a:rPr>
-              <a:t>.</a:t>
-            </a:r>
-            <a:endParaRPr lang="en-US" sz="1300" dirty="0"/>
-          </a:p>
-        </p:txBody>
-      </p:sp>
-      <p:sp>
-        <p:nvSpPr>
-          <p:cNvPr id="10" name="Text 8"/>
           <p:cNvSpPr/>
           <p:nvPr/>
         </p:nvSpPr>
@@ -5006,7 +9205,7 @@
                 <a:ea typeface="Georgia" pitchFamily="34" charset="-122"/>
                 <a:cs typeface="Georgia" pitchFamily="34" charset="-120"/>
               </a:rPr>
-              <a:t>Homework</a:t>
+              <a:t>Core (15 min) — One above, one below (cont.)</a:t>
             </a:r>
             <a:endParaRPr lang="en-US" sz="1800" dirty="0"/>
           </a:p>
@@ -5020,8 +9219,8 @@
         </p:nvSpPr>
         <p:spPr>
           <a:xfrm>
-            <a:off x="406301" y="870942"/>
-            <a:ext cx="8498026" cy="426541"/>
+            <a:off x="634901" y="883593"/>
+            <a:ext cx="8102798" cy="281880"/>
           </a:xfrm>
           <a:prstGeom prst="rect">
             <a:avLst/>
@@ -5033,17 +9232,61 @@
           <a:bodyPr wrap="square" lIns="0" tIns="0" rIns="0" bIns="0" rtlCol="0" anchor="t"/>
           <a:lstStyle/>
           <a:p>
-            <a:pPr algn="l" indent="0" marL="0">
-              <a:lnSpc>
-                <a:spcPts val="1680"/>
-              </a:lnSpc>
-              <a:spcBef>
-                <a:spcPts val="300"/>
-              </a:spcBef>
-              <a:spcAft>
-                <a:spcPts val="300"/>
-              </a:spcAft>
-              <a:buNone/>
+            <a:pPr algn="l" marL="342900" indent="-342900">
+              <a:lnSpc>
+                <a:spcPts val="1620"/>
+              </a:lnSpc>
+              <a:spcAft>
+                <a:spcPts val="300"/>
+              </a:spcAft>
+              <a:buSzPct val="100000"/>
+              <a:buChar char="•"/>
+            </a:pPr>
+            <a:r>
+              <a:rPr lang="en-US" sz="1200" b="1" dirty="0">
+                <a:solidFill>
+                  <a:srgbClr val="1C2833"/>
+                </a:solidFill>
+                <a:latin typeface="Arial" pitchFamily="34" charset="0"/>
+                <a:ea typeface="Arial" pitchFamily="34" charset="-122"/>
+                <a:cs typeface="Arial" pitchFamily="34" charset="-120"/>
+              </a:rPr>
+              <a:t>What does it mean to have a "negative" right part?</a:t>
+            </a:r>
+            <a:endParaRPr lang="en-US" sz="1200" dirty="0"/>
+          </a:p>
+        </p:txBody>
+      </p:sp>
+      <p:sp>
+        <p:nvSpPr>
+          <p:cNvPr id="5" name="Text 3"/>
+          <p:cNvSpPr/>
+          <p:nvPr/>
+        </p:nvSpPr>
+        <p:spPr>
+          <a:xfrm>
+            <a:off x="634901" y="1266974"/>
+            <a:ext cx="8102798" cy="544711"/>
+          </a:xfrm>
+          <a:prstGeom prst="rect">
+            <a:avLst/>
+          </a:prstGeom>
+          <a:noFill/>
+          <a:ln/>
+        </p:spPr>
+        <p:txBody>
+          <a:bodyPr wrap="square" lIns="0" tIns="0" rIns="0" bIns="0" rtlCol="0" anchor="t"/>
+          <a:lstStyle/>
+          <a:p>
+            <a:pPr algn="l" marL="342900" indent="-342900">
+              <a:lnSpc>
+                <a:spcPts val="1620"/>
+              </a:lnSpc>
+              <a:spcAft>
+                <a:spcPts val="300"/>
+              </a:spcAft>
+              <a:buSzPct val="100000"/>
+              <a:buChar char="•"/>
             </a:pPr>
             <a:r>
               <a:rPr lang="en-US" sz="1200" dirty="0">
@@ -5054,15 +9297,159 @@
                 <a:ea typeface="Arial" pitchFamily="34" charset="-122"/>
                 <a:cs typeface="Arial" pitchFamily="34" charset="-120"/>
               </a:rPr>
-              <a:t>– 10 mixed problems (mix of both-below, both-above, and mixed-sign). Decide the case first. – Find ONE example in your textbook where mixed-sign Nikhilam would be faster than long multiplication. Bring it.</a:t>
+              <a:t>Concatenating "100" and "−4" gives... </a:t>
+            </a:r>
+            <a:pPr algn="l" indent="0" marL="0">
+              <a:lnSpc>
+                <a:spcPts val="1620"/>
+              </a:lnSpc>
+              <a:spcAft>
+                <a:spcPts val="300"/>
+              </a:spcAft>
+              <a:buNone/>
+            </a:pPr>
+            <a:r>
+              <a:rPr lang="en-US" sz="1200" dirty="0">
+                <a:solidFill>
+                  <a:srgbClr val="1C2833"/>
+                </a:solidFill>
+                <a:latin typeface="Arial" pitchFamily="34" charset="0"/>
+                <a:ea typeface="Arial" pitchFamily="34" charset="-122"/>
+                <a:cs typeface="Arial" pitchFamily="34" charset="-120"/>
+              </a:rPr>
+              <a:t>100 | −4</a:t>
+            </a:r>
+            <a:pPr algn="l" indent="0" marL="0">
+              <a:lnSpc>
+                <a:spcPts val="1620"/>
+              </a:lnSpc>
+              <a:spcAft>
+                <a:spcPts val="300"/>
+              </a:spcAft>
+              <a:buNone/>
+            </a:pPr>
+            <a:r>
+              <a:rPr lang="en-US" sz="1200" dirty="0">
+                <a:solidFill>
+                  <a:srgbClr val="1C2833"/>
+                </a:solidFill>
+                <a:latin typeface="Arial" pitchFamily="34" charset="0"/>
+                <a:ea typeface="Arial" pitchFamily="34" charset="-122"/>
+                <a:cs typeface="Arial" pitchFamily="34" charset="-120"/>
+              </a:rPr>
+              <a:t> = </a:t>
+            </a:r>
+            <a:pPr algn="l" indent="0" marL="0">
+              <a:lnSpc>
+                <a:spcPts val="1620"/>
+              </a:lnSpc>
+              <a:spcAft>
+                <a:spcPts val="300"/>
+              </a:spcAft>
+              <a:buNone/>
+            </a:pPr>
+            <a:r>
+              <a:rPr lang="en-US" sz="1200" dirty="0">
+                <a:solidFill>
+                  <a:srgbClr val="1C2833"/>
+                </a:solidFill>
+                <a:latin typeface="Arial" pitchFamily="34" charset="0"/>
+                <a:ea typeface="Arial" pitchFamily="34" charset="-122"/>
+                <a:cs typeface="Arial" pitchFamily="34" charset="-120"/>
+              </a:rPr>
+              <a:t>100 × 100 + (−4)</a:t>
+            </a:r>
+            <a:pPr algn="l" indent="0" marL="0">
+              <a:lnSpc>
+                <a:spcPts val="1620"/>
+              </a:lnSpc>
+              <a:spcAft>
+                <a:spcPts val="300"/>
+              </a:spcAft>
+              <a:buNone/>
+            </a:pPr>
+            <a:r>
+              <a:rPr lang="en-US" sz="1200" dirty="0">
+                <a:solidFill>
+                  <a:srgbClr val="1C2833"/>
+                </a:solidFill>
+                <a:latin typeface="Arial" pitchFamily="34" charset="0"/>
+                <a:ea typeface="Arial" pitchFamily="34" charset="-122"/>
+                <a:cs typeface="Arial" pitchFamily="34" charset="-120"/>
+              </a:rPr>
+              <a:t> = 10000 − 4 = </a:t>
+            </a:r>
+            <a:pPr algn="l" indent="0" marL="0">
+              <a:lnSpc>
+                <a:spcPts val="1620"/>
+              </a:lnSpc>
+              <a:spcAft>
+                <a:spcPts val="300"/>
+              </a:spcAft>
+              <a:buNone/>
+            </a:pPr>
+            <a:r>
+              <a:rPr lang="en-US" sz="1200" b="1" dirty="0">
+                <a:solidFill>
+                  <a:srgbClr val="1C2833"/>
+                </a:solidFill>
+                <a:latin typeface="Arial" pitchFamily="34" charset="0"/>
+                <a:ea typeface="Arial" pitchFamily="34" charset="-122"/>
+                <a:cs typeface="Arial" pitchFamily="34" charset="-120"/>
+              </a:rPr>
+              <a:t>9996</a:t>
+            </a:r>
+            <a:pPr algn="l" indent="0" marL="0">
+              <a:lnSpc>
+                <a:spcPts val="1620"/>
+              </a:lnSpc>
+              <a:spcAft>
+                <a:spcPts val="300"/>
+              </a:spcAft>
+              <a:buNone/>
+            </a:pPr>
+            <a:r>
+              <a:rPr lang="en-US" sz="1200" dirty="0">
+                <a:solidFill>
+                  <a:srgbClr val="1C2833"/>
+                </a:solidFill>
+                <a:latin typeface="Arial" pitchFamily="34" charset="0"/>
+                <a:ea typeface="Arial" pitchFamily="34" charset="-122"/>
+                <a:cs typeface="Arial" pitchFamily="34" charset="-120"/>
+              </a:rPr>
+              <a:t>.</a:t>
             </a:r>
             <a:endParaRPr lang="en-US" sz="1200" dirty="0"/>
           </a:p>
-        </p:txBody>
-      </p:sp>
-      <p:sp>
-        <p:nvSpPr>
-          <p:cNvPr id="5" name="Text 3"/>
+          <a:p>
+            <a:pPr algn="l" marL="342900" indent="-342900">
+              <a:lnSpc>
+                <a:spcPts val="1620"/>
+              </a:lnSpc>
+              <a:spcAft>
+                <a:spcPts val="300"/>
+              </a:spcAft>
+              <a:buSzPct val="100000"/>
+              <a:buChar char="•"/>
+            </a:pPr>
+            <a:r>
+              <a:rPr lang="en-US" sz="1200" dirty="0">
+                <a:solidFill>
+                  <a:srgbClr val="1C2833"/>
+                </a:solidFill>
+                <a:latin typeface="Arial" pitchFamily="34" charset="0"/>
+                <a:ea typeface="Arial" pitchFamily="34" charset="-122"/>
+                <a:cs typeface="Arial" pitchFamily="34" charset="-120"/>
+              </a:rPr>
+              <a:t>Check: 102 × 98 = 9996. ✓</a:t>
+            </a:r>
+            <a:endParaRPr lang="en-US" sz="1200" dirty="0"/>
+          </a:p>
+        </p:txBody>
+      </p:sp>
+      <p:sp>
+        <p:nvSpPr>
+          <p:cNvPr id="6" name="Text 4"/>
           <p:cNvSpPr/>
           <p:nvPr/>
         </p:nvSpPr>
@@ -5212,7 +9599,7 @@
                 <a:ea typeface="Georgia" pitchFamily="34" charset="-122"/>
                 <a:cs typeface="Georgia" pitchFamily="34" charset="-120"/>
               </a:rPr>
-              <a:t>Differentiation</a:t>
+              <a:t>Core (15 min) — One above, one below (cont.)</a:t>
             </a:r>
             <a:endParaRPr lang="en-US" sz="1800" dirty="0"/>
           </a:p>
@@ -5227,7 +9614,7 @@
         <p:spPr>
           <a:xfrm>
             <a:off x="634901" y="883593"/>
-            <a:ext cx="8102798" cy="975122"/>
+            <a:ext cx="8102798" cy="281880"/>
           </a:xfrm>
           <a:prstGeom prst="rect">
             <a:avLst/>
@@ -5258,7 +9645,7 @@
                 <a:ea typeface="Arial" pitchFamily="34" charset="-122"/>
                 <a:cs typeface="Arial" pitchFamily="34" charset="-120"/>
               </a:rPr>
-              <a:t>Tier up:</a:t>
+              <a:t>The "borrow" maneuver — cleaner mental version.</a:t>
             </a:r>
             <a:pPr algn="l" indent="0" marL="0">
               <a:lnSpc>
@@ -5278,130 +9665,32 @@
                 <a:ea typeface="Arial" pitchFamily="34" charset="-122"/>
                 <a:cs typeface="Arial" pitchFamily="34" charset="-120"/>
               </a:rPr>
-              <a:t> Try </a:t>
-            </a:r>
-            <a:pPr algn="l" indent="0" marL="0">
-              <a:lnSpc>
-                <a:spcPts val="1620"/>
-              </a:lnSpc>
-              <a:spcAft>
-                <a:spcPts val="300"/>
-              </a:spcAft>
-              <a:buNone/>
-            </a:pPr>
-            <a:r>
-              <a:rPr lang="en-US" sz="1200" dirty="0">
-                <a:solidFill>
-                  <a:srgbClr val="1C2833"/>
-                </a:solidFill>
-                <a:latin typeface="Arial" pitchFamily="34" charset="0"/>
-                <a:ea typeface="Arial" pitchFamily="34" charset="-122"/>
-                <a:cs typeface="Arial" pitchFamily="34" charset="-120"/>
-              </a:rPr>
-              <a:t>121 × 79</a:t>
-            </a:r>
-            <a:pPr algn="l" indent="0" marL="0">
-              <a:lnSpc>
-                <a:spcPts val="1620"/>
-              </a:lnSpc>
-              <a:spcAft>
-                <a:spcPts val="300"/>
-              </a:spcAft>
-              <a:buNone/>
-            </a:pPr>
-            <a:r>
-              <a:rPr lang="en-US" sz="1200" dirty="0">
-                <a:solidFill>
-                  <a:srgbClr val="1C2833"/>
-                </a:solidFill>
-                <a:latin typeface="Arial" pitchFamily="34" charset="0"/>
-                <a:ea typeface="Arial" pitchFamily="34" charset="-122"/>
-                <a:cs typeface="Arial" pitchFamily="34" charset="-120"/>
-              </a:rPr>
-              <a:t> (further from 100). Excess +21, deficit −21. Cross: 121 − 21 = 100. Right: +21 × −21 = −441. Answer: 10000 − 441 = </a:t>
-            </a:r>
-            <a:pPr algn="l" indent="0" marL="0">
-              <a:lnSpc>
-                <a:spcPts val="1620"/>
-              </a:lnSpc>
-              <a:spcAft>
-                <a:spcPts val="300"/>
-              </a:spcAft>
-              <a:buNone/>
-            </a:pPr>
-            <a:r>
-              <a:rPr lang="en-US" sz="1200" b="1" dirty="0">
-                <a:solidFill>
-                  <a:srgbClr val="1C2833"/>
-                </a:solidFill>
-                <a:latin typeface="Arial" pitchFamily="34" charset="0"/>
-                <a:ea typeface="Arial" pitchFamily="34" charset="-122"/>
-                <a:cs typeface="Arial" pitchFamily="34" charset="-120"/>
-              </a:rPr>
-              <a:t>9559</a:t>
-            </a:r>
-            <a:pPr algn="l" indent="0" marL="0">
-              <a:lnSpc>
-                <a:spcPts val="1620"/>
-              </a:lnSpc>
-              <a:spcAft>
-                <a:spcPts val="300"/>
-              </a:spcAft>
-              <a:buNone/>
-            </a:pPr>
-            <a:r>
-              <a:rPr lang="en-US" sz="1200" dirty="0">
-                <a:solidFill>
-                  <a:srgbClr val="1C2833"/>
-                </a:solidFill>
-                <a:latin typeface="Arial" pitchFamily="34" charset="0"/>
-                <a:ea typeface="Arial" pitchFamily="34" charset="-122"/>
-                <a:cs typeface="Arial" pitchFamily="34" charset="-120"/>
-              </a:rPr>
-              <a:t>. (Equivalently: (100+21)(100−21) = 100² − 21² = 10000 − 441.) Notice you've just used the </a:t>
-            </a:r>
-            <a:pPr algn="l" indent="0" marL="0">
-              <a:lnSpc>
-                <a:spcPts val="1620"/>
-              </a:lnSpc>
-              <a:spcAft>
-                <a:spcPts val="300"/>
-              </a:spcAft>
-              <a:buNone/>
-            </a:pPr>
-            <a:r>
-              <a:rPr lang="en-US" sz="1200" i="1" dirty="0">
-                <a:solidFill>
-                  <a:srgbClr val="1C2833"/>
-                </a:solidFill>
-                <a:latin typeface="Arial" pitchFamily="34" charset="0"/>
-                <a:ea typeface="Arial" pitchFamily="34" charset="-122"/>
-                <a:cs typeface="Arial" pitchFamily="34" charset="-120"/>
-              </a:rPr>
-              <a:t>difference of squares</a:t>
-            </a:r>
-            <a:pPr algn="l" indent="0" marL="0">
-              <a:lnSpc>
-                <a:spcPts val="1620"/>
-              </a:lnSpc>
-              <a:spcAft>
-                <a:spcPts val="300"/>
-              </a:spcAft>
-              <a:buNone/>
-            </a:pPr>
-            <a:r>
-              <a:rPr lang="en-US" sz="1200" dirty="0">
-                <a:solidFill>
-                  <a:srgbClr val="1C2833"/>
-                </a:solidFill>
-                <a:latin typeface="Arial" pitchFamily="34" charset="0"/>
-                <a:ea typeface="Arial" pitchFamily="34" charset="-122"/>
-                <a:cs typeface="Arial" pitchFamily="34" charset="-120"/>
-              </a:rPr>
-              <a:t> identity. Connect to algebra.</a:t>
+              <a:t> Same problem:</a:t>
             </a:r>
             <a:endParaRPr lang="en-US" sz="1200" dirty="0"/>
           </a:p>
+        </p:txBody>
+      </p:sp>
+      <p:sp>
+        <p:nvSpPr>
+          <p:cNvPr id="5" name="Text 3"/>
+          <p:cNvSpPr/>
+          <p:nvPr/>
+        </p:nvSpPr>
+        <p:spPr>
+          <a:xfrm>
+            <a:off x="634901" y="1266974"/>
+            <a:ext cx="8102798" cy="544711"/>
+          </a:xfrm>
+          <a:prstGeom prst="rect">
+            <a:avLst/>
+          </a:prstGeom>
+          <a:noFill/>
+          <a:ln/>
+        </p:spPr>
+        <p:txBody>
+          <a:bodyPr wrap="square" lIns="0" tIns="0" rIns="0" bIns="0" rtlCol="0" anchor="t"/>
+          <a:lstStyle/>
           <a:p>
             <a:pPr algn="l" marL="342900" indent="-342900">
               <a:lnSpc>
@@ -5414,6 +9703,90 @@
               <a:buChar char="•"/>
             </a:pPr>
             <a:r>
+              <a:rPr lang="en-US" sz="1200" dirty="0">
+                <a:solidFill>
+                  <a:srgbClr val="1C2833"/>
+                </a:solidFill>
+                <a:latin typeface="Arial" pitchFamily="34" charset="0"/>
+                <a:ea typeface="Arial" pitchFamily="34" charset="-122"/>
+                <a:cs typeface="Arial" pitchFamily="34" charset="-120"/>
+              </a:rPr>
+              <a:t>The negative right part of </a:t>
+            </a:r>
+            <a:pPr algn="l" indent="0" marL="0">
+              <a:lnSpc>
+                <a:spcPts val="1620"/>
+              </a:lnSpc>
+              <a:spcAft>
+                <a:spcPts val="300"/>
+              </a:spcAft>
+              <a:buNone/>
+            </a:pPr>
+            <a:r>
+              <a:rPr lang="en-US" sz="1200" dirty="0">
+                <a:solidFill>
+                  <a:srgbClr val="1C2833"/>
+                </a:solidFill>
+                <a:latin typeface="Arial" pitchFamily="34" charset="0"/>
+                <a:ea typeface="Arial" pitchFamily="34" charset="-122"/>
+                <a:cs typeface="Arial" pitchFamily="34" charset="-120"/>
+              </a:rPr>
+              <a:t>−4</a:t>
+            </a:r>
+            <a:pPr algn="l" indent="0" marL="0">
+              <a:lnSpc>
+                <a:spcPts val="1620"/>
+              </a:lnSpc>
+              <a:spcAft>
+                <a:spcPts val="300"/>
+              </a:spcAft>
+              <a:buNone/>
+            </a:pPr>
+            <a:r>
+              <a:rPr lang="en-US" sz="1200" dirty="0">
+                <a:solidFill>
+                  <a:srgbClr val="1C2833"/>
+                </a:solidFill>
+                <a:latin typeface="Arial" pitchFamily="34" charset="0"/>
+                <a:ea typeface="Arial" pitchFamily="34" charset="-122"/>
+                <a:cs typeface="Arial" pitchFamily="34" charset="-120"/>
+              </a:rPr>
+              <a:t> says: "subtract 4 from the natural concatenation 100|00 = 10000."</a:t>
+            </a:r>
+            <a:endParaRPr lang="en-US" sz="1200" dirty="0"/>
+          </a:p>
+          <a:p>
+            <a:pPr algn="l" marL="342900" indent="-342900">
+              <a:lnSpc>
+                <a:spcPts val="1620"/>
+              </a:lnSpc>
+              <a:spcAft>
+                <a:spcPts val="300"/>
+              </a:spcAft>
+              <a:buSzPct val="100000"/>
+              <a:buChar char="•"/>
+            </a:pPr>
+            <a:r>
+              <a:rPr lang="en-US" sz="1200" dirty="0">
+                <a:solidFill>
+                  <a:srgbClr val="1C2833"/>
+                </a:solidFill>
+                <a:latin typeface="Arial" pitchFamily="34" charset="0"/>
+                <a:ea typeface="Arial" pitchFamily="34" charset="-122"/>
+                <a:cs typeface="Arial" pitchFamily="34" charset="-120"/>
+              </a:rPr>
+              <a:t>So 102 × 98 = 10000 − 4 = </a:t>
+            </a:r>
+            <a:pPr algn="l" indent="0" marL="0">
+              <a:lnSpc>
+                <a:spcPts val="1620"/>
+              </a:lnSpc>
+              <a:spcAft>
+                <a:spcPts val="300"/>
+              </a:spcAft>
+              <a:buNone/>
+            </a:pPr>
+            <a:r>
               <a:rPr lang="en-US" sz="1200" b="1" dirty="0">
                 <a:solidFill>
                   <a:srgbClr val="1C2833"/>
@@ -5422,7 +9795,7 @@
                 <a:ea typeface="Arial" pitchFamily="34" charset="-122"/>
                 <a:cs typeface="Arial" pitchFamily="34" charset="-120"/>
               </a:rPr>
-              <a:t>Tier down:</a:t>
+              <a:t>9996</a:t>
             </a:r>
             <a:pPr algn="l" indent="0" marL="0">
               <a:lnSpc>
@@ -5442,87 +9815,7 @@
                 <a:ea typeface="Arial" pitchFamily="34" charset="-122"/>
                 <a:cs typeface="Arial" pitchFamily="34" charset="-120"/>
               </a:rPr>
-              <a:t> Stay with </a:t>
-            </a:r>
-            <a:pPr algn="l" indent="0" marL="0">
-              <a:lnSpc>
-                <a:spcPts val="1620"/>
-              </a:lnSpc>
-              <a:spcAft>
-                <a:spcPts val="300"/>
-              </a:spcAft>
-              <a:buNone/>
-            </a:pPr>
-            <a:r>
-              <a:rPr lang="en-US" sz="1200" dirty="0">
-                <a:solidFill>
-                  <a:srgbClr val="1C2833"/>
-                </a:solidFill>
-                <a:latin typeface="Arial" pitchFamily="34" charset="0"/>
-                <a:ea typeface="Arial" pitchFamily="34" charset="-122"/>
-                <a:cs typeface="Arial" pitchFamily="34" charset="-120"/>
-              </a:rPr>
-              <a:t>102 × 99</a:t>
-            </a:r>
-            <a:pPr algn="l" indent="0" marL="0">
-              <a:lnSpc>
-                <a:spcPts val="1620"/>
-              </a:lnSpc>
-              <a:spcAft>
-                <a:spcPts val="300"/>
-              </a:spcAft>
-              <a:buNone/>
-            </a:pPr>
-            <a:r>
-              <a:rPr lang="en-US" sz="1200" dirty="0">
-                <a:solidFill>
-                  <a:srgbClr val="1C2833"/>
-                </a:solidFill>
-                <a:latin typeface="Arial" pitchFamily="34" charset="0"/>
-                <a:ea typeface="Arial" pitchFamily="34" charset="-122"/>
-                <a:cs typeface="Arial" pitchFamily="34" charset="-120"/>
-              </a:rPr>
-              <a:t>, </a:t>
-            </a:r>
-            <a:pPr algn="l" indent="0" marL="0">
-              <a:lnSpc>
-                <a:spcPts val="1620"/>
-              </a:lnSpc>
-              <a:spcAft>
-                <a:spcPts val="300"/>
-              </a:spcAft>
-              <a:buNone/>
-            </a:pPr>
-            <a:r>
-              <a:rPr lang="en-US" sz="1200" dirty="0">
-                <a:solidFill>
-                  <a:srgbClr val="1C2833"/>
-                </a:solidFill>
-                <a:latin typeface="Arial" pitchFamily="34" charset="0"/>
-                <a:ea typeface="Arial" pitchFamily="34" charset="-122"/>
-                <a:cs typeface="Arial" pitchFamily="34" charset="-120"/>
-              </a:rPr>
-              <a:t>103 × 98</a:t>
-            </a:r>
-            <a:pPr algn="l" indent="0" marL="0">
-              <a:lnSpc>
-                <a:spcPts val="1620"/>
-              </a:lnSpc>
-              <a:spcAft>
-                <a:spcPts val="300"/>
-              </a:spcAft>
-              <a:buNone/>
-            </a:pPr>
-            <a:r>
-              <a:rPr lang="en-US" sz="1200" dirty="0">
-                <a:solidFill>
-                  <a:srgbClr val="1C2833"/>
-                </a:solidFill>
-                <a:latin typeface="Arial" pitchFamily="34" charset="0"/>
-                <a:ea typeface="Arial" pitchFamily="34" charset="-122"/>
-                <a:cs typeface="Arial" pitchFamily="34" charset="-120"/>
-              </a:rPr>
-              <a:t> (small differences). Build up the sign care before tackling larger gaps.</a:t>
+              <a:t>. Clean.</a:t>
             </a:r>
             <a:endParaRPr lang="en-US" sz="1200" dirty="0"/>
           </a:p>
@@ -5530,7 +9823,7 @@
       </p:sp>
       <p:sp>
         <p:nvSpPr>
-          <p:cNvPr id="5" name="Text 3"/>
+          <p:cNvPr id="6" name="Text 4"/>
           <p:cNvSpPr/>
           <p:nvPr/>
         </p:nvSpPr>
